--- a/Logs/Testing.pptx
+++ b/Logs/Testing.pptx
@@ -4,6 +4,9 @@
   <p:sldMasterIdLst>
     <p:sldMasterId id="2147483648" r:id="rId1"/>
   </p:sldMasterIdLst>
+  <p:notesMasterIdLst>
+    <p:notesMasterId r:id="rId45"/>
+  </p:notesMasterIdLst>
   <p:sldIdLst>
     <p:sldId id="299" r:id="rId2"/>
     <p:sldId id="300" r:id="rId3"/>
@@ -42,7 +45,12 @@
     <p:sldId id="334" r:id="rId36"/>
     <p:sldId id="335" r:id="rId37"/>
     <p:sldId id="336" r:id="rId38"/>
-    <p:sldId id="337" r:id="rId39"/>
+    <p:sldId id="338" r:id="rId39"/>
+    <p:sldId id="339" r:id="rId40"/>
+    <p:sldId id="340" r:id="rId41"/>
+    <p:sldId id="341" r:id="rId42"/>
+    <p:sldId id="342" r:id="rId43"/>
+    <p:sldId id="337" r:id="rId44"/>
   </p:sldIdLst>
   <p:sldSz cx="12192000" cy="6858000"/>
   <p:notesSz cx="6858000" cy="9144000"/>
@@ -141,7 +149,661 @@
       </a:defRPr>
     </a:lvl9pPr>
   </p:defaultTextStyle>
+  <p:extLst>
+    <p:ext uri="{EFAFB233-063F-42B5-8137-9DF3F51BA10A}">
+      <p15:sldGuideLst xmlns:p15="http://schemas.microsoft.com/office/powerpoint/2012/main"/>
+    </p:ext>
+  </p:extLst>
 </p:presentation>
+</file>
+
+<file path=ppt/notesMasters/notesMaster1.xml><?xml version="1.0" encoding="utf-8"?>
+<p:notesMaster xmlns:a="http://schemas.openxmlformats.org/drawingml/2006/main" xmlns:r="http://schemas.openxmlformats.org/officeDocument/2006/relationships" xmlns:p="http://schemas.openxmlformats.org/presentationml/2006/main">
+  <p:cSld>
+    <p:bg>
+      <p:bgRef idx="1001">
+        <a:schemeClr val="bg1"/>
+      </p:bgRef>
+    </p:bg>
+    <p:spTree>
+      <p:nvGrpSpPr>
+        <p:cNvPr id="1" name=""/>
+        <p:cNvGrpSpPr/>
+        <p:nvPr/>
+      </p:nvGrpSpPr>
+      <p:grpSpPr>
+        <a:xfrm>
+          <a:off x="0" y="0"/>
+          <a:ext cx="0" cy="0"/>
+          <a:chOff x="0" y="0"/>
+          <a:chExt cx="0" cy="0"/>
+        </a:xfrm>
+      </p:grpSpPr>
+      <p:sp>
+        <p:nvSpPr>
+          <p:cNvPr id="2" name="Header Placeholder 1"/>
+          <p:cNvSpPr>
+            <a:spLocks noGrp="1"/>
+          </p:cNvSpPr>
+          <p:nvPr>
+            <p:ph type="hdr" sz="quarter"/>
+          </p:nvPr>
+        </p:nvSpPr>
+        <p:spPr>
+          <a:xfrm>
+            <a:off x="0" y="0"/>
+            <a:ext cx="2971800" cy="458788"/>
+          </a:xfrm>
+          <a:prstGeom prst="rect">
+            <a:avLst/>
+          </a:prstGeom>
+        </p:spPr>
+        <p:txBody>
+          <a:bodyPr vert="horz" lIns="91440" tIns="45720" rIns="91440" bIns="45720" rtlCol="0"/>
+          <a:lstStyle>
+            <a:lvl1pPr algn="l">
+              <a:defRPr sz="1200"/>
+            </a:lvl1pPr>
+          </a:lstStyle>
+          <a:p>
+            <a:endParaRPr lang="en-GB"/>
+          </a:p>
+        </p:txBody>
+      </p:sp>
+      <p:sp>
+        <p:nvSpPr>
+          <p:cNvPr id="3" name="Date Placeholder 2"/>
+          <p:cNvSpPr>
+            <a:spLocks noGrp="1"/>
+          </p:cNvSpPr>
+          <p:nvPr>
+            <p:ph type="dt" idx="1"/>
+          </p:nvPr>
+        </p:nvSpPr>
+        <p:spPr>
+          <a:xfrm>
+            <a:off x="3884613" y="0"/>
+            <a:ext cx="2971800" cy="458788"/>
+          </a:xfrm>
+          <a:prstGeom prst="rect">
+            <a:avLst/>
+          </a:prstGeom>
+        </p:spPr>
+        <p:txBody>
+          <a:bodyPr vert="horz" lIns="91440" tIns="45720" rIns="91440" bIns="45720" rtlCol="0"/>
+          <a:lstStyle>
+            <a:lvl1pPr algn="r">
+              <a:defRPr sz="1200"/>
+            </a:lvl1pPr>
+          </a:lstStyle>
+          <a:p>
+            <a:fld id="{9D646E01-5C55-4336-92D7-019C173B68CA}" type="datetimeFigureOut">
+              <a:rPr lang="en-GB" smtClean="0"/>
+              <a:t>01/03/2026</a:t>
+            </a:fld>
+            <a:endParaRPr lang="en-GB"/>
+          </a:p>
+        </p:txBody>
+      </p:sp>
+      <p:sp>
+        <p:nvSpPr>
+          <p:cNvPr id="4" name="Slide Image Placeholder 3"/>
+          <p:cNvSpPr>
+            <a:spLocks noGrp="1" noRot="1" noChangeAspect="1"/>
+          </p:cNvSpPr>
+          <p:nvPr>
+            <p:ph type="sldImg" idx="2"/>
+          </p:nvPr>
+        </p:nvSpPr>
+        <p:spPr>
+          <a:xfrm>
+            <a:off x="685800" y="1143000"/>
+            <a:ext cx="5486400" cy="3086100"/>
+          </a:xfrm>
+          <a:prstGeom prst="rect">
+            <a:avLst/>
+          </a:prstGeom>
+          <a:noFill/>
+          <a:ln w="12700">
+            <a:solidFill>
+              <a:prstClr val="black"/>
+            </a:solidFill>
+          </a:ln>
+        </p:spPr>
+        <p:txBody>
+          <a:bodyPr vert="horz" lIns="91440" tIns="45720" rIns="91440" bIns="45720" rtlCol="0" anchor="ctr"/>
+          <a:lstStyle/>
+          <a:p>
+            <a:endParaRPr lang="en-GB"/>
+          </a:p>
+        </p:txBody>
+      </p:sp>
+      <p:sp>
+        <p:nvSpPr>
+          <p:cNvPr id="5" name="Notes Placeholder 4"/>
+          <p:cNvSpPr>
+            <a:spLocks noGrp="1"/>
+          </p:cNvSpPr>
+          <p:nvPr>
+            <p:ph type="body" sz="quarter" idx="3"/>
+          </p:nvPr>
+        </p:nvSpPr>
+        <p:spPr>
+          <a:xfrm>
+            <a:off x="685800" y="4400550"/>
+            <a:ext cx="5486400" cy="3600450"/>
+          </a:xfrm>
+          <a:prstGeom prst="rect">
+            <a:avLst/>
+          </a:prstGeom>
+        </p:spPr>
+        <p:txBody>
+          <a:bodyPr vert="horz" lIns="91440" tIns="45720" rIns="91440" bIns="45720" rtlCol="0"/>
+          <a:lstStyle/>
+          <a:p>
+            <a:pPr lvl="0"/>
+            <a:r>
+              <a:rPr lang="en-GB"/>
+              <a:t>Click to edit Master text styles</a:t>
+            </a:r>
+          </a:p>
+          <a:p>
+            <a:pPr lvl="1"/>
+            <a:r>
+              <a:rPr lang="en-GB"/>
+              <a:t>Second level</a:t>
+            </a:r>
+          </a:p>
+          <a:p>
+            <a:pPr lvl="2"/>
+            <a:r>
+              <a:rPr lang="en-GB"/>
+              <a:t>Third level</a:t>
+            </a:r>
+          </a:p>
+          <a:p>
+            <a:pPr lvl="3"/>
+            <a:r>
+              <a:rPr lang="en-GB"/>
+              <a:t>Fourth level</a:t>
+            </a:r>
+          </a:p>
+          <a:p>
+            <a:pPr lvl="4"/>
+            <a:r>
+              <a:rPr lang="en-GB"/>
+              <a:t>Fifth level</a:t>
+            </a:r>
+          </a:p>
+        </p:txBody>
+      </p:sp>
+      <p:sp>
+        <p:nvSpPr>
+          <p:cNvPr id="6" name="Footer Placeholder 5"/>
+          <p:cNvSpPr>
+            <a:spLocks noGrp="1"/>
+          </p:cNvSpPr>
+          <p:nvPr>
+            <p:ph type="ftr" sz="quarter" idx="4"/>
+          </p:nvPr>
+        </p:nvSpPr>
+        <p:spPr>
+          <a:xfrm>
+            <a:off x="0" y="8685213"/>
+            <a:ext cx="2971800" cy="458787"/>
+          </a:xfrm>
+          <a:prstGeom prst="rect">
+            <a:avLst/>
+          </a:prstGeom>
+        </p:spPr>
+        <p:txBody>
+          <a:bodyPr vert="horz" lIns="91440" tIns="45720" rIns="91440" bIns="45720" rtlCol="0" anchor="b"/>
+          <a:lstStyle>
+            <a:lvl1pPr algn="l">
+              <a:defRPr sz="1200"/>
+            </a:lvl1pPr>
+          </a:lstStyle>
+          <a:p>
+            <a:endParaRPr lang="en-GB"/>
+          </a:p>
+        </p:txBody>
+      </p:sp>
+      <p:sp>
+        <p:nvSpPr>
+          <p:cNvPr id="7" name="Slide Number Placeholder 6"/>
+          <p:cNvSpPr>
+            <a:spLocks noGrp="1"/>
+          </p:cNvSpPr>
+          <p:nvPr>
+            <p:ph type="sldNum" sz="quarter" idx="5"/>
+          </p:nvPr>
+        </p:nvSpPr>
+        <p:spPr>
+          <a:xfrm>
+            <a:off x="3884613" y="8685213"/>
+            <a:ext cx="2971800" cy="458787"/>
+          </a:xfrm>
+          <a:prstGeom prst="rect">
+            <a:avLst/>
+          </a:prstGeom>
+        </p:spPr>
+        <p:txBody>
+          <a:bodyPr vert="horz" lIns="91440" tIns="45720" rIns="91440" bIns="45720" rtlCol="0" anchor="b"/>
+          <a:lstStyle>
+            <a:lvl1pPr algn="r">
+              <a:defRPr sz="1200"/>
+            </a:lvl1pPr>
+          </a:lstStyle>
+          <a:p>
+            <a:fld id="{2D41616A-645A-4A1B-A476-7911B27DC4E6}" type="slidenum">
+              <a:rPr lang="en-GB" smtClean="0"/>
+              <a:t>‹#›</a:t>
+            </a:fld>
+            <a:endParaRPr lang="en-GB"/>
+          </a:p>
+        </p:txBody>
+      </p:sp>
+    </p:spTree>
+    <p:extLst>
+      <p:ext uri="{BB962C8B-B14F-4D97-AF65-F5344CB8AC3E}">
+        <p14:creationId xmlns:p14="http://schemas.microsoft.com/office/powerpoint/2010/main" val="2421911032"/>
+      </p:ext>
+    </p:extLst>
+  </p:cSld>
+  <p:clrMap bg1="lt1" tx1="dk1" bg2="lt2" tx2="dk2" accent1="accent1" accent2="accent2" accent3="accent3" accent4="accent4" accent5="accent5" accent6="accent6" hlink="hlink" folHlink="folHlink"/>
+  <p:notesStyle>
+    <a:lvl1pPr marL="0" algn="l" defTabSz="914400" rtl="0" eaLnBrk="1" latinLnBrk="0" hangingPunct="1">
+      <a:defRPr sz="1200" kern="1200">
+        <a:solidFill>
+          <a:schemeClr val="tx1"/>
+        </a:solidFill>
+        <a:latin typeface="+mn-lt"/>
+        <a:ea typeface="+mn-ea"/>
+        <a:cs typeface="+mn-cs"/>
+      </a:defRPr>
+    </a:lvl1pPr>
+    <a:lvl2pPr marL="457200" algn="l" defTabSz="914400" rtl="0" eaLnBrk="1" latinLnBrk="0" hangingPunct="1">
+      <a:defRPr sz="1200" kern="1200">
+        <a:solidFill>
+          <a:schemeClr val="tx1"/>
+        </a:solidFill>
+        <a:latin typeface="+mn-lt"/>
+        <a:ea typeface="+mn-ea"/>
+        <a:cs typeface="+mn-cs"/>
+      </a:defRPr>
+    </a:lvl2pPr>
+    <a:lvl3pPr marL="914400" algn="l" defTabSz="914400" rtl="0" eaLnBrk="1" latinLnBrk="0" hangingPunct="1">
+      <a:defRPr sz="1200" kern="1200">
+        <a:solidFill>
+          <a:schemeClr val="tx1"/>
+        </a:solidFill>
+        <a:latin typeface="+mn-lt"/>
+        <a:ea typeface="+mn-ea"/>
+        <a:cs typeface="+mn-cs"/>
+      </a:defRPr>
+    </a:lvl3pPr>
+    <a:lvl4pPr marL="1371600" algn="l" defTabSz="914400" rtl="0" eaLnBrk="1" latinLnBrk="0" hangingPunct="1">
+      <a:defRPr sz="1200" kern="1200">
+        <a:solidFill>
+          <a:schemeClr val="tx1"/>
+        </a:solidFill>
+        <a:latin typeface="+mn-lt"/>
+        <a:ea typeface="+mn-ea"/>
+        <a:cs typeface="+mn-cs"/>
+      </a:defRPr>
+    </a:lvl4pPr>
+    <a:lvl5pPr marL="1828800" algn="l" defTabSz="914400" rtl="0" eaLnBrk="1" latinLnBrk="0" hangingPunct="1">
+      <a:defRPr sz="1200" kern="1200">
+        <a:solidFill>
+          <a:schemeClr val="tx1"/>
+        </a:solidFill>
+        <a:latin typeface="+mn-lt"/>
+        <a:ea typeface="+mn-ea"/>
+        <a:cs typeface="+mn-cs"/>
+      </a:defRPr>
+    </a:lvl5pPr>
+    <a:lvl6pPr marL="2286000" algn="l" defTabSz="914400" rtl="0" eaLnBrk="1" latinLnBrk="0" hangingPunct="1">
+      <a:defRPr sz="1200" kern="1200">
+        <a:solidFill>
+          <a:schemeClr val="tx1"/>
+        </a:solidFill>
+        <a:latin typeface="+mn-lt"/>
+        <a:ea typeface="+mn-ea"/>
+        <a:cs typeface="+mn-cs"/>
+      </a:defRPr>
+    </a:lvl6pPr>
+    <a:lvl7pPr marL="2743200" algn="l" defTabSz="914400" rtl="0" eaLnBrk="1" latinLnBrk="0" hangingPunct="1">
+      <a:defRPr sz="1200" kern="1200">
+        <a:solidFill>
+          <a:schemeClr val="tx1"/>
+        </a:solidFill>
+        <a:latin typeface="+mn-lt"/>
+        <a:ea typeface="+mn-ea"/>
+        <a:cs typeface="+mn-cs"/>
+      </a:defRPr>
+    </a:lvl7pPr>
+    <a:lvl8pPr marL="3200400" algn="l" defTabSz="914400" rtl="0" eaLnBrk="1" latinLnBrk="0" hangingPunct="1">
+      <a:defRPr sz="1200" kern="1200">
+        <a:solidFill>
+          <a:schemeClr val="tx1"/>
+        </a:solidFill>
+        <a:latin typeface="+mn-lt"/>
+        <a:ea typeface="+mn-ea"/>
+        <a:cs typeface="+mn-cs"/>
+      </a:defRPr>
+    </a:lvl8pPr>
+    <a:lvl9pPr marL="3657600" algn="l" defTabSz="914400" rtl="0" eaLnBrk="1" latinLnBrk="0" hangingPunct="1">
+      <a:defRPr sz="1200" kern="1200">
+        <a:solidFill>
+          <a:schemeClr val="tx1"/>
+        </a:solidFill>
+        <a:latin typeface="+mn-lt"/>
+        <a:ea typeface="+mn-ea"/>
+        <a:cs typeface="+mn-cs"/>
+      </a:defRPr>
+    </a:lvl9pPr>
+  </p:notesStyle>
+</p:notesMaster>
+</file>
+
+<file path=ppt/notesSlides/notesSlide1.xml><?xml version="1.0" encoding="utf-8"?>
+<p:notes xmlns:a="http://schemas.openxmlformats.org/drawingml/2006/main" xmlns:r="http://schemas.openxmlformats.org/officeDocument/2006/relationships" xmlns:p="http://schemas.openxmlformats.org/presentationml/2006/main">
+  <p:cSld>
+    <p:spTree>
+      <p:nvGrpSpPr>
+        <p:cNvPr id="1" name=""/>
+        <p:cNvGrpSpPr/>
+        <p:nvPr/>
+      </p:nvGrpSpPr>
+      <p:grpSpPr>
+        <a:xfrm>
+          <a:off x="0" y="0"/>
+          <a:ext cx="0" cy="0"/>
+          <a:chOff x="0" y="0"/>
+          <a:chExt cx="0" cy="0"/>
+        </a:xfrm>
+      </p:grpSpPr>
+      <p:sp>
+        <p:nvSpPr>
+          <p:cNvPr id="2" name="Slide Image Placeholder 1"/>
+          <p:cNvSpPr>
+            <a:spLocks noGrp="1" noRot="1" noChangeAspect="1"/>
+          </p:cNvSpPr>
+          <p:nvPr>
+            <p:ph type="sldImg"/>
+          </p:nvPr>
+        </p:nvSpPr>
+        <p:spPr/>
+      </p:sp>
+      <p:sp>
+        <p:nvSpPr>
+          <p:cNvPr id="3" name="Notes Placeholder 2"/>
+          <p:cNvSpPr>
+            <a:spLocks noGrp="1"/>
+          </p:cNvSpPr>
+          <p:nvPr>
+            <p:ph type="body" idx="1"/>
+          </p:nvPr>
+        </p:nvSpPr>
+        <p:spPr/>
+        <p:txBody>
+          <a:bodyPr/>
+          <a:lstStyle/>
+          <a:p>
+            <a:endParaRPr lang="en-GB" dirty="0"/>
+          </a:p>
+        </p:txBody>
+      </p:sp>
+      <p:sp>
+        <p:nvSpPr>
+          <p:cNvPr id="4" name="Slide Number Placeholder 3"/>
+          <p:cNvSpPr>
+            <a:spLocks noGrp="1"/>
+          </p:cNvSpPr>
+          <p:nvPr>
+            <p:ph type="sldNum" sz="quarter" idx="5"/>
+          </p:nvPr>
+        </p:nvSpPr>
+        <p:spPr/>
+        <p:txBody>
+          <a:bodyPr/>
+          <a:lstStyle/>
+          <a:p>
+            <a:fld id="{2D41616A-645A-4A1B-A476-7911B27DC4E6}" type="slidenum">
+              <a:rPr lang="en-GB" smtClean="0"/>
+              <a:t>40</a:t>
+            </a:fld>
+            <a:endParaRPr lang="en-GB"/>
+          </a:p>
+        </p:txBody>
+      </p:sp>
+    </p:spTree>
+    <p:extLst>
+      <p:ext uri="{BB962C8B-B14F-4D97-AF65-F5344CB8AC3E}">
+        <p14:creationId xmlns:p14="http://schemas.microsoft.com/office/powerpoint/2010/main" val="753318603"/>
+      </p:ext>
+    </p:extLst>
+  </p:cSld>
+  <p:clrMapOvr>
+    <a:masterClrMapping/>
+  </p:clrMapOvr>
+</p:notes>
+</file>
+
+<file path=ppt/notesSlides/notesSlide2.xml><?xml version="1.0" encoding="utf-8"?>
+<p:notes xmlns:a="http://schemas.openxmlformats.org/drawingml/2006/main" xmlns:r="http://schemas.openxmlformats.org/officeDocument/2006/relationships" xmlns:p="http://schemas.openxmlformats.org/presentationml/2006/main">
+  <p:cSld>
+    <p:spTree>
+      <p:nvGrpSpPr>
+        <p:cNvPr id="1" name="">
+          <a:extLst>
+            <a:ext uri="{FF2B5EF4-FFF2-40B4-BE49-F238E27FC236}">
+              <a16:creationId xmlns:a16="http://schemas.microsoft.com/office/drawing/2014/main" id="{BD7519B8-3B9C-8DC6-74D9-FE7C16094FB9}"/>
+            </a:ext>
+          </a:extLst>
+        </p:cNvPr>
+        <p:cNvGrpSpPr/>
+        <p:nvPr/>
+      </p:nvGrpSpPr>
+      <p:grpSpPr>
+        <a:xfrm>
+          <a:off x="0" y="0"/>
+          <a:ext cx="0" cy="0"/>
+          <a:chOff x="0" y="0"/>
+          <a:chExt cx="0" cy="0"/>
+        </a:xfrm>
+      </p:grpSpPr>
+      <p:sp>
+        <p:nvSpPr>
+          <p:cNvPr id="2" name="Slide Image Placeholder 1">
+            <a:extLst>
+              <a:ext uri="{FF2B5EF4-FFF2-40B4-BE49-F238E27FC236}">
+                <a16:creationId xmlns:a16="http://schemas.microsoft.com/office/drawing/2014/main" id="{2943A9EB-7C53-B3D4-7810-C6DB14EC5409}"/>
+              </a:ext>
+            </a:extLst>
+          </p:cNvPr>
+          <p:cNvSpPr>
+            <a:spLocks noGrp="1" noRot="1" noChangeAspect="1"/>
+          </p:cNvSpPr>
+          <p:nvPr>
+            <p:ph type="sldImg"/>
+          </p:nvPr>
+        </p:nvSpPr>
+        <p:spPr/>
+      </p:sp>
+      <p:sp>
+        <p:nvSpPr>
+          <p:cNvPr id="3" name="Notes Placeholder 2">
+            <a:extLst>
+              <a:ext uri="{FF2B5EF4-FFF2-40B4-BE49-F238E27FC236}">
+                <a16:creationId xmlns:a16="http://schemas.microsoft.com/office/drawing/2014/main" id="{B592EE3A-6470-0082-BD33-23A94CAC8C60}"/>
+              </a:ext>
+            </a:extLst>
+          </p:cNvPr>
+          <p:cNvSpPr>
+            <a:spLocks noGrp="1"/>
+          </p:cNvSpPr>
+          <p:nvPr>
+            <p:ph type="body" idx="1"/>
+          </p:nvPr>
+        </p:nvSpPr>
+        <p:spPr/>
+        <p:txBody>
+          <a:bodyPr/>
+          <a:lstStyle/>
+          <a:p>
+            <a:endParaRPr lang="en-GB" dirty="0"/>
+          </a:p>
+        </p:txBody>
+      </p:sp>
+      <p:sp>
+        <p:nvSpPr>
+          <p:cNvPr id="4" name="Slide Number Placeholder 3">
+            <a:extLst>
+              <a:ext uri="{FF2B5EF4-FFF2-40B4-BE49-F238E27FC236}">
+                <a16:creationId xmlns:a16="http://schemas.microsoft.com/office/drawing/2014/main" id="{CCE02CD9-3AC8-0FBC-D0BF-20CAB8828063}"/>
+              </a:ext>
+            </a:extLst>
+          </p:cNvPr>
+          <p:cNvSpPr>
+            <a:spLocks noGrp="1"/>
+          </p:cNvSpPr>
+          <p:nvPr>
+            <p:ph type="sldNum" sz="quarter" idx="5"/>
+          </p:nvPr>
+        </p:nvSpPr>
+        <p:spPr/>
+        <p:txBody>
+          <a:bodyPr/>
+          <a:lstStyle/>
+          <a:p>
+            <a:fld id="{2D41616A-645A-4A1B-A476-7911B27DC4E6}" type="slidenum">
+              <a:rPr lang="en-GB" smtClean="0"/>
+              <a:t>41</a:t>
+            </a:fld>
+            <a:endParaRPr lang="en-GB"/>
+          </a:p>
+        </p:txBody>
+      </p:sp>
+    </p:spTree>
+    <p:extLst>
+      <p:ext uri="{BB962C8B-B14F-4D97-AF65-F5344CB8AC3E}">
+        <p14:creationId xmlns:p14="http://schemas.microsoft.com/office/powerpoint/2010/main" val="2851685222"/>
+      </p:ext>
+    </p:extLst>
+  </p:cSld>
+  <p:clrMapOvr>
+    <a:masterClrMapping/>
+  </p:clrMapOvr>
+</p:notes>
+</file>
+
+<file path=ppt/notesSlides/notesSlide3.xml><?xml version="1.0" encoding="utf-8"?>
+<p:notes xmlns:a="http://schemas.openxmlformats.org/drawingml/2006/main" xmlns:r="http://schemas.openxmlformats.org/officeDocument/2006/relationships" xmlns:p="http://schemas.openxmlformats.org/presentationml/2006/main">
+  <p:cSld>
+    <p:spTree>
+      <p:nvGrpSpPr>
+        <p:cNvPr id="1" name="">
+          <a:extLst>
+            <a:ext uri="{FF2B5EF4-FFF2-40B4-BE49-F238E27FC236}">
+              <a16:creationId xmlns:a16="http://schemas.microsoft.com/office/drawing/2014/main" id="{2DD848BB-E548-6ED9-819D-D7E4365D4868}"/>
+            </a:ext>
+          </a:extLst>
+        </p:cNvPr>
+        <p:cNvGrpSpPr/>
+        <p:nvPr/>
+      </p:nvGrpSpPr>
+      <p:grpSpPr>
+        <a:xfrm>
+          <a:off x="0" y="0"/>
+          <a:ext cx="0" cy="0"/>
+          <a:chOff x="0" y="0"/>
+          <a:chExt cx="0" cy="0"/>
+        </a:xfrm>
+      </p:grpSpPr>
+      <p:sp>
+        <p:nvSpPr>
+          <p:cNvPr id="2" name="Slide Image Placeholder 1">
+            <a:extLst>
+              <a:ext uri="{FF2B5EF4-FFF2-40B4-BE49-F238E27FC236}">
+                <a16:creationId xmlns:a16="http://schemas.microsoft.com/office/drawing/2014/main" id="{B69EB3D3-EA3B-F842-695D-BB833675B6F3}"/>
+              </a:ext>
+            </a:extLst>
+          </p:cNvPr>
+          <p:cNvSpPr>
+            <a:spLocks noGrp="1" noRot="1" noChangeAspect="1"/>
+          </p:cNvSpPr>
+          <p:nvPr>
+            <p:ph type="sldImg"/>
+          </p:nvPr>
+        </p:nvSpPr>
+        <p:spPr/>
+      </p:sp>
+      <p:sp>
+        <p:nvSpPr>
+          <p:cNvPr id="3" name="Notes Placeholder 2">
+            <a:extLst>
+              <a:ext uri="{FF2B5EF4-FFF2-40B4-BE49-F238E27FC236}">
+                <a16:creationId xmlns:a16="http://schemas.microsoft.com/office/drawing/2014/main" id="{90993654-3A73-F582-1870-811C43A74046}"/>
+              </a:ext>
+            </a:extLst>
+          </p:cNvPr>
+          <p:cNvSpPr>
+            <a:spLocks noGrp="1"/>
+          </p:cNvSpPr>
+          <p:nvPr>
+            <p:ph type="body" idx="1"/>
+          </p:nvPr>
+        </p:nvSpPr>
+        <p:spPr/>
+        <p:txBody>
+          <a:bodyPr/>
+          <a:lstStyle/>
+          <a:p>
+            <a:endParaRPr lang="en-GB" dirty="0"/>
+          </a:p>
+        </p:txBody>
+      </p:sp>
+      <p:sp>
+        <p:nvSpPr>
+          <p:cNvPr id="4" name="Slide Number Placeholder 3">
+            <a:extLst>
+              <a:ext uri="{FF2B5EF4-FFF2-40B4-BE49-F238E27FC236}">
+                <a16:creationId xmlns:a16="http://schemas.microsoft.com/office/drawing/2014/main" id="{F9871642-6991-16C5-12E1-4656F42BDFCF}"/>
+              </a:ext>
+            </a:extLst>
+          </p:cNvPr>
+          <p:cNvSpPr>
+            <a:spLocks noGrp="1"/>
+          </p:cNvSpPr>
+          <p:nvPr>
+            <p:ph type="sldNum" sz="quarter" idx="5"/>
+          </p:nvPr>
+        </p:nvSpPr>
+        <p:spPr/>
+        <p:txBody>
+          <a:bodyPr/>
+          <a:lstStyle/>
+          <a:p>
+            <a:fld id="{2D41616A-645A-4A1B-A476-7911B27DC4E6}" type="slidenum">
+              <a:rPr lang="en-GB" smtClean="0"/>
+              <a:t>42</a:t>
+            </a:fld>
+            <a:endParaRPr lang="en-GB"/>
+          </a:p>
+        </p:txBody>
+      </p:sp>
+    </p:spTree>
+    <p:extLst>
+      <p:ext uri="{BB962C8B-B14F-4D97-AF65-F5344CB8AC3E}">
+        <p14:creationId xmlns:p14="http://schemas.microsoft.com/office/powerpoint/2010/main" val="673038220"/>
+      </p:ext>
+    </p:extLst>
+  </p:cSld>
+  <p:clrMapOvr>
+    <a:masterClrMapping/>
+  </p:clrMapOvr>
+</p:notes>
 </file>
 
 <file path=ppt/slideLayouts/slideLayout1.xml><?xml version="1.0" encoding="utf-8"?>
@@ -291,7 +953,7 @@
           <a:p>
             <a:fld id="{568B7E97-625A-4BCC-B496-5CABD61294FA}" type="datetimeFigureOut">
               <a:rPr lang="en-GB" smtClean="0"/>
-              <a:t>28/02/2026</a:t>
+              <a:t>01/03/2026</a:t>
             </a:fld>
             <a:endParaRPr lang="en-GB"/>
           </a:p>
@@ -489,7 +1151,7 @@
           <a:p>
             <a:fld id="{568B7E97-625A-4BCC-B496-5CABD61294FA}" type="datetimeFigureOut">
               <a:rPr lang="en-GB" smtClean="0"/>
-              <a:t>28/02/2026</a:t>
+              <a:t>01/03/2026</a:t>
             </a:fld>
             <a:endParaRPr lang="en-GB"/>
           </a:p>
@@ -697,7 +1359,7 @@
           <a:p>
             <a:fld id="{568B7E97-625A-4BCC-B496-5CABD61294FA}" type="datetimeFigureOut">
               <a:rPr lang="en-GB" smtClean="0"/>
-              <a:t>28/02/2026</a:t>
+              <a:t>01/03/2026</a:t>
             </a:fld>
             <a:endParaRPr lang="en-GB"/>
           </a:p>
@@ -895,7 +1557,7 @@
           <a:p>
             <a:fld id="{568B7E97-625A-4BCC-B496-5CABD61294FA}" type="datetimeFigureOut">
               <a:rPr lang="en-GB" smtClean="0"/>
-              <a:t>28/02/2026</a:t>
+              <a:t>01/03/2026</a:t>
             </a:fld>
             <a:endParaRPr lang="en-GB"/>
           </a:p>
@@ -1170,7 +1832,7 @@
           <a:p>
             <a:fld id="{568B7E97-625A-4BCC-B496-5CABD61294FA}" type="datetimeFigureOut">
               <a:rPr lang="en-GB" smtClean="0"/>
-              <a:t>28/02/2026</a:t>
+              <a:t>01/03/2026</a:t>
             </a:fld>
             <a:endParaRPr lang="en-GB"/>
           </a:p>
@@ -1435,7 +2097,7 @@
           <a:p>
             <a:fld id="{568B7E97-625A-4BCC-B496-5CABD61294FA}" type="datetimeFigureOut">
               <a:rPr lang="en-GB" smtClean="0"/>
-              <a:t>28/02/2026</a:t>
+              <a:t>01/03/2026</a:t>
             </a:fld>
             <a:endParaRPr lang="en-GB"/>
           </a:p>
@@ -1847,7 +2509,7 @@
           <a:p>
             <a:fld id="{568B7E97-625A-4BCC-B496-5CABD61294FA}" type="datetimeFigureOut">
               <a:rPr lang="en-GB" smtClean="0"/>
-              <a:t>28/02/2026</a:t>
+              <a:t>01/03/2026</a:t>
             </a:fld>
             <a:endParaRPr lang="en-GB"/>
           </a:p>
@@ -1988,7 +2650,7 @@
           <a:p>
             <a:fld id="{568B7E97-625A-4BCC-B496-5CABD61294FA}" type="datetimeFigureOut">
               <a:rPr lang="en-GB" smtClean="0"/>
-              <a:t>28/02/2026</a:t>
+              <a:t>01/03/2026</a:t>
             </a:fld>
             <a:endParaRPr lang="en-GB"/>
           </a:p>
@@ -2101,7 +2763,7 @@
           <a:p>
             <a:fld id="{568B7E97-625A-4BCC-B496-5CABD61294FA}" type="datetimeFigureOut">
               <a:rPr lang="en-GB" smtClean="0"/>
-              <a:t>28/02/2026</a:t>
+              <a:t>01/03/2026</a:t>
             </a:fld>
             <a:endParaRPr lang="en-GB"/>
           </a:p>
@@ -2412,7 +3074,7 @@
           <a:p>
             <a:fld id="{568B7E97-625A-4BCC-B496-5CABD61294FA}" type="datetimeFigureOut">
               <a:rPr lang="en-GB" smtClean="0"/>
-              <a:t>28/02/2026</a:t>
+              <a:t>01/03/2026</a:t>
             </a:fld>
             <a:endParaRPr lang="en-GB"/>
           </a:p>
@@ -2700,7 +3362,7 @@
           <a:p>
             <a:fld id="{568B7E97-625A-4BCC-B496-5CABD61294FA}" type="datetimeFigureOut">
               <a:rPr lang="en-GB" smtClean="0"/>
-              <a:t>28/02/2026</a:t>
+              <a:t>01/03/2026</a:t>
             </a:fld>
             <a:endParaRPr lang="en-GB"/>
           </a:p>
@@ -2941,7 +3603,7 @@
           <a:p>
             <a:fld id="{568B7E97-625A-4BCC-B496-5CABD61294FA}" type="datetimeFigureOut">
               <a:rPr lang="en-GB" smtClean="0"/>
-              <a:t>28/02/2026</a:t>
+              <a:t>01/03/2026</a:t>
             </a:fld>
             <a:endParaRPr lang="en-GB"/>
           </a:p>
@@ -32734,7 +33396,7 @@
           <p:nvPr>
             <p:extLst>
               <p:ext uri="{D42A27DB-BD31-4B8C-83A1-F6EECF244321}">
-                <p14:modId xmlns:p14="http://schemas.microsoft.com/office/powerpoint/2010/main" val="1002330948"/>
+                <p14:modId xmlns:p14="http://schemas.microsoft.com/office/powerpoint/2010/main" val="3673214047"/>
               </p:ext>
             </p:extLst>
           </p:nvPr>
@@ -32891,10 +33553,9 @@
                     <a:lstStyle/>
                     <a:p>
                       <a:r>
-                        <a:rPr lang="en-GB" sz="800"/>
-                        <a:t>161.</a:t>
-                      </a:r>
-                      <a:endParaRPr lang="en-GB" sz="800" dirty="0"/>
+                        <a:rPr lang="en-GB" sz="800" dirty="0"/>
+                        <a:t>166.</a:t>
+                      </a:r>
                     </a:p>
                   </a:txBody>
                   <a:tcPr/>
@@ -32992,10 +33653,9 @@
                     <a:lstStyle/>
                     <a:p>
                       <a:r>
-                        <a:rPr lang="en-GB" sz="800"/>
-                        <a:t>162.</a:t>
-                      </a:r>
-                      <a:endParaRPr lang="en-GB" sz="800" dirty="0"/>
+                        <a:rPr lang="en-GB" sz="800" dirty="0"/>
+                        <a:t>167.</a:t>
+                      </a:r>
                     </a:p>
                   </a:txBody>
                   <a:tcPr/>
@@ -33161,10 +33821,9 @@
                     <a:lstStyle/>
                     <a:p>
                       <a:r>
-                        <a:rPr lang="en-GB" sz="800"/>
-                        <a:t>163.</a:t>
-                      </a:r>
-                      <a:endParaRPr lang="en-GB" sz="800" dirty="0"/>
+                        <a:rPr lang="en-GB" sz="800" dirty="0"/>
+                        <a:t>168.</a:t>
+                      </a:r>
                     </a:p>
                   </a:txBody>
                   <a:tcPr/>
@@ -33330,10 +33989,9 @@
                     <a:lstStyle/>
                     <a:p>
                       <a:r>
-                        <a:rPr lang="en-GB" sz="800"/>
-                        <a:t>164.</a:t>
-                      </a:r>
-                      <a:endParaRPr lang="en-GB" sz="800" dirty="0"/>
+                        <a:rPr lang="en-GB" sz="800" dirty="0"/>
+                        <a:t>169.</a:t>
+                      </a:r>
                     </a:p>
                   </a:txBody>
                   <a:tcPr/>
@@ -33499,10 +34157,9 @@
                     <a:lstStyle/>
                     <a:p>
                       <a:r>
-                        <a:rPr lang="en-GB" sz="800"/>
-                        <a:t>165.</a:t>
-                      </a:r>
-                      <a:endParaRPr lang="en-GB" sz="800" dirty="0"/>
+                        <a:rPr lang="en-GB" sz="800" dirty="0"/>
+                        <a:t>170.</a:t>
+                      </a:r>
                     </a:p>
                   </a:txBody>
                   <a:tcPr/>
@@ -33784,7 +34441,13 @@
   <p:cSld>
     <p:spTree>
       <p:nvGrpSpPr>
-        <p:cNvPr id="1" name=""/>
+        <p:cNvPr id="1" name="">
+          <a:extLst>
+            <a:ext uri="{FF2B5EF4-FFF2-40B4-BE49-F238E27FC236}">
+              <a16:creationId xmlns:a16="http://schemas.microsoft.com/office/drawing/2014/main" id="{1AE3537B-16B0-40A8-70C5-333DE4717D7F}"/>
+            </a:ext>
+          </a:extLst>
+        </p:cNvPr>
         <p:cNvGrpSpPr/>
         <p:nvPr/>
       </p:nvGrpSpPr>
@@ -33796,10 +34459,2130 @@
           <a:chExt cx="0" cy="0"/>
         </a:xfrm>
       </p:grpSpPr>
+      <p:graphicFrame>
+        <p:nvGraphicFramePr>
+          <p:cNvPr id="4" name="Table 3">
+            <a:extLst>
+              <a:ext uri="{FF2B5EF4-FFF2-40B4-BE49-F238E27FC236}">
+                <a16:creationId xmlns:a16="http://schemas.microsoft.com/office/drawing/2014/main" id="{0999D9CC-7738-A7CF-878F-33656F889703}"/>
+              </a:ext>
+            </a:extLst>
+          </p:cNvPr>
+          <p:cNvGraphicFramePr>
+            <a:graphicFrameLocks noGrp="1"/>
+          </p:cNvGraphicFramePr>
+          <p:nvPr>
+            <p:extLst>
+              <p:ext uri="{D42A27DB-BD31-4B8C-83A1-F6EECF244321}">
+                <p14:modId xmlns:p14="http://schemas.microsoft.com/office/powerpoint/2010/main" val="681108370"/>
+              </p:ext>
+            </p:extLst>
+          </p:nvPr>
+        </p:nvGraphicFramePr>
+        <p:xfrm>
+          <a:off x="114301" y="391885"/>
+          <a:ext cx="11204571" cy="5682703"/>
+        </p:xfrm>
+        <a:graphic>
+          <a:graphicData uri="http://schemas.openxmlformats.org/drawingml/2006/table">
+            <a:tbl>
+              <a:tblPr firstRow="1" bandRow="1">
+                <a:tableStyleId>{5C22544A-7EE6-4342-B048-85BDC9FD1C3A}</a:tableStyleId>
+              </a:tblPr>
+              <a:tblGrid>
+                <a:gridCol w="798830">
+                  <a:extLst>
+                    <a:ext uri="{9D8B030D-6E8A-4147-A177-3AD203B41FA5}">
+                      <a16:colId xmlns:a16="http://schemas.microsoft.com/office/drawing/2014/main" val="2041145262"/>
+                    </a:ext>
+                  </a:extLst>
+                </a:gridCol>
+                <a:gridCol w="1647254">
+                  <a:extLst>
+                    <a:ext uri="{9D8B030D-6E8A-4147-A177-3AD203B41FA5}">
+                      <a16:colId xmlns:a16="http://schemas.microsoft.com/office/drawing/2014/main" val="3102287305"/>
+                    </a:ext>
+                  </a:extLst>
+                </a:gridCol>
+                <a:gridCol w="612955">
+                  <a:extLst>
+                    <a:ext uri="{9D8B030D-6E8A-4147-A177-3AD203B41FA5}">
+                      <a16:colId xmlns:a16="http://schemas.microsoft.com/office/drawing/2014/main" val="4080696647"/>
+                    </a:ext>
+                  </a:extLst>
+                </a:gridCol>
+                <a:gridCol w="1752897">
+                  <a:extLst>
+                    <a:ext uri="{9D8B030D-6E8A-4147-A177-3AD203B41FA5}">
+                      <a16:colId xmlns:a16="http://schemas.microsoft.com/office/drawing/2014/main" val="132880537"/>
+                    </a:ext>
+                  </a:extLst>
+                </a:gridCol>
+                <a:gridCol w="4519688">
+                  <a:extLst>
+                    <a:ext uri="{9D8B030D-6E8A-4147-A177-3AD203B41FA5}">
+                      <a16:colId xmlns:a16="http://schemas.microsoft.com/office/drawing/2014/main" val="786884226"/>
+                    </a:ext>
+                  </a:extLst>
+                </a:gridCol>
+                <a:gridCol w="1872947">
+                  <a:extLst>
+                    <a:ext uri="{9D8B030D-6E8A-4147-A177-3AD203B41FA5}">
+                      <a16:colId xmlns:a16="http://schemas.microsoft.com/office/drawing/2014/main" val="3328467923"/>
+                    </a:ext>
+                  </a:extLst>
+                </a:gridCol>
+              </a:tblGrid>
+              <a:tr h="470623">
+                <a:tc>
+                  <a:txBody>
+                    <a:bodyPr/>
+                    <a:lstStyle/>
+                    <a:p>
+                      <a:r>
+                        <a:rPr lang="en-GB" sz="800"/>
+                        <a:t>Test Number</a:t>
+                      </a:r>
+                      <a:endParaRPr lang="en-GB" sz="800" dirty="0"/>
+                    </a:p>
+                  </a:txBody>
+                  <a:tcPr/>
+                </a:tc>
+                <a:tc>
+                  <a:txBody>
+                    <a:bodyPr/>
+                    <a:lstStyle/>
+                    <a:p>
+                      <a:r>
+                        <a:rPr lang="en-GB" sz="800"/>
+                        <a:t>Test Type</a:t>
+                      </a:r>
+                      <a:endParaRPr lang="en-GB" sz="800" dirty="0"/>
+                    </a:p>
+                  </a:txBody>
+                  <a:tcPr/>
+                </a:tc>
+                <a:tc>
+                  <a:txBody>
+                    <a:bodyPr/>
+                    <a:lstStyle/>
+                    <a:p>
+                      <a:r>
+                        <a:rPr lang="en-GB" sz="800"/>
+                        <a:t>Room</a:t>
+                      </a:r>
+                      <a:endParaRPr lang="en-GB" sz="800" dirty="0"/>
+                    </a:p>
+                  </a:txBody>
+                  <a:tcPr/>
+                </a:tc>
+                <a:tc>
+                  <a:txBody>
+                    <a:bodyPr/>
+                    <a:lstStyle/>
+                    <a:p>
+                      <a:r>
+                        <a:rPr lang="en-GB" sz="800"/>
+                        <a:t>Objects Involved</a:t>
+                      </a:r>
+                      <a:endParaRPr lang="en-GB" sz="800" dirty="0"/>
+                    </a:p>
+                  </a:txBody>
+                  <a:tcPr/>
+                </a:tc>
+                <a:tc>
+                  <a:txBody>
+                    <a:bodyPr/>
+                    <a:lstStyle/>
+                    <a:p>
+                      <a:r>
+                        <a:rPr lang="en-GB" sz="800"/>
+                        <a:t>Expected Outcome</a:t>
+                      </a:r>
+                      <a:endParaRPr lang="en-GB" sz="800" dirty="0"/>
+                    </a:p>
+                  </a:txBody>
+                  <a:tcPr/>
+                </a:tc>
+                <a:tc>
+                  <a:txBody>
+                    <a:bodyPr/>
+                    <a:lstStyle/>
+                    <a:p>
+                      <a:r>
+                        <a:rPr lang="en-GB" sz="800"/>
+                        <a:t>Actual Outcome</a:t>
+                      </a:r>
+                      <a:endParaRPr lang="en-GB" sz="800" dirty="0"/>
+                    </a:p>
+                  </a:txBody>
+                  <a:tcPr/>
+                </a:tc>
+                <a:extLst>
+                  <a:ext uri="{0D108BD9-81ED-4DB2-BD59-A6C34878D82A}">
+                    <a16:rowId xmlns:a16="http://schemas.microsoft.com/office/drawing/2014/main" val="1296324342"/>
+                  </a:ext>
+                </a:extLst>
+              </a:tr>
+              <a:tr h="475162">
+                <a:tc>
+                  <a:txBody>
+                    <a:bodyPr/>
+                    <a:lstStyle/>
+                    <a:p>
+                      <a:r>
+                        <a:rPr lang="en-GB" sz="800" dirty="0"/>
+                        <a:t>171.</a:t>
+                      </a:r>
+                    </a:p>
+                  </a:txBody>
+                  <a:tcPr/>
+                </a:tc>
+                <a:tc>
+                  <a:txBody>
+                    <a:bodyPr/>
+                    <a:lstStyle/>
+                    <a:p>
+                      <a:r>
+                        <a:rPr lang="en-GB" sz="800" dirty="0"/>
+                        <a:t>Front Vent open/close states level 1</a:t>
+                      </a:r>
+                    </a:p>
+                  </a:txBody>
+                  <a:tcPr/>
+                </a:tc>
+                <a:tc>
+                  <a:txBody>
+                    <a:bodyPr/>
+                    <a:lstStyle/>
+                    <a:p>
+                      <a:r>
+                        <a:rPr lang="en-GB" sz="800" dirty="0"/>
+                        <a:t>Rm_level1</a:t>
+                      </a:r>
+                    </a:p>
+                  </a:txBody>
+                  <a:tcPr/>
+                </a:tc>
+                <a:tc>
+                  <a:txBody>
+                    <a:bodyPr/>
+                    <a:lstStyle/>
+                    <a:p>
+                      <a:r>
+                        <a:rPr lang="en-GB" sz="800" dirty="0" err="1"/>
+                        <a:t>obj_front_vent_button</a:t>
+                      </a:r>
+                      <a:endParaRPr lang="en-GB" sz="800" dirty="0"/>
+                    </a:p>
+                  </a:txBody>
+                  <a:tcPr/>
+                </a:tc>
+                <a:tc>
+                  <a:txBody>
+                    <a:bodyPr/>
+                    <a:lstStyle/>
+                    <a:p>
+                      <a:pPr marL="0" marR="0" lvl="0" indent="0" algn="l" defTabSz="914400" rtl="0" eaLnBrk="1" fontAlgn="auto" latinLnBrk="0" hangingPunct="1">
+                        <a:lnSpc>
+                          <a:spcPct val="100000"/>
+                        </a:lnSpc>
+                        <a:spcBef>
+                          <a:spcPts val="0"/>
+                        </a:spcBef>
+                        <a:spcAft>
+                          <a:spcPts val="0"/>
+                        </a:spcAft>
+                        <a:buClrTx/>
+                        <a:buSzTx/>
+                        <a:buFontTx/>
+                        <a:buNone/>
+                        <a:tabLst/>
+                        <a:defRPr/>
+                      </a:pPr>
+                      <a:r>
+                        <a:rPr lang="en-GB" sz="800" dirty="0"/>
+                        <a:t>When the player left clicks on the button, the button uses the global variable states for the Front Vent from the oxygen/door/vent controller to determine if the vent requires to be In an open or closed sprite state. Essentially it checks the instance for the open or closed state of the Front Vent  in the office to then know if its closing or opening the Front Vent  for both the up-close view and the main view Front Vents. When it knows what state, the vents are currently in, it will change the front vents object sprite and set the front vents global state to open/close which the oxygen/door/vent controller uses to decrease/increase the oxygen levels.</a:t>
+                      </a:r>
+                    </a:p>
+                  </a:txBody>
+                  <a:tcPr/>
+                </a:tc>
+                <a:tc>
+                  <a:txBody>
+                    <a:bodyPr/>
+                    <a:lstStyle/>
+                    <a:p>
+                      <a:endParaRPr lang="en-GB" sz="800" dirty="0"/>
+                    </a:p>
+                  </a:txBody>
+                  <a:tcPr/>
+                </a:tc>
+                <a:extLst>
+                  <a:ext uri="{0D108BD9-81ED-4DB2-BD59-A6C34878D82A}">
+                    <a16:rowId xmlns:a16="http://schemas.microsoft.com/office/drawing/2014/main" val="289599235"/>
+                  </a:ext>
+                </a:extLst>
+              </a:tr>
+              <a:tr h="470623">
+                <a:tc>
+                  <a:txBody>
+                    <a:bodyPr/>
+                    <a:lstStyle/>
+                    <a:p>
+                      <a:r>
+                        <a:rPr lang="en-GB" sz="800" dirty="0"/>
+                        <a:t>172.</a:t>
+                      </a:r>
+                    </a:p>
+                  </a:txBody>
+                  <a:tcPr/>
+                </a:tc>
+                <a:tc>
+                  <a:txBody>
+                    <a:bodyPr/>
+                    <a:lstStyle/>
+                    <a:p>
+                      <a:pPr marL="0" marR="0" lvl="0" indent="0" algn="l" defTabSz="914400" rtl="0" eaLnBrk="1" fontAlgn="auto" latinLnBrk="0" hangingPunct="1">
+                        <a:lnSpc>
+                          <a:spcPct val="100000"/>
+                        </a:lnSpc>
+                        <a:spcBef>
+                          <a:spcPts val="0"/>
+                        </a:spcBef>
+                        <a:spcAft>
+                          <a:spcPts val="0"/>
+                        </a:spcAft>
+                        <a:buClrTx/>
+                        <a:buSzTx/>
+                        <a:buFontTx/>
+                        <a:buNone/>
+                        <a:tabLst/>
+                        <a:defRPr/>
+                      </a:pPr>
+                      <a:r>
+                        <a:rPr lang="en-GB" sz="800" dirty="0"/>
+                        <a:t>Front Vent open/close states level 2</a:t>
+                      </a:r>
+                    </a:p>
+                    <a:p>
+                      <a:endParaRPr lang="en-GB" sz="800" dirty="0"/>
+                    </a:p>
+                  </a:txBody>
+                  <a:tcPr/>
+                </a:tc>
+                <a:tc>
+                  <a:txBody>
+                    <a:bodyPr/>
+                    <a:lstStyle/>
+                    <a:p>
+                      <a:pPr marL="0" marR="0" lvl="0" indent="0" algn="l" defTabSz="914400" rtl="0" eaLnBrk="1" fontAlgn="auto" latinLnBrk="0" hangingPunct="1">
+                        <a:lnSpc>
+                          <a:spcPct val="100000"/>
+                        </a:lnSpc>
+                        <a:spcBef>
+                          <a:spcPts val="0"/>
+                        </a:spcBef>
+                        <a:spcAft>
+                          <a:spcPts val="0"/>
+                        </a:spcAft>
+                        <a:buClrTx/>
+                        <a:buSzTx/>
+                        <a:buFontTx/>
+                        <a:buNone/>
+                        <a:tabLst/>
+                        <a:defRPr/>
+                      </a:pPr>
+                      <a:r>
+                        <a:rPr lang="en-GB" sz="800" dirty="0"/>
+                        <a:t>Rm_level2</a:t>
+                      </a:r>
+                    </a:p>
+                    <a:p>
+                      <a:endParaRPr lang="en-GB" sz="800" dirty="0"/>
+                    </a:p>
+                  </a:txBody>
+                  <a:tcPr/>
+                </a:tc>
+                <a:tc>
+                  <a:txBody>
+                    <a:bodyPr/>
+                    <a:lstStyle/>
+                    <a:p>
+                      <a:pPr marL="0" marR="0" lvl="0" indent="0" algn="l" defTabSz="914400" rtl="0" eaLnBrk="1" fontAlgn="auto" latinLnBrk="0" hangingPunct="1">
+                        <a:lnSpc>
+                          <a:spcPct val="100000"/>
+                        </a:lnSpc>
+                        <a:spcBef>
+                          <a:spcPts val="0"/>
+                        </a:spcBef>
+                        <a:spcAft>
+                          <a:spcPts val="0"/>
+                        </a:spcAft>
+                        <a:buClrTx/>
+                        <a:buSzTx/>
+                        <a:buFontTx/>
+                        <a:buNone/>
+                        <a:tabLst/>
+                        <a:defRPr/>
+                      </a:pPr>
+                      <a:r>
+                        <a:rPr lang="en-GB" sz="800" dirty="0"/>
+                        <a:t>obj_front_vent_button_lvl2</a:t>
+                      </a:r>
+                    </a:p>
+                    <a:p>
+                      <a:endParaRPr lang="en-GB" sz="800" dirty="0"/>
+                    </a:p>
+                  </a:txBody>
+                  <a:tcPr/>
+                </a:tc>
+                <a:tc>
+                  <a:txBody>
+                    <a:bodyPr/>
+                    <a:lstStyle/>
+                    <a:p>
+                      <a:pPr marL="0" marR="0" lvl="0" indent="0" algn="l" defTabSz="914400" rtl="0" eaLnBrk="1" fontAlgn="auto" latinLnBrk="0" hangingPunct="1">
+                        <a:lnSpc>
+                          <a:spcPct val="100000"/>
+                        </a:lnSpc>
+                        <a:spcBef>
+                          <a:spcPts val="0"/>
+                        </a:spcBef>
+                        <a:spcAft>
+                          <a:spcPts val="0"/>
+                        </a:spcAft>
+                        <a:buClrTx/>
+                        <a:buSzTx/>
+                        <a:buFontTx/>
+                        <a:buNone/>
+                        <a:tabLst/>
+                        <a:defRPr/>
+                      </a:pPr>
+                      <a:r>
+                        <a:rPr lang="en-GB" sz="800" dirty="0"/>
+                        <a:t>When the player left clicks on the button, the button uses the global variable states for the Front Vent from the oxygen/door/vent controller to determine if the vent requires to be In an open or closed sprite state. Essentially it checks the instance for the open or closed state of the Front Vent  in the office to then know if its closing or opening the Front Vent  for both the up-close view and the main view Front Vents. When it knows what state, the vents are currently in, it will change the front vents object sprite and set the front vents global state to open/close which the oxygen/door/vent controller uses to decrease/increase the oxygen levels.</a:t>
+                      </a:r>
+                    </a:p>
+                    <a:p>
+                      <a:pPr marL="0" indent="0">
+                        <a:buNone/>
+                      </a:pPr>
+                      <a:endParaRPr lang="en-GB" sz="800" dirty="0"/>
+                    </a:p>
+                  </a:txBody>
+                  <a:tcPr/>
+                </a:tc>
+                <a:tc>
+                  <a:txBody>
+                    <a:bodyPr/>
+                    <a:lstStyle/>
+                    <a:p>
+                      <a:pPr marL="0" indent="0">
+                        <a:buNone/>
+                      </a:pPr>
+                      <a:endParaRPr lang="en-GB" sz="800" dirty="0"/>
+                    </a:p>
+                  </a:txBody>
+                  <a:tcPr/>
+                </a:tc>
+                <a:extLst>
+                  <a:ext uri="{0D108BD9-81ED-4DB2-BD59-A6C34878D82A}">
+                    <a16:rowId xmlns:a16="http://schemas.microsoft.com/office/drawing/2014/main" val="4163288784"/>
+                  </a:ext>
+                </a:extLst>
+              </a:tr>
+              <a:tr h="470623">
+                <a:tc>
+                  <a:txBody>
+                    <a:bodyPr/>
+                    <a:lstStyle/>
+                    <a:p>
+                      <a:r>
+                        <a:rPr lang="en-GB" sz="800" dirty="0"/>
+                        <a:t>173.</a:t>
+                      </a:r>
+                    </a:p>
+                  </a:txBody>
+                  <a:tcPr/>
+                </a:tc>
+                <a:tc>
+                  <a:txBody>
+                    <a:bodyPr/>
+                    <a:lstStyle/>
+                    <a:p>
+                      <a:pPr marL="0" marR="0" lvl="0" indent="0" algn="l" defTabSz="914400" rtl="0" eaLnBrk="1" fontAlgn="auto" latinLnBrk="0" hangingPunct="1">
+                        <a:lnSpc>
+                          <a:spcPct val="100000"/>
+                        </a:lnSpc>
+                        <a:spcBef>
+                          <a:spcPts val="0"/>
+                        </a:spcBef>
+                        <a:spcAft>
+                          <a:spcPts val="0"/>
+                        </a:spcAft>
+                        <a:buClrTx/>
+                        <a:buSzTx/>
+                        <a:buFontTx/>
+                        <a:buNone/>
+                        <a:tabLst/>
+                        <a:defRPr/>
+                      </a:pPr>
+                      <a:r>
+                        <a:rPr lang="en-GB" sz="800" dirty="0"/>
+                        <a:t>Front Vent open/close states level 3</a:t>
+                      </a:r>
+                    </a:p>
+                    <a:p>
+                      <a:endParaRPr lang="en-GB" sz="800" dirty="0"/>
+                    </a:p>
+                  </a:txBody>
+                  <a:tcPr/>
+                </a:tc>
+                <a:tc>
+                  <a:txBody>
+                    <a:bodyPr/>
+                    <a:lstStyle/>
+                    <a:p>
+                      <a:pPr marL="0" marR="0" lvl="0" indent="0" algn="l" defTabSz="914400" rtl="0" eaLnBrk="1" fontAlgn="auto" latinLnBrk="0" hangingPunct="1">
+                        <a:lnSpc>
+                          <a:spcPct val="100000"/>
+                        </a:lnSpc>
+                        <a:spcBef>
+                          <a:spcPts val="0"/>
+                        </a:spcBef>
+                        <a:spcAft>
+                          <a:spcPts val="0"/>
+                        </a:spcAft>
+                        <a:buClrTx/>
+                        <a:buSzTx/>
+                        <a:buFontTx/>
+                        <a:buNone/>
+                        <a:tabLst/>
+                        <a:defRPr/>
+                      </a:pPr>
+                      <a:r>
+                        <a:rPr lang="en-GB" sz="800" dirty="0"/>
+                        <a:t>Rm_level3</a:t>
+                      </a:r>
+                    </a:p>
+                    <a:p>
+                      <a:endParaRPr lang="en-GB" sz="800" dirty="0"/>
+                    </a:p>
+                  </a:txBody>
+                  <a:tcPr/>
+                </a:tc>
+                <a:tc>
+                  <a:txBody>
+                    <a:bodyPr/>
+                    <a:lstStyle/>
+                    <a:p>
+                      <a:pPr marL="0" marR="0" lvl="0" indent="0" algn="l" defTabSz="914400" rtl="0" eaLnBrk="1" fontAlgn="auto" latinLnBrk="0" hangingPunct="1">
+                        <a:lnSpc>
+                          <a:spcPct val="100000"/>
+                        </a:lnSpc>
+                        <a:spcBef>
+                          <a:spcPts val="0"/>
+                        </a:spcBef>
+                        <a:spcAft>
+                          <a:spcPts val="0"/>
+                        </a:spcAft>
+                        <a:buClrTx/>
+                        <a:buSzTx/>
+                        <a:buFontTx/>
+                        <a:buNone/>
+                        <a:tabLst/>
+                        <a:defRPr/>
+                      </a:pPr>
+                      <a:r>
+                        <a:rPr lang="en-GB" sz="800" dirty="0"/>
+                        <a:t>obj_front_vent_button_lvl3</a:t>
+                      </a:r>
+                    </a:p>
+                    <a:p>
+                      <a:endParaRPr lang="en-GB" sz="800" dirty="0"/>
+                    </a:p>
+                  </a:txBody>
+                  <a:tcPr/>
+                </a:tc>
+                <a:tc>
+                  <a:txBody>
+                    <a:bodyPr/>
+                    <a:lstStyle/>
+                    <a:p>
+                      <a:pPr marL="0" marR="0" lvl="0" indent="0" algn="l" defTabSz="914400" rtl="0" eaLnBrk="1" fontAlgn="auto" latinLnBrk="0" hangingPunct="1">
+                        <a:lnSpc>
+                          <a:spcPct val="100000"/>
+                        </a:lnSpc>
+                        <a:spcBef>
+                          <a:spcPts val="0"/>
+                        </a:spcBef>
+                        <a:spcAft>
+                          <a:spcPts val="0"/>
+                        </a:spcAft>
+                        <a:buClrTx/>
+                        <a:buSzTx/>
+                        <a:buFontTx/>
+                        <a:buNone/>
+                        <a:tabLst/>
+                        <a:defRPr/>
+                      </a:pPr>
+                      <a:r>
+                        <a:rPr lang="en-GB" sz="800" dirty="0"/>
+                        <a:t>When the player left clicks on the button, the button uses the global variable states for the Front Vent from the oxygen/door/vent controller to determine if the vent requires to be In an open or closed sprite state. Essentially it checks the instance for the open or closed state of the Front Vent  in the office to then know if its closing or opening the Front Vent  for both the up-close view and the main view Front Vents. When it knows what state, the vents are currently in, it will change the front vents object sprite and set the front vents global state to open/close which the oxygen/door/vent controller uses to decrease/increase the oxygen levels.</a:t>
+                      </a:r>
+                    </a:p>
+                    <a:p>
+                      <a:pPr marL="0" indent="0">
+                        <a:buNone/>
+                      </a:pPr>
+                      <a:endParaRPr lang="en-GB" sz="800" dirty="0"/>
+                    </a:p>
+                  </a:txBody>
+                  <a:tcPr/>
+                </a:tc>
+                <a:tc>
+                  <a:txBody>
+                    <a:bodyPr/>
+                    <a:lstStyle/>
+                    <a:p>
+                      <a:pPr marL="0" indent="0">
+                        <a:buNone/>
+                      </a:pPr>
+                      <a:endParaRPr lang="en-GB" sz="800" dirty="0"/>
+                    </a:p>
+                  </a:txBody>
+                  <a:tcPr/>
+                </a:tc>
+                <a:extLst>
+                  <a:ext uri="{0D108BD9-81ED-4DB2-BD59-A6C34878D82A}">
+                    <a16:rowId xmlns:a16="http://schemas.microsoft.com/office/drawing/2014/main" val="2370588301"/>
+                  </a:ext>
+                </a:extLst>
+              </a:tr>
+              <a:tr h="470623">
+                <a:tc>
+                  <a:txBody>
+                    <a:bodyPr/>
+                    <a:lstStyle/>
+                    <a:p>
+                      <a:r>
+                        <a:rPr lang="en-GB" sz="800" dirty="0"/>
+                        <a:t>174.</a:t>
+                      </a:r>
+                    </a:p>
+                  </a:txBody>
+                  <a:tcPr/>
+                </a:tc>
+                <a:tc>
+                  <a:txBody>
+                    <a:bodyPr/>
+                    <a:lstStyle/>
+                    <a:p>
+                      <a:pPr marL="0" marR="0" lvl="0" indent="0" algn="l" defTabSz="914400" rtl="0" eaLnBrk="1" fontAlgn="auto" latinLnBrk="0" hangingPunct="1">
+                        <a:lnSpc>
+                          <a:spcPct val="100000"/>
+                        </a:lnSpc>
+                        <a:spcBef>
+                          <a:spcPts val="0"/>
+                        </a:spcBef>
+                        <a:spcAft>
+                          <a:spcPts val="0"/>
+                        </a:spcAft>
+                        <a:buClrTx/>
+                        <a:buSzTx/>
+                        <a:buFontTx/>
+                        <a:buNone/>
+                        <a:tabLst/>
+                        <a:defRPr/>
+                      </a:pPr>
+                      <a:r>
+                        <a:rPr lang="en-GB" sz="800" dirty="0"/>
+                        <a:t>Front Vent open/close states level 4</a:t>
+                      </a:r>
+                    </a:p>
+                    <a:p>
+                      <a:endParaRPr lang="en-GB" sz="800" dirty="0"/>
+                    </a:p>
+                  </a:txBody>
+                  <a:tcPr/>
+                </a:tc>
+                <a:tc>
+                  <a:txBody>
+                    <a:bodyPr/>
+                    <a:lstStyle/>
+                    <a:p>
+                      <a:pPr marL="0" marR="0" lvl="0" indent="0" algn="l" defTabSz="914400" rtl="0" eaLnBrk="1" fontAlgn="auto" latinLnBrk="0" hangingPunct="1">
+                        <a:lnSpc>
+                          <a:spcPct val="100000"/>
+                        </a:lnSpc>
+                        <a:spcBef>
+                          <a:spcPts val="0"/>
+                        </a:spcBef>
+                        <a:spcAft>
+                          <a:spcPts val="0"/>
+                        </a:spcAft>
+                        <a:buClrTx/>
+                        <a:buSzTx/>
+                        <a:buFontTx/>
+                        <a:buNone/>
+                        <a:tabLst/>
+                        <a:defRPr/>
+                      </a:pPr>
+                      <a:r>
+                        <a:rPr lang="en-GB" sz="800" dirty="0"/>
+                        <a:t>Rm_level4</a:t>
+                      </a:r>
+                    </a:p>
+                    <a:p>
+                      <a:endParaRPr lang="en-GB" sz="800" dirty="0"/>
+                    </a:p>
+                  </a:txBody>
+                  <a:tcPr/>
+                </a:tc>
+                <a:tc>
+                  <a:txBody>
+                    <a:bodyPr/>
+                    <a:lstStyle/>
+                    <a:p>
+                      <a:pPr marL="0" marR="0" lvl="0" indent="0" algn="l" defTabSz="914400" rtl="0" eaLnBrk="1" fontAlgn="auto" latinLnBrk="0" hangingPunct="1">
+                        <a:lnSpc>
+                          <a:spcPct val="100000"/>
+                        </a:lnSpc>
+                        <a:spcBef>
+                          <a:spcPts val="0"/>
+                        </a:spcBef>
+                        <a:spcAft>
+                          <a:spcPts val="0"/>
+                        </a:spcAft>
+                        <a:buClrTx/>
+                        <a:buSzTx/>
+                        <a:buFontTx/>
+                        <a:buNone/>
+                        <a:tabLst/>
+                        <a:defRPr/>
+                      </a:pPr>
+                      <a:r>
+                        <a:rPr lang="en-GB" sz="800" dirty="0"/>
+                        <a:t>obj_front_vent_button_lvl4</a:t>
+                      </a:r>
+                    </a:p>
+                    <a:p>
+                      <a:endParaRPr lang="en-GB" sz="800" dirty="0"/>
+                    </a:p>
+                  </a:txBody>
+                  <a:tcPr/>
+                </a:tc>
+                <a:tc>
+                  <a:txBody>
+                    <a:bodyPr/>
+                    <a:lstStyle/>
+                    <a:p>
+                      <a:pPr marL="0" marR="0" lvl="0" indent="0" algn="l" defTabSz="914400" rtl="0" eaLnBrk="1" fontAlgn="auto" latinLnBrk="0" hangingPunct="1">
+                        <a:lnSpc>
+                          <a:spcPct val="100000"/>
+                        </a:lnSpc>
+                        <a:spcBef>
+                          <a:spcPts val="0"/>
+                        </a:spcBef>
+                        <a:spcAft>
+                          <a:spcPts val="0"/>
+                        </a:spcAft>
+                        <a:buClrTx/>
+                        <a:buSzTx/>
+                        <a:buFontTx/>
+                        <a:buNone/>
+                        <a:tabLst/>
+                        <a:defRPr/>
+                      </a:pPr>
+                      <a:r>
+                        <a:rPr lang="en-GB" sz="800" dirty="0"/>
+                        <a:t>When the player left clicks on the button, the button uses the global variable states for the Front Vent from the oxygen/door/vent controller to determine if the vent requires to be In an open or closed sprite state. Essentially it checks the instance for the open or closed state of the Front Vent  in the office to then know if its closing or opening the Front Vent  for both the up-close view and the main view Front Vents. When it knows what state, the vents are currently in, it will change the front vents object sprite and set the front vents global state to open/close which the oxygen/door/vent controller uses to decrease/increase the oxygen levels.</a:t>
+                      </a:r>
+                    </a:p>
+                    <a:p>
+                      <a:pPr marL="0" indent="0">
+                        <a:buNone/>
+                      </a:pPr>
+                      <a:endParaRPr lang="en-GB" sz="800" dirty="0"/>
+                    </a:p>
+                  </a:txBody>
+                  <a:tcPr/>
+                </a:tc>
+                <a:tc>
+                  <a:txBody>
+                    <a:bodyPr/>
+                    <a:lstStyle/>
+                    <a:p>
+                      <a:pPr marL="0" indent="0">
+                        <a:buNone/>
+                      </a:pPr>
+                      <a:endParaRPr lang="en-GB" sz="800" dirty="0"/>
+                    </a:p>
+                  </a:txBody>
+                  <a:tcPr/>
+                </a:tc>
+                <a:extLst>
+                  <a:ext uri="{0D108BD9-81ED-4DB2-BD59-A6C34878D82A}">
+                    <a16:rowId xmlns:a16="http://schemas.microsoft.com/office/drawing/2014/main" val="931270710"/>
+                  </a:ext>
+                </a:extLst>
+              </a:tr>
+              <a:tr h="470623">
+                <a:tc>
+                  <a:txBody>
+                    <a:bodyPr/>
+                    <a:lstStyle/>
+                    <a:p>
+                      <a:r>
+                        <a:rPr lang="en-GB" sz="800" dirty="0"/>
+                        <a:t>175.</a:t>
+                      </a:r>
+                    </a:p>
+                  </a:txBody>
+                  <a:tcPr/>
+                </a:tc>
+                <a:tc>
+                  <a:txBody>
+                    <a:bodyPr/>
+                    <a:lstStyle/>
+                    <a:p>
+                      <a:pPr marL="0" marR="0" lvl="0" indent="0" algn="l" defTabSz="914400" rtl="0" eaLnBrk="1" fontAlgn="auto" latinLnBrk="0" hangingPunct="1">
+                        <a:lnSpc>
+                          <a:spcPct val="100000"/>
+                        </a:lnSpc>
+                        <a:spcBef>
+                          <a:spcPts val="0"/>
+                        </a:spcBef>
+                        <a:spcAft>
+                          <a:spcPts val="0"/>
+                        </a:spcAft>
+                        <a:buClrTx/>
+                        <a:buSzTx/>
+                        <a:buFontTx/>
+                        <a:buNone/>
+                        <a:tabLst/>
+                        <a:defRPr/>
+                      </a:pPr>
+                      <a:r>
+                        <a:rPr lang="en-GB" sz="800" dirty="0"/>
+                        <a:t>Front Vent open/close states level 5</a:t>
+                      </a:r>
+                    </a:p>
+                    <a:p>
+                      <a:endParaRPr lang="en-GB" sz="800" dirty="0"/>
+                    </a:p>
+                  </a:txBody>
+                  <a:tcPr/>
+                </a:tc>
+                <a:tc>
+                  <a:txBody>
+                    <a:bodyPr/>
+                    <a:lstStyle/>
+                    <a:p>
+                      <a:pPr marL="0" marR="0" lvl="0" indent="0" algn="l" defTabSz="914400" rtl="0" eaLnBrk="1" fontAlgn="auto" latinLnBrk="0" hangingPunct="1">
+                        <a:lnSpc>
+                          <a:spcPct val="100000"/>
+                        </a:lnSpc>
+                        <a:spcBef>
+                          <a:spcPts val="0"/>
+                        </a:spcBef>
+                        <a:spcAft>
+                          <a:spcPts val="0"/>
+                        </a:spcAft>
+                        <a:buClrTx/>
+                        <a:buSzTx/>
+                        <a:buFontTx/>
+                        <a:buNone/>
+                        <a:tabLst/>
+                        <a:defRPr/>
+                      </a:pPr>
+                      <a:r>
+                        <a:rPr lang="en-GB" sz="800" dirty="0"/>
+                        <a:t>Rm_level5</a:t>
+                      </a:r>
+                    </a:p>
+                    <a:p>
+                      <a:endParaRPr lang="en-GB" sz="800" dirty="0"/>
+                    </a:p>
+                  </a:txBody>
+                  <a:tcPr/>
+                </a:tc>
+                <a:tc>
+                  <a:txBody>
+                    <a:bodyPr/>
+                    <a:lstStyle/>
+                    <a:p>
+                      <a:pPr marL="0" marR="0" lvl="0" indent="0" algn="l" defTabSz="914400" rtl="0" eaLnBrk="1" fontAlgn="auto" latinLnBrk="0" hangingPunct="1">
+                        <a:lnSpc>
+                          <a:spcPct val="100000"/>
+                        </a:lnSpc>
+                        <a:spcBef>
+                          <a:spcPts val="0"/>
+                        </a:spcBef>
+                        <a:spcAft>
+                          <a:spcPts val="0"/>
+                        </a:spcAft>
+                        <a:buClrTx/>
+                        <a:buSzTx/>
+                        <a:buFontTx/>
+                        <a:buNone/>
+                        <a:tabLst/>
+                        <a:defRPr/>
+                      </a:pPr>
+                      <a:r>
+                        <a:rPr lang="en-GB" sz="800" dirty="0"/>
+                        <a:t>obj_front_vent_button_lvl5</a:t>
+                      </a:r>
+                    </a:p>
+                    <a:p>
+                      <a:endParaRPr lang="en-GB" sz="800" dirty="0"/>
+                    </a:p>
+                  </a:txBody>
+                  <a:tcPr/>
+                </a:tc>
+                <a:tc>
+                  <a:txBody>
+                    <a:bodyPr/>
+                    <a:lstStyle/>
+                    <a:p>
+                      <a:pPr marL="0" marR="0" lvl="0" indent="0" algn="l" defTabSz="914400" rtl="0" eaLnBrk="1" fontAlgn="auto" latinLnBrk="0" hangingPunct="1">
+                        <a:lnSpc>
+                          <a:spcPct val="100000"/>
+                        </a:lnSpc>
+                        <a:spcBef>
+                          <a:spcPts val="0"/>
+                        </a:spcBef>
+                        <a:spcAft>
+                          <a:spcPts val="0"/>
+                        </a:spcAft>
+                        <a:buClrTx/>
+                        <a:buSzTx/>
+                        <a:buFontTx/>
+                        <a:buNone/>
+                        <a:tabLst/>
+                        <a:defRPr/>
+                      </a:pPr>
+                      <a:r>
+                        <a:rPr lang="en-GB" sz="800" dirty="0"/>
+                        <a:t>When the player left clicks on the button, the button uses the global variable states for the Front Vent from the oxygen/door/vent controller to determine if the vent requires to be In an open or closed sprite state. Essentially it checks the instance for the open or closed state of the Front Vent  in the office to then know if its closing or opening the Front Vent  for both the up-close view and the main view Front Vents. When it knows what state, the vents are currently in, it will change the front vents object sprite and set the front vents global state to open/close which the oxygen/door/vent controller uses to decrease/increase the oxygen levels.</a:t>
+                      </a:r>
+                    </a:p>
+                    <a:p>
+                      <a:pPr marL="0" marR="0" lvl="0" indent="0" algn="l" defTabSz="914400" rtl="0" eaLnBrk="1" fontAlgn="auto" latinLnBrk="0" hangingPunct="1">
+                        <a:lnSpc>
+                          <a:spcPct val="100000"/>
+                        </a:lnSpc>
+                        <a:spcBef>
+                          <a:spcPts val="0"/>
+                        </a:spcBef>
+                        <a:spcAft>
+                          <a:spcPts val="0"/>
+                        </a:spcAft>
+                        <a:buClrTx/>
+                        <a:buSzTx/>
+                        <a:buFontTx/>
+                        <a:buNone/>
+                        <a:tabLst/>
+                        <a:defRPr/>
+                      </a:pPr>
+                      <a:endParaRPr lang="en-GB" sz="800" dirty="0"/>
+                    </a:p>
+                  </a:txBody>
+                  <a:tcPr/>
+                </a:tc>
+                <a:tc>
+                  <a:txBody>
+                    <a:bodyPr/>
+                    <a:lstStyle/>
+                    <a:p>
+                      <a:pPr marL="0" indent="0">
+                        <a:buNone/>
+                      </a:pPr>
+                      <a:endParaRPr lang="en-GB" sz="800" dirty="0"/>
+                    </a:p>
+                  </a:txBody>
+                  <a:tcPr/>
+                </a:tc>
+                <a:extLst>
+                  <a:ext uri="{0D108BD9-81ED-4DB2-BD59-A6C34878D82A}">
+                    <a16:rowId xmlns:a16="http://schemas.microsoft.com/office/drawing/2014/main" val="2983487539"/>
+                  </a:ext>
+                </a:extLst>
+              </a:tr>
+            </a:tbl>
+          </a:graphicData>
+        </a:graphic>
+      </p:graphicFrame>
+      <p:sp>
+        <p:nvSpPr>
+          <p:cNvPr id="2" name="TextBox 1">
+            <a:extLst>
+              <a:ext uri="{FF2B5EF4-FFF2-40B4-BE49-F238E27FC236}">
+                <a16:creationId xmlns:a16="http://schemas.microsoft.com/office/drawing/2014/main" id="{5E803DC0-248C-F031-6F0D-68BA267E0A67}"/>
+              </a:ext>
+            </a:extLst>
+          </p:cNvPr>
+          <p:cNvSpPr txBox="1"/>
+          <p:nvPr/>
+        </p:nvSpPr>
+        <p:spPr>
+          <a:xfrm>
+            <a:off x="0" y="22553"/>
+            <a:ext cx="3255122" cy="369332"/>
+          </a:xfrm>
+          <a:prstGeom prst="rect">
+            <a:avLst/>
+          </a:prstGeom>
+          <a:noFill/>
+        </p:spPr>
+        <p:txBody>
+          <a:bodyPr wrap="none" rtlCol="0">
+            <a:spAutoFit/>
+          </a:bodyPr>
+          <a:lstStyle/>
+          <a:p>
+            <a:r>
+              <a:rPr lang="en-GB" dirty="0"/>
+              <a:t>Door/vent Open/Close Buttons</a:t>
+            </a:r>
+          </a:p>
+        </p:txBody>
+      </p:sp>
+      <p:sp>
+        <p:nvSpPr>
+          <p:cNvPr id="5" name="TextBox 4">
+            <a:extLst>
+              <a:ext uri="{FF2B5EF4-FFF2-40B4-BE49-F238E27FC236}">
+                <a16:creationId xmlns:a16="http://schemas.microsoft.com/office/drawing/2014/main" id="{9ADB39F6-8981-E252-EBE0-4474F790F2DB}"/>
+              </a:ext>
+            </a:extLst>
+          </p:cNvPr>
+          <p:cNvSpPr txBox="1"/>
+          <p:nvPr/>
+        </p:nvSpPr>
+        <p:spPr>
+          <a:xfrm>
+            <a:off x="3255122" y="0"/>
+            <a:ext cx="8936877" cy="430887"/>
+          </a:xfrm>
+          <a:prstGeom prst="rect">
+            <a:avLst/>
+          </a:prstGeom>
+          <a:noFill/>
+        </p:spPr>
+        <p:txBody>
+          <a:bodyPr wrap="square">
+            <a:spAutoFit/>
+          </a:bodyPr>
+          <a:lstStyle/>
+          <a:p>
+            <a:pPr marL="0" marR="0" lvl="0" indent="0" algn="l" defTabSz="914400" rtl="0" eaLnBrk="1" fontAlgn="auto" latinLnBrk="0" hangingPunct="1">
+              <a:lnSpc>
+                <a:spcPct val="100000"/>
+              </a:lnSpc>
+              <a:spcBef>
+                <a:spcPts val="0"/>
+              </a:spcBef>
+              <a:spcAft>
+                <a:spcPts val="0"/>
+              </a:spcAft>
+              <a:buClrTx/>
+              <a:buSzTx/>
+              <a:buFontTx/>
+              <a:buNone/>
+              <a:tabLst/>
+              <a:defRPr/>
+            </a:pPr>
+            <a:r>
+              <a:rPr lang="en-GB" sz="1100" b="1" dirty="0"/>
+              <a:t>Note: Both the up-close and main view vents are in sync meaning that when I say front or back vents, I mean both front/back vents in the room.</a:t>
+            </a:r>
+          </a:p>
+        </p:txBody>
+      </p:sp>
     </p:spTree>
     <p:extLst>
       <p:ext uri="{BB962C8B-B14F-4D97-AF65-F5344CB8AC3E}">
-        <p14:creationId xmlns:p14="http://schemas.microsoft.com/office/powerpoint/2010/main" val="2975898861"/>
+        <p14:creationId xmlns:p14="http://schemas.microsoft.com/office/powerpoint/2010/main" val="3455802077"/>
+      </p:ext>
+    </p:extLst>
+  </p:cSld>
+  <p:clrMapOvr>
+    <a:masterClrMapping/>
+  </p:clrMapOvr>
+</p:sld>
+</file>
+
+<file path=ppt/slides/slide39.xml><?xml version="1.0" encoding="utf-8"?>
+<p:sld xmlns:a="http://schemas.openxmlformats.org/drawingml/2006/main" xmlns:r="http://schemas.openxmlformats.org/officeDocument/2006/relationships" xmlns:p="http://schemas.openxmlformats.org/presentationml/2006/main">
+  <p:cSld>
+    <p:spTree>
+      <p:nvGrpSpPr>
+        <p:cNvPr id="1" name="">
+          <a:extLst>
+            <a:ext uri="{FF2B5EF4-FFF2-40B4-BE49-F238E27FC236}">
+              <a16:creationId xmlns:a16="http://schemas.microsoft.com/office/drawing/2014/main" id="{F1820105-EE7F-D252-9E0F-A9B60ABCA6B8}"/>
+            </a:ext>
+          </a:extLst>
+        </p:cNvPr>
+        <p:cNvGrpSpPr/>
+        <p:nvPr/>
+      </p:nvGrpSpPr>
+      <p:grpSpPr>
+        <a:xfrm>
+          <a:off x="0" y="0"/>
+          <a:ext cx="0" cy="0"/>
+          <a:chOff x="0" y="0"/>
+          <a:chExt cx="0" cy="0"/>
+        </a:xfrm>
+      </p:grpSpPr>
+      <p:graphicFrame>
+        <p:nvGraphicFramePr>
+          <p:cNvPr id="4" name="Table 3">
+            <a:extLst>
+              <a:ext uri="{FF2B5EF4-FFF2-40B4-BE49-F238E27FC236}">
+                <a16:creationId xmlns:a16="http://schemas.microsoft.com/office/drawing/2014/main" id="{CF2A2820-7325-9ADC-8454-CC31E704CB33}"/>
+              </a:ext>
+            </a:extLst>
+          </p:cNvPr>
+          <p:cNvGraphicFramePr>
+            <a:graphicFrameLocks noGrp="1"/>
+          </p:cNvGraphicFramePr>
+          <p:nvPr>
+            <p:extLst>
+              <p:ext uri="{D42A27DB-BD31-4B8C-83A1-F6EECF244321}">
+                <p14:modId xmlns:p14="http://schemas.microsoft.com/office/powerpoint/2010/main" val="4092607965"/>
+              </p:ext>
+            </p:extLst>
+          </p:nvPr>
+        </p:nvGraphicFramePr>
+        <p:xfrm>
+          <a:off x="114301" y="391885"/>
+          <a:ext cx="11204571" cy="5682703"/>
+        </p:xfrm>
+        <a:graphic>
+          <a:graphicData uri="http://schemas.openxmlformats.org/drawingml/2006/table">
+            <a:tbl>
+              <a:tblPr firstRow="1" bandRow="1">
+                <a:tableStyleId>{5C22544A-7EE6-4342-B048-85BDC9FD1C3A}</a:tableStyleId>
+              </a:tblPr>
+              <a:tblGrid>
+                <a:gridCol w="798830">
+                  <a:extLst>
+                    <a:ext uri="{9D8B030D-6E8A-4147-A177-3AD203B41FA5}">
+                      <a16:colId xmlns:a16="http://schemas.microsoft.com/office/drawing/2014/main" val="2041145262"/>
+                    </a:ext>
+                  </a:extLst>
+                </a:gridCol>
+                <a:gridCol w="1647254">
+                  <a:extLst>
+                    <a:ext uri="{9D8B030D-6E8A-4147-A177-3AD203B41FA5}">
+                      <a16:colId xmlns:a16="http://schemas.microsoft.com/office/drawing/2014/main" val="3102287305"/>
+                    </a:ext>
+                  </a:extLst>
+                </a:gridCol>
+                <a:gridCol w="612955">
+                  <a:extLst>
+                    <a:ext uri="{9D8B030D-6E8A-4147-A177-3AD203B41FA5}">
+                      <a16:colId xmlns:a16="http://schemas.microsoft.com/office/drawing/2014/main" val="4080696647"/>
+                    </a:ext>
+                  </a:extLst>
+                </a:gridCol>
+                <a:gridCol w="1752897">
+                  <a:extLst>
+                    <a:ext uri="{9D8B030D-6E8A-4147-A177-3AD203B41FA5}">
+                      <a16:colId xmlns:a16="http://schemas.microsoft.com/office/drawing/2014/main" val="132880537"/>
+                    </a:ext>
+                  </a:extLst>
+                </a:gridCol>
+                <a:gridCol w="4519688">
+                  <a:extLst>
+                    <a:ext uri="{9D8B030D-6E8A-4147-A177-3AD203B41FA5}">
+                      <a16:colId xmlns:a16="http://schemas.microsoft.com/office/drawing/2014/main" val="786884226"/>
+                    </a:ext>
+                  </a:extLst>
+                </a:gridCol>
+                <a:gridCol w="1872947">
+                  <a:extLst>
+                    <a:ext uri="{9D8B030D-6E8A-4147-A177-3AD203B41FA5}">
+                      <a16:colId xmlns:a16="http://schemas.microsoft.com/office/drawing/2014/main" val="3328467923"/>
+                    </a:ext>
+                  </a:extLst>
+                </a:gridCol>
+              </a:tblGrid>
+              <a:tr h="470623">
+                <a:tc>
+                  <a:txBody>
+                    <a:bodyPr/>
+                    <a:lstStyle/>
+                    <a:p>
+                      <a:r>
+                        <a:rPr lang="en-GB" sz="800"/>
+                        <a:t>Test Number</a:t>
+                      </a:r>
+                      <a:endParaRPr lang="en-GB" sz="800" dirty="0"/>
+                    </a:p>
+                  </a:txBody>
+                  <a:tcPr/>
+                </a:tc>
+                <a:tc>
+                  <a:txBody>
+                    <a:bodyPr/>
+                    <a:lstStyle/>
+                    <a:p>
+                      <a:r>
+                        <a:rPr lang="en-GB" sz="800"/>
+                        <a:t>Test Type</a:t>
+                      </a:r>
+                      <a:endParaRPr lang="en-GB" sz="800" dirty="0"/>
+                    </a:p>
+                  </a:txBody>
+                  <a:tcPr/>
+                </a:tc>
+                <a:tc>
+                  <a:txBody>
+                    <a:bodyPr/>
+                    <a:lstStyle/>
+                    <a:p>
+                      <a:r>
+                        <a:rPr lang="en-GB" sz="800"/>
+                        <a:t>Room</a:t>
+                      </a:r>
+                      <a:endParaRPr lang="en-GB" sz="800" dirty="0"/>
+                    </a:p>
+                  </a:txBody>
+                  <a:tcPr/>
+                </a:tc>
+                <a:tc>
+                  <a:txBody>
+                    <a:bodyPr/>
+                    <a:lstStyle/>
+                    <a:p>
+                      <a:r>
+                        <a:rPr lang="en-GB" sz="800"/>
+                        <a:t>Objects Involved</a:t>
+                      </a:r>
+                      <a:endParaRPr lang="en-GB" sz="800" dirty="0"/>
+                    </a:p>
+                  </a:txBody>
+                  <a:tcPr/>
+                </a:tc>
+                <a:tc>
+                  <a:txBody>
+                    <a:bodyPr/>
+                    <a:lstStyle/>
+                    <a:p>
+                      <a:r>
+                        <a:rPr lang="en-GB" sz="800"/>
+                        <a:t>Expected Outcome</a:t>
+                      </a:r>
+                      <a:endParaRPr lang="en-GB" sz="800" dirty="0"/>
+                    </a:p>
+                  </a:txBody>
+                  <a:tcPr/>
+                </a:tc>
+                <a:tc>
+                  <a:txBody>
+                    <a:bodyPr/>
+                    <a:lstStyle/>
+                    <a:p>
+                      <a:r>
+                        <a:rPr lang="en-GB" sz="800"/>
+                        <a:t>Actual Outcome</a:t>
+                      </a:r>
+                      <a:endParaRPr lang="en-GB" sz="800" dirty="0"/>
+                    </a:p>
+                  </a:txBody>
+                  <a:tcPr/>
+                </a:tc>
+                <a:extLst>
+                  <a:ext uri="{0D108BD9-81ED-4DB2-BD59-A6C34878D82A}">
+                    <a16:rowId xmlns:a16="http://schemas.microsoft.com/office/drawing/2014/main" val="1296324342"/>
+                  </a:ext>
+                </a:extLst>
+              </a:tr>
+              <a:tr h="475162">
+                <a:tc>
+                  <a:txBody>
+                    <a:bodyPr/>
+                    <a:lstStyle/>
+                    <a:p>
+                      <a:r>
+                        <a:rPr lang="en-GB" sz="800" dirty="0"/>
+                        <a:t>176.</a:t>
+                      </a:r>
+                    </a:p>
+                  </a:txBody>
+                  <a:tcPr/>
+                </a:tc>
+                <a:tc>
+                  <a:txBody>
+                    <a:bodyPr/>
+                    <a:lstStyle/>
+                    <a:p>
+                      <a:r>
+                        <a:rPr lang="en-GB" sz="800" dirty="0"/>
+                        <a:t>Back Vent open/close states level 1</a:t>
+                      </a:r>
+                    </a:p>
+                  </a:txBody>
+                  <a:tcPr/>
+                </a:tc>
+                <a:tc>
+                  <a:txBody>
+                    <a:bodyPr/>
+                    <a:lstStyle/>
+                    <a:p>
+                      <a:r>
+                        <a:rPr lang="en-GB" sz="800" dirty="0"/>
+                        <a:t>Rm_level1</a:t>
+                      </a:r>
+                    </a:p>
+                  </a:txBody>
+                  <a:tcPr/>
+                </a:tc>
+                <a:tc>
+                  <a:txBody>
+                    <a:bodyPr/>
+                    <a:lstStyle/>
+                    <a:p>
+                      <a:r>
+                        <a:rPr lang="en-GB" sz="800" dirty="0" err="1"/>
+                        <a:t>obj_back_vent_button</a:t>
+                      </a:r>
+                      <a:endParaRPr lang="en-GB" sz="800" dirty="0"/>
+                    </a:p>
+                  </a:txBody>
+                  <a:tcPr/>
+                </a:tc>
+                <a:tc>
+                  <a:txBody>
+                    <a:bodyPr/>
+                    <a:lstStyle/>
+                    <a:p>
+                      <a:pPr marL="0" marR="0" lvl="0" indent="0" algn="l" defTabSz="914400" rtl="0" eaLnBrk="1" fontAlgn="auto" latinLnBrk="0" hangingPunct="1">
+                        <a:lnSpc>
+                          <a:spcPct val="100000"/>
+                        </a:lnSpc>
+                        <a:spcBef>
+                          <a:spcPts val="0"/>
+                        </a:spcBef>
+                        <a:spcAft>
+                          <a:spcPts val="0"/>
+                        </a:spcAft>
+                        <a:buClrTx/>
+                        <a:buSzTx/>
+                        <a:buFontTx/>
+                        <a:buNone/>
+                        <a:tabLst/>
+                        <a:defRPr/>
+                      </a:pPr>
+                      <a:r>
+                        <a:rPr lang="en-GB" sz="800" dirty="0"/>
+                        <a:t>When the player left clicks on the button, the button uses the global variable states for the back Vent from the oxygen/door/vent controller to determine if the vent requires to be In an open or closed sprite state. Essentially it checks the instance for the open or closed state of the back Vent  in the office to then know if its closing or opening the back Vent  for both the up-close view and the main view back Vents. When it knows what state, the vents are currently in, it will change the back vents object sprite and set the back vents global state to open/close which the oxygen/door/vent controller uses to decrease/increase the oxygen levels.</a:t>
+                      </a:r>
+                    </a:p>
+                  </a:txBody>
+                  <a:tcPr/>
+                </a:tc>
+                <a:tc>
+                  <a:txBody>
+                    <a:bodyPr/>
+                    <a:lstStyle/>
+                    <a:p>
+                      <a:endParaRPr lang="en-GB" sz="800" dirty="0"/>
+                    </a:p>
+                  </a:txBody>
+                  <a:tcPr/>
+                </a:tc>
+                <a:extLst>
+                  <a:ext uri="{0D108BD9-81ED-4DB2-BD59-A6C34878D82A}">
+                    <a16:rowId xmlns:a16="http://schemas.microsoft.com/office/drawing/2014/main" val="289599235"/>
+                  </a:ext>
+                </a:extLst>
+              </a:tr>
+              <a:tr h="470623">
+                <a:tc>
+                  <a:txBody>
+                    <a:bodyPr/>
+                    <a:lstStyle/>
+                    <a:p>
+                      <a:r>
+                        <a:rPr lang="en-GB" sz="800" dirty="0"/>
+                        <a:t>177.</a:t>
+                      </a:r>
+                    </a:p>
+                  </a:txBody>
+                  <a:tcPr/>
+                </a:tc>
+                <a:tc>
+                  <a:txBody>
+                    <a:bodyPr/>
+                    <a:lstStyle/>
+                    <a:p>
+                      <a:pPr marL="0" marR="0" lvl="0" indent="0" algn="l" defTabSz="914400" rtl="0" eaLnBrk="1" fontAlgn="auto" latinLnBrk="0" hangingPunct="1">
+                        <a:lnSpc>
+                          <a:spcPct val="100000"/>
+                        </a:lnSpc>
+                        <a:spcBef>
+                          <a:spcPts val="0"/>
+                        </a:spcBef>
+                        <a:spcAft>
+                          <a:spcPts val="0"/>
+                        </a:spcAft>
+                        <a:buClrTx/>
+                        <a:buSzTx/>
+                        <a:buFontTx/>
+                        <a:buNone/>
+                        <a:tabLst/>
+                        <a:defRPr/>
+                      </a:pPr>
+                      <a:r>
+                        <a:rPr lang="en-GB" sz="800" dirty="0"/>
+                        <a:t>Back Vent open/close states level 2</a:t>
+                      </a:r>
+                    </a:p>
+                    <a:p>
+                      <a:endParaRPr lang="en-GB" sz="800" dirty="0"/>
+                    </a:p>
+                  </a:txBody>
+                  <a:tcPr/>
+                </a:tc>
+                <a:tc>
+                  <a:txBody>
+                    <a:bodyPr/>
+                    <a:lstStyle/>
+                    <a:p>
+                      <a:pPr marL="0" marR="0" lvl="0" indent="0" algn="l" defTabSz="914400" rtl="0" eaLnBrk="1" fontAlgn="auto" latinLnBrk="0" hangingPunct="1">
+                        <a:lnSpc>
+                          <a:spcPct val="100000"/>
+                        </a:lnSpc>
+                        <a:spcBef>
+                          <a:spcPts val="0"/>
+                        </a:spcBef>
+                        <a:spcAft>
+                          <a:spcPts val="0"/>
+                        </a:spcAft>
+                        <a:buClrTx/>
+                        <a:buSzTx/>
+                        <a:buFontTx/>
+                        <a:buNone/>
+                        <a:tabLst/>
+                        <a:defRPr/>
+                      </a:pPr>
+                      <a:r>
+                        <a:rPr lang="en-GB" sz="800" dirty="0"/>
+                        <a:t>Rm_level2</a:t>
+                      </a:r>
+                    </a:p>
+                    <a:p>
+                      <a:endParaRPr lang="en-GB" sz="800" dirty="0"/>
+                    </a:p>
+                  </a:txBody>
+                  <a:tcPr/>
+                </a:tc>
+                <a:tc>
+                  <a:txBody>
+                    <a:bodyPr/>
+                    <a:lstStyle/>
+                    <a:p>
+                      <a:pPr marL="0" marR="0" lvl="0" indent="0" algn="l" defTabSz="914400" rtl="0" eaLnBrk="1" fontAlgn="auto" latinLnBrk="0" hangingPunct="1">
+                        <a:lnSpc>
+                          <a:spcPct val="100000"/>
+                        </a:lnSpc>
+                        <a:spcBef>
+                          <a:spcPts val="0"/>
+                        </a:spcBef>
+                        <a:spcAft>
+                          <a:spcPts val="0"/>
+                        </a:spcAft>
+                        <a:buClrTx/>
+                        <a:buSzTx/>
+                        <a:buFontTx/>
+                        <a:buNone/>
+                        <a:tabLst/>
+                        <a:defRPr/>
+                      </a:pPr>
+                      <a:r>
+                        <a:rPr lang="en-GB" sz="800" dirty="0"/>
+                        <a:t>obj_back_vent_button_lvl2</a:t>
+                      </a:r>
+                    </a:p>
+                    <a:p>
+                      <a:endParaRPr lang="en-GB" sz="800" dirty="0"/>
+                    </a:p>
+                  </a:txBody>
+                  <a:tcPr/>
+                </a:tc>
+                <a:tc>
+                  <a:txBody>
+                    <a:bodyPr/>
+                    <a:lstStyle/>
+                    <a:p>
+                      <a:pPr marL="0" marR="0" lvl="0" indent="0" algn="l" defTabSz="914400" rtl="0" eaLnBrk="1" fontAlgn="auto" latinLnBrk="0" hangingPunct="1">
+                        <a:lnSpc>
+                          <a:spcPct val="100000"/>
+                        </a:lnSpc>
+                        <a:spcBef>
+                          <a:spcPts val="0"/>
+                        </a:spcBef>
+                        <a:spcAft>
+                          <a:spcPts val="0"/>
+                        </a:spcAft>
+                        <a:buClrTx/>
+                        <a:buSzTx/>
+                        <a:buFontTx/>
+                        <a:buNone/>
+                        <a:tabLst/>
+                        <a:defRPr/>
+                      </a:pPr>
+                      <a:r>
+                        <a:rPr lang="en-GB" sz="800" dirty="0"/>
+                        <a:t>When the player left clicks on the button, the button uses the global variable states for the back Vent from the oxygen/door/vent controller to determine if the vent requires to be In an open or closed sprite state. Essentially it checks the instance for the open or closed state of the back Vent  in the office to then know if its closing or opening the back Vent  for both the up-close view and the main view back Vents. When it knows what state, the vents are currently in, it will change the back vents object sprite and set the back vents global state to open/close which the oxygen/door/vent controller uses to decrease/increase the oxygen levels.</a:t>
+                      </a:r>
+                    </a:p>
+                    <a:p>
+                      <a:pPr marL="0" indent="0">
+                        <a:buNone/>
+                      </a:pPr>
+                      <a:endParaRPr lang="en-GB" sz="800" dirty="0"/>
+                    </a:p>
+                  </a:txBody>
+                  <a:tcPr/>
+                </a:tc>
+                <a:tc>
+                  <a:txBody>
+                    <a:bodyPr/>
+                    <a:lstStyle/>
+                    <a:p>
+                      <a:pPr marL="0" indent="0">
+                        <a:buNone/>
+                      </a:pPr>
+                      <a:endParaRPr lang="en-GB" sz="800" dirty="0"/>
+                    </a:p>
+                  </a:txBody>
+                  <a:tcPr/>
+                </a:tc>
+                <a:extLst>
+                  <a:ext uri="{0D108BD9-81ED-4DB2-BD59-A6C34878D82A}">
+                    <a16:rowId xmlns:a16="http://schemas.microsoft.com/office/drawing/2014/main" val="4163288784"/>
+                  </a:ext>
+                </a:extLst>
+              </a:tr>
+              <a:tr h="470623">
+                <a:tc>
+                  <a:txBody>
+                    <a:bodyPr/>
+                    <a:lstStyle/>
+                    <a:p>
+                      <a:r>
+                        <a:rPr lang="en-GB" sz="800" dirty="0"/>
+                        <a:t>178.</a:t>
+                      </a:r>
+                    </a:p>
+                  </a:txBody>
+                  <a:tcPr/>
+                </a:tc>
+                <a:tc>
+                  <a:txBody>
+                    <a:bodyPr/>
+                    <a:lstStyle/>
+                    <a:p>
+                      <a:pPr marL="0" marR="0" lvl="0" indent="0" algn="l" defTabSz="914400" rtl="0" eaLnBrk="1" fontAlgn="auto" latinLnBrk="0" hangingPunct="1">
+                        <a:lnSpc>
+                          <a:spcPct val="100000"/>
+                        </a:lnSpc>
+                        <a:spcBef>
+                          <a:spcPts val="0"/>
+                        </a:spcBef>
+                        <a:spcAft>
+                          <a:spcPts val="0"/>
+                        </a:spcAft>
+                        <a:buClrTx/>
+                        <a:buSzTx/>
+                        <a:buFontTx/>
+                        <a:buNone/>
+                        <a:tabLst/>
+                        <a:defRPr/>
+                      </a:pPr>
+                      <a:r>
+                        <a:rPr lang="en-GB" sz="800" dirty="0"/>
+                        <a:t>Back Vent open/close states level 3</a:t>
+                      </a:r>
+                    </a:p>
+                    <a:p>
+                      <a:endParaRPr lang="en-GB" sz="800" dirty="0"/>
+                    </a:p>
+                  </a:txBody>
+                  <a:tcPr/>
+                </a:tc>
+                <a:tc>
+                  <a:txBody>
+                    <a:bodyPr/>
+                    <a:lstStyle/>
+                    <a:p>
+                      <a:pPr marL="0" marR="0" lvl="0" indent="0" algn="l" defTabSz="914400" rtl="0" eaLnBrk="1" fontAlgn="auto" latinLnBrk="0" hangingPunct="1">
+                        <a:lnSpc>
+                          <a:spcPct val="100000"/>
+                        </a:lnSpc>
+                        <a:spcBef>
+                          <a:spcPts val="0"/>
+                        </a:spcBef>
+                        <a:spcAft>
+                          <a:spcPts val="0"/>
+                        </a:spcAft>
+                        <a:buClrTx/>
+                        <a:buSzTx/>
+                        <a:buFontTx/>
+                        <a:buNone/>
+                        <a:tabLst/>
+                        <a:defRPr/>
+                      </a:pPr>
+                      <a:r>
+                        <a:rPr lang="en-GB" sz="800" dirty="0"/>
+                        <a:t>Rm_level3</a:t>
+                      </a:r>
+                    </a:p>
+                    <a:p>
+                      <a:endParaRPr lang="en-GB" sz="800" dirty="0"/>
+                    </a:p>
+                  </a:txBody>
+                  <a:tcPr/>
+                </a:tc>
+                <a:tc>
+                  <a:txBody>
+                    <a:bodyPr/>
+                    <a:lstStyle/>
+                    <a:p>
+                      <a:pPr marL="0" marR="0" lvl="0" indent="0" algn="l" defTabSz="914400" rtl="0" eaLnBrk="1" fontAlgn="auto" latinLnBrk="0" hangingPunct="1">
+                        <a:lnSpc>
+                          <a:spcPct val="100000"/>
+                        </a:lnSpc>
+                        <a:spcBef>
+                          <a:spcPts val="0"/>
+                        </a:spcBef>
+                        <a:spcAft>
+                          <a:spcPts val="0"/>
+                        </a:spcAft>
+                        <a:buClrTx/>
+                        <a:buSzTx/>
+                        <a:buFontTx/>
+                        <a:buNone/>
+                        <a:tabLst/>
+                        <a:defRPr/>
+                      </a:pPr>
+                      <a:r>
+                        <a:rPr lang="en-GB" sz="800" dirty="0"/>
+                        <a:t>obj_back_vent_button_lvl3</a:t>
+                      </a:r>
+                    </a:p>
+                    <a:p>
+                      <a:endParaRPr lang="en-GB" sz="800" dirty="0"/>
+                    </a:p>
+                  </a:txBody>
+                  <a:tcPr/>
+                </a:tc>
+                <a:tc>
+                  <a:txBody>
+                    <a:bodyPr/>
+                    <a:lstStyle/>
+                    <a:p>
+                      <a:pPr marL="0" marR="0" lvl="0" indent="0" algn="l" defTabSz="914400" rtl="0" eaLnBrk="1" fontAlgn="auto" latinLnBrk="0" hangingPunct="1">
+                        <a:lnSpc>
+                          <a:spcPct val="100000"/>
+                        </a:lnSpc>
+                        <a:spcBef>
+                          <a:spcPts val="0"/>
+                        </a:spcBef>
+                        <a:spcAft>
+                          <a:spcPts val="0"/>
+                        </a:spcAft>
+                        <a:buClrTx/>
+                        <a:buSzTx/>
+                        <a:buFontTx/>
+                        <a:buNone/>
+                        <a:tabLst/>
+                        <a:defRPr/>
+                      </a:pPr>
+                      <a:r>
+                        <a:rPr lang="en-GB" sz="800" dirty="0"/>
+                        <a:t>When the player left clicks on the button, the button uses the global variable states for the back Vent from the oxygen/door/vent controller to determine if the vent requires to be In an open or closed sprite state. Essentially it checks the instance for the open or closed state of the back Vent  in the office to then know if its closing or opening the back Vent  for both the up-close view and the main view back Vents. When it knows what state, the vents are currently in, it will change the back vents object sprite and set the back vents global state to open/close which the oxygen/door/vent controller uses to decrease/increase the oxygen levels.</a:t>
+                      </a:r>
+                    </a:p>
+                    <a:p>
+                      <a:pPr marL="0" indent="0">
+                        <a:buNone/>
+                      </a:pPr>
+                      <a:endParaRPr lang="en-GB" sz="800" dirty="0"/>
+                    </a:p>
+                  </a:txBody>
+                  <a:tcPr/>
+                </a:tc>
+                <a:tc>
+                  <a:txBody>
+                    <a:bodyPr/>
+                    <a:lstStyle/>
+                    <a:p>
+                      <a:pPr marL="0" indent="0">
+                        <a:buNone/>
+                      </a:pPr>
+                      <a:endParaRPr lang="en-GB" sz="800" dirty="0"/>
+                    </a:p>
+                  </a:txBody>
+                  <a:tcPr/>
+                </a:tc>
+                <a:extLst>
+                  <a:ext uri="{0D108BD9-81ED-4DB2-BD59-A6C34878D82A}">
+                    <a16:rowId xmlns:a16="http://schemas.microsoft.com/office/drawing/2014/main" val="2370588301"/>
+                  </a:ext>
+                </a:extLst>
+              </a:tr>
+              <a:tr h="470623">
+                <a:tc>
+                  <a:txBody>
+                    <a:bodyPr/>
+                    <a:lstStyle/>
+                    <a:p>
+                      <a:r>
+                        <a:rPr lang="en-GB" sz="800" dirty="0"/>
+                        <a:t>179.</a:t>
+                      </a:r>
+                    </a:p>
+                  </a:txBody>
+                  <a:tcPr/>
+                </a:tc>
+                <a:tc>
+                  <a:txBody>
+                    <a:bodyPr/>
+                    <a:lstStyle/>
+                    <a:p>
+                      <a:pPr marL="0" marR="0" lvl="0" indent="0" algn="l" defTabSz="914400" rtl="0" eaLnBrk="1" fontAlgn="auto" latinLnBrk="0" hangingPunct="1">
+                        <a:lnSpc>
+                          <a:spcPct val="100000"/>
+                        </a:lnSpc>
+                        <a:spcBef>
+                          <a:spcPts val="0"/>
+                        </a:spcBef>
+                        <a:spcAft>
+                          <a:spcPts val="0"/>
+                        </a:spcAft>
+                        <a:buClrTx/>
+                        <a:buSzTx/>
+                        <a:buFontTx/>
+                        <a:buNone/>
+                        <a:tabLst/>
+                        <a:defRPr/>
+                      </a:pPr>
+                      <a:r>
+                        <a:rPr lang="en-GB" sz="800" dirty="0"/>
+                        <a:t>Back Vent open/close states level 4</a:t>
+                      </a:r>
+                    </a:p>
+                    <a:p>
+                      <a:endParaRPr lang="en-GB" sz="800" dirty="0"/>
+                    </a:p>
+                  </a:txBody>
+                  <a:tcPr/>
+                </a:tc>
+                <a:tc>
+                  <a:txBody>
+                    <a:bodyPr/>
+                    <a:lstStyle/>
+                    <a:p>
+                      <a:pPr marL="0" marR="0" lvl="0" indent="0" algn="l" defTabSz="914400" rtl="0" eaLnBrk="1" fontAlgn="auto" latinLnBrk="0" hangingPunct="1">
+                        <a:lnSpc>
+                          <a:spcPct val="100000"/>
+                        </a:lnSpc>
+                        <a:spcBef>
+                          <a:spcPts val="0"/>
+                        </a:spcBef>
+                        <a:spcAft>
+                          <a:spcPts val="0"/>
+                        </a:spcAft>
+                        <a:buClrTx/>
+                        <a:buSzTx/>
+                        <a:buFontTx/>
+                        <a:buNone/>
+                        <a:tabLst/>
+                        <a:defRPr/>
+                      </a:pPr>
+                      <a:r>
+                        <a:rPr lang="en-GB" sz="800" dirty="0"/>
+                        <a:t>Rm_level4</a:t>
+                      </a:r>
+                    </a:p>
+                    <a:p>
+                      <a:endParaRPr lang="en-GB" sz="800" dirty="0"/>
+                    </a:p>
+                  </a:txBody>
+                  <a:tcPr/>
+                </a:tc>
+                <a:tc>
+                  <a:txBody>
+                    <a:bodyPr/>
+                    <a:lstStyle/>
+                    <a:p>
+                      <a:pPr marL="0" marR="0" lvl="0" indent="0" algn="l" defTabSz="914400" rtl="0" eaLnBrk="1" fontAlgn="auto" latinLnBrk="0" hangingPunct="1">
+                        <a:lnSpc>
+                          <a:spcPct val="100000"/>
+                        </a:lnSpc>
+                        <a:spcBef>
+                          <a:spcPts val="0"/>
+                        </a:spcBef>
+                        <a:spcAft>
+                          <a:spcPts val="0"/>
+                        </a:spcAft>
+                        <a:buClrTx/>
+                        <a:buSzTx/>
+                        <a:buFontTx/>
+                        <a:buNone/>
+                        <a:tabLst/>
+                        <a:defRPr/>
+                      </a:pPr>
+                      <a:r>
+                        <a:rPr lang="en-GB" sz="800" dirty="0"/>
+                        <a:t>obj_back_vent_button_lvl4</a:t>
+                      </a:r>
+                    </a:p>
+                    <a:p>
+                      <a:endParaRPr lang="en-GB" sz="800" dirty="0"/>
+                    </a:p>
+                  </a:txBody>
+                  <a:tcPr/>
+                </a:tc>
+                <a:tc>
+                  <a:txBody>
+                    <a:bodyPr/>
+                    <a:lstStyle/>
+                    <a:p>
+                      <a:pPr marL="0" marR="0" lvl="0" indent="0" algn="l" defTabSz="914400" rtl="0" eaLnBrk="1" fontAlgn="auto" latinLnBrk="0" hangingPunct="1">
+                        <a:lnSpc>
+                          <a:spcPct val="100000"/>
+                        </a:lnSpc>
+                        <a:spcBef>
+                          <a:spcPts val="0"/>
+                        </a:spcBef>
+                        <a:spcAft>
+                          <a:spcPts val="0"/>
+                        </a:spcAft>
+                        <a:buClrTx/>
+                        <a:buSzTx/>
+                        <a:buFontTx/>
+                        <a:buNone/>
+                        <a:tabLst/>
+                        <a:defRPr/>
+                      </a:pPr>
+                      <a:r>
+                        <a:rPr lang="en-GB" sz="800" dirty="0"/>
+                        <a:t>When the player left clicks on the button, the button uses the global variable states for the back Vent from the oxygen/door/vent controller to determine if the vent requires to be In an open or closed sprite state. Essentially it checks the instance for the open or closed state of the back Vent  in the office to then know if its closing or opening the back Vent  for both the up-close view and the main view back Vents. When it knows what state, the vents are currently in, it will change the back vents object sprite and set the back vents global state to open/close which the oxygen/door/vent controller uses to decrease/increase the oxygen levels.</a:t>
+                      </a:r>
+                    </a:p>
+                    <a:p>
+                      <a:pPr marL="0" indent="0">
+                        <a:buNone/>
+                      </a:pPr>
+                      <a:endParaRPr lang="en-GB" sz="800" dirty="0"/>
+                    </a:p>
+                  </a:txBody>
+                  <a:tcPr/>
+                </a:tc>
+                <a:tc>
+                  <a:txBody>
+                    <a:bodyPr/>
+                    <a:lstStyle/>
+                    <a:p>
+                      <a:pPr marL="0" indent="0">
+                        <a:buNone/>
+                      </a:pPr>
+                      <a:endParaRPr lang="en-GB" sz="800" dirty="0"/>
+                    </a:p>
+                  </a:txBody>
+                  <a:tcPr/>
+                </a:tc>
+                <a:extLst>
+                  <a:ext uri="{0D108BD9-81ED-4DB2-BD59-A6C34878D82A}">
+                    <a16:rowId xmlns:a16="http://schemas.microsoft.com/office/drawing/2014/main" val="931270710"/>
+                  </a:ext>
+                </a:extLst>
+              </a:tr>
+              <a:tr h="470623">
+                <a:tc>
+                  <a:txBody>
+                    <a:bodyPr/>
+                    <a:lstStyle/>
+                    <a:p>
+                      <a:r>
+                        <a:rPr lang="en-GB" sz="800" dirty="0"/>
+                        <a:t>180.</a:t>
+                      </a:r>
+                    </a:p>
+                  </a:txBody>
+                  <a:tcPr/>
+                </a:tc>
+                <a:tc>
+                  <a:txBody>
+                    <a:bodyPr/>
+                    <a:lstStyle/>
+                    <a:p>
+                      <a:pPr marL="0" marR="0" lvl="0" indent="0" algn="l" defTabSz="914400" rtl="0" eaLnBrk="1" fontAlgn="auto" latinLnBrk="0" hangingPunct="1">
+                        <a:lnSpc>
+                          <a:spcPct val="100000"/>
+                        </a:lnSpc>
+                        <a:spcBef>
+                          <a:spcPts val="0"/>
+                        </a:spcBef>
+                        <a:spcAft>
+                          <a:spcPts val="0"/>
+                        </a:spcAft>
+                        <a:buClrTx/>
+                        <a:buSzTx/>
+                        <a:buFontTx/>
+                        <a:buNone/>
+                        <a:tabLst/>
+                        <a:defRPr/>
+                      </a:pPr>
+                      <a:r>
+                        <a:rPr lang="en-GB" sz="800" dirty="0"/>
+                        <a:t>Back Vent open/close states level 5</a:t>
+                      </a:r>
+                    </a:p>
+                    <a:p>
+                      <a:endParaRPr lang="en-GB" sz="800" dirty="0"/>
+                    </a:p>
+                  </a:txBody>
+                  <a:tcPr/>
+                </a:tc>
+                <a:tc>
+                  <a:txBody>
+                    <a:bodyPr/>
+                    <a:lstStyle/>
+                    <a:p>
+                      <a:pPr marL="0" marR="0" lvl="0" indent="0" algn="l" defTabSz="914400" rtl="0" eaLnBrk="1" fontAlgn="auto" latinLnBrk="0" hangingPunct="1">
+                        <a:lnSpc>
+                          <a:spcPct val="100000"/>
+                        </a:lnSpc>
+                        <a:spcBef>
+                          <a:spcPts val="0"/>
+                        </a:spcBef>
+                        <a:spcAft>
+                          <a:spcPts val="0"/>
+                        </a:spcAft>
+                        <a:buClrTx/>
+                        <a:buSzTx/>
+                        <a:buFontTx/>
+                        <a:buNone/>
+                        <a:tabLst/>
+                        <a:defRPr/>
+                      </a:pPr>
+                      <a:r>
+                        <a:rPr lang="en-GB" sz="800" dirty="0"/>
+                        <a:t>Rm_level5</a:t>
+                      </a:r>
+                    </a:p>
+                    <a:p>
+                      <a:endParaRPr lang="en-GB" sz="800" dirty="0"/>
+                    </a:p>
+                  </a:txBody>
+                  <a:tcPr/>
+                </a:tc>
+                <a:tc>
+                  <a:txBody>
+                    <a:bodyPr/>
+                    <a:lstStyle/>
+                    <a:p>
+                      <a:pPr marL="0" marR="0" lvl="0" indent="0" algn="l" defTabSz="914400" rtl="0" eaLnBrk="1" fontAlgn="auto" latinLnBrk="0" hangingPunct="1">
+                        <a:lnSpc>
+                          <a:spcPct val="100000"/>
+                        </a:lnSpc>
+                        <a:spcBef>
+                          <a:spcPts val="0"/>
+                        </a:spcBef>
+                        <a:spcAft>
+                          <a:spcPts val="0"/>
+                        </a:spcAft>
+                        <a:buClrTx/>
+                        <a:buSzTx/>
+                        <a:buFontTx/>
+                        <a:buNone/>
+                        <a:tabLst/>
+                        <a:defRPr/>
+                      </a:pPr>
+                      <a:r>
+                        <a:rPr lang="en-GB" sz="800" dirty="0"/>
+                        <a:t>obj_back_vent_button_lvl5</a:t>
+                      </a:r>
+                    </a:p>
+                    <a:p>
+                      <a:endParaRPr lang="en-GB" sz="800" dirty="0"/>
+                    </a:p>
+                  </a:txBody>
+                  <a:tcPr/>
+                </a:tc>
+                <a:tc>
+                  <a:txBody>
+                    <a:bodyPr/>
+                    <a:lstStyle/>
+                    <a:p>
+                      <a:pPr marL="0" marR="0" lvl="0" indent="0" algn="l" defTabSz="914400" rtl="0" eaLnBrk="1" fontAlgn="auto" latinLnBrk="0" hangingPunct="1">
+                        <a:lnSpc>
+                          <a:spcPct val="100000"/>
+                        </a:lnSpc>
+                        <a:spcBef>
+                          <a:spcPts val="0"/>
+                        </a:spcBef>
+                        <a:spcAft>
+                          <a:spcPts val="0"/>
+                        </a:spcAft>
+                        <a:buClrTx/>
+                        <a:buSzTx/>
+                        <a:buFontTx/>
+                        <a:buNone/>
+                        <a:tabLst/>
+                        <a:defRPr/>
+                      </a:pPr>
+                      <a:r>
+                        <a:rPr lang="en-GB" sz="800" dirty="0"/>
+                        <a:t>When the player left clicks on the button, the button uses the global variable states for the back Vent from the oxygen/door/vent controller to determine if the vent requires to be In an open or closed sprite state. Essentially it checks the instance for the open or closed state of the back Vent  in the office to then know if its closing or opening the back Vent  for both the up-close view and the main view back Vents. When it knows what state, the vents are currently in, it will change the back vents object sprite and set the back vents global state to open/close which the oxygen/door/vent controller uses to decrease/increase the oxygen levels.</a:t>
+                      </a:r>
+                    </a:p>
+                    <a:p>
+                      <a:pPr marL="0" marR="0" lvl="0" indent="0" algn="l" defTabSz="914400" rtl="0" eaLnBrk="1" fontAlgn="auto" latinLnBrk="0" hangingPunct="1">
+                        <a:lnSpc>
+                          <a:spcPct val="100000"/>
+                        </a:lnSpc>
+                        <a:spcBef>
+                          <a:spcPts val="0"/>
+                        </a:spcBef>
+                        <a:spcAft>
+                          <a:spcPts val="0"/>
+                        </a:spcAft>
+                        <a:buClrTx/>
+                        <a:buSzTx/>
+                        <a:buFontTx/>
+                        <a:buNone/>
+                        <a:tabLst/>
+                        <a:defRPr/>
+                      </a:pPr>
+                      <a:endParaRPr lang="en-GB" sz="800" dirty="0"/>
+                    </a:p>
+                  </a:txBody>
+                  <a:tcPr/>
+                </a:tc>
+                <a:tc>
+                  <a:txBody>
+                    <a:bodyPr/>
+                    <a:lstStyle/>
+                    <a:p>
+                      <a:pPr marL="0" indent="0">
+                        <a:buNone/>
+                      </a:pPr>
+                      <a:endParaRPr lang="en-GB" sz="800" dirty="0"/>
+                    </a:p>
+                  </a:txBody>
+                  <a:tcPr/>
+                </a:tc>
+                <a:extLst>
+                  <a:ext uri="{0D108BD9-81ED-4DB2-BD59-A6C34878D82A}">
+                    <a16:rowId xmlns:a16="http://schemas.microsoft.com/office/drawing/2014/main" val="2983487539"/>
+                  </a:ext>
+                </a:extLst>
+              </a:tr>
+            </a:tbl>
+          </a:graphicData>
+        </a:graphic>
+      </p:graphicFrame>
+      <p:sp>
+        <p:nvSpPr>
+          <p:cNvPr id="2" name="TextBox 1">
+            <a:extLst>
+              <a:ext uri="{FF2B5EF4-FFF2-40B4-BE49-F238E27FC236}">
+                <a16:creationId xmlns:a16="http://schemas.microsoft.com/office/drawing/2014/main" id="{878E0A35-38D8-CB93-CA9C-CC890C8F9C98}"/>
+              </a:ext>
+            </a:extLst>
+          </p:cNvPr>
+          <p:cNvSpPr txBox="1"/>
+          <p:nvPr/>
+        </p:nvSpPr>
+        <p:spPr>
+          <a:xfrm>
+            <a:off x="0" y="22553"/>
+            <a:ext cx="3255122" cy="369332"/>
+          </a:xfrm>
+          <a:prstGeom prst="rect">
+            <a:avLst/>
+          </a:prstGeom>
+          <a:noFill/>
+        </p:spPr>
+        <p:txBody>
+          <a:bodyPr wrap="none" rtlCol="0">
+            <a:spAutoFit/>
+          </a:bodyPr>
+          <a:lstStyle/>
+          <a:p>
+            <a:r>
+              <a:rPr lang="en-GB" dirty="0"/>
+              <a:t>Door/vent Open/Close Buttons</a:t>
+            </a:r>
+          </a:p>
+        </p:txBody>
+      </p:sp>
+      <p:sp>
+        <p:nvSpPr>
+          <p:cNvPr id="3" name="TextBox 2">
+            <a:extLst>
+              <a:ext uri="{FF2B5EF4-FFF2-40B4-BE49-F238E27FC236}">
+                <a16:creationId xmlns:a16="http://schemas.microsoft.com/office/drawing/2014/main" id="{5BED3D71-F390-71D4-F19D-17483D2CC06E}"/>
+              </a:ext>
+            </a:extLst>
+          </p:cNvPr>
+          <p:cNvSpPr txBox="1"/>
+          <p:nvPr/>
+        </p:nvSpPr>
+        <p:spPr>
+          <a:xfrm>
+            <a:off x="3255122" y="0"/>
+            <a:ext cx="8936877" cy="430887"/>
+          </a:xfrm>
+          <a:prstGeom prst="rect">
+            <a:avLst/>
+          </a:prstGeom>
+          <a:noFill/>
+        </p:spPr>
+        <p:txBody>
+          <a:bodyPr wrap="square">
+            <a:spAutoFit/>
+          </a:bodyPr>
+          <a:lstStyle/>
+          <a:p>
+            <a:pPr marL="0" marR="0" lvl="0" indent="0" algn="l" defTabSz="914400" rtl="0" eaLnBrk="1" fontAlgn="auto" latinLnBrk="0" hangingPunct="1">
+              <a:lnSpc>
+                <a:spcPct val="100000"/>
+              </a:lnSpc>
+              <a:spcBef>
+                <a:spcPts val="0"/>
+              </a:spcBef>
+              <a:spcAft>
+                <a:spcPts val="0"/>
+              </a:spcAft>
+              <a:buClrTx/>
+              <a:buSzTx/>
+              <a:buFontTx/>
+              <a:buNone/>
+              <a:tabLst/>
+              <a:defRPr/>
+            </a:pPr>
+            <a:r>
+              <a:rPr lang="en-GB" sz="1100" b="1" dirty="0"/>
+              <a:t>Note: Both the up-close and main view vents are in sync meaning that when I say front or back vents, I mean both front/back vents in the room.</a:t>
+            </a:r>
+          </a:p>
+        </p:txBody>
+      </p:sp>
+    </p:spTree>
+    <p:extLst>
+      <p:ext uri="{BB962C8B-B14F-4D97-AF65-F5344CB8AC3E}">
+        <p14:creationId xmlns:p14="http://schemas.microsoft.com/office/powerpoint/2010/main" val="2670496894"/>
       </p:ext>
     </p:extLst>
   </p:cSld>
@@ -35302,6 +38085,2393 @@
     <p:extLst>
       <p:ext uri="{BB962C8B-B14F-4D97-AF65-F5344CB8AC3E}">
         <p14:creationId xmlns:p14="http://schemas.microsoft.com/office/powerpoint/2010/main" val="3802303711"/>
+      </p:ext>
+    </p:extLst>
+  </p:cSld>
+  <p:clrMapOvr>
+    <a:masterClrMapping/>
+  </p:clrMapOvr>
+</p:sld>
+</file>
+
+<file path=ppt/slides/slide40.xml><?xml version="1.0" encoding="utf-8"?>
+<p:sld xmlns:a="http://schemas.openxmlformats.org/drawingml/2006/main" xmlns:r="http://schemas.openxmlformats.org/officeDocument/2006/relationships" xmlns:p="http://schemas.openxmlformats.org/presentationml/2006/main">
+  <p:cSld>
+    <p:spTree>
+      <p:nvGrpSpPr>
+        <p:cNvPr id="1" name="">
+          <a:extLst>
+            <a:ext uri="{FF2B5EF4-FFF2-40B4-BE49-F238E27FC236}">
+              <a16:creationId xmlns:a16="http://schemas.microsoft.com/office/drawing/2014/main" id="{6C5FDCC4-8951-07F1-2096-742CA7CC5FCE}"/>
+            </a:ext>
+          </a:extLst>
+        </p:cNvPr>
+        <p:cNvGrpSpPr/>
+        <p:nvPr/>
+      </p:nvGrpSpPr>
+      <p:grpSpPr>
+        <a:xfrm>
+          <a:off x="0" y="0"/>
+          <a:ext cx="0" cy="0"/>
+          <a:chOff x="0" y="0"/>
+          <a:chExt cx="0" cy="0"/>
+        </a:xfrm>
+      </p:grpSpPr>
+      <p:graphicFrame>
+        <p:nvGraphicFramePr>
+          <p:cNvPr id="4" name="Table 3">
+            <a:extLst>
+              <a:ext uri="{FF2B5EF4-FFF2-40B4-BE49-F238E27FC236}">
+                <a16:creationId xmlns:a16="http://schemas.microsoft.com/office/drawing/2014/main" id="{C351796F-5522-29DE-26F6-A6D17F3FD64B}"/>
+              </a:ext>
+            </a:extLst>
+          </p:cNvPr>
+          <p:cNvGraphicFramePr>
+            <a:graphicFrameLocks noGrp="1"/>
+          </p:cNvGraphicFramePr>
+          <p:nvPr>
+            <p:extLst>
+              <p:ext uri="{D42A27DB-BD31-4B8C-83A1-F6EECF244321}">
+                <p14:modId xmlns:p14="http://schemas.microsoft.com/office/powerpoint/2010/main" val="3477634471"/>
+              </p:ext>
+            </p:extLst>
+          </p:nvPr>
+        </p:nvGraphicFramePr>
+        <p:xfrm>
+          <a:off x="114301" y="391885"/>
+          <a:ext cx="11204571" cy="2344231"/>
+        </p:xfrm>
+        <a:graphic>
+          <a:graphicData uri="http://schemas.openxmlformats.org/drawingml/2006/table">
+            <a:tbl>
+              <a:tblPr firstRow="1" bandRow="1">
+                <a:tableStyleId>{5C22544A-7EE6-4342-B048-85BDC9FD1C3A}</a:tableStyleId>
+              </a:tblPr>
+              <a:tblGrid>
+                <a:gridCol w="798830">
+                  <a:extLst>
+                    <a:ext uri="{9D8B030D-6E8A-4147-A177-3AD203B41FA5}">
+                      <a16:colId xmlns:a16="http://schemas.microsoft.com/office/drawing/2014/main" val="2041145262"/>
+                    </a:ext>
+                  </a:extLst>
+                </a:gridCol>
+                <a:gridCol w="1647254">
+                  <a:extLst>
+                    <a:ext uri="{9D8B030D-6E8A-4147-A177-3AD203B41FA5}">
+                      <a16:colId xmlns:a16="http://schemas.microsoft.com/office/drawing/2014/main" val="3102287305"/>
+                    </a:ext>
+                  </a:extLst>
+                </a:gridCol>
+                <a:gridCol w="612955">
+                  <a:extLst>
+                    <a:ext uri="{9D8B030D-6E8A-4147-A177-3AD203B41FA5}">
+                      <a16:colId xmlns:a16="http://schemas.microsoft.com/office/drawing/2014/main" val="4080696647"/>
+                    </a:ext>
+                  </a:extLst>
+                </a:gridCol>
+                <a:gridCol w="1752897">
+                  <a:extLst>
+                    <a:ext uri="{9D8B030D-6E8A-4147-A177-3AD203B41FA5}">
+                      <a16:colId xmlns:a16="http://schemas.microsoft.com/office/drawing/2014/main" val="132880537"/>
+                    </a:ext>
+                  </a:extLst>
+                </a:gridCol>
+                <a:gridCol w="4519688">
+                  <a:extLst>
+                    <a:ext uri="{9D8B030D-6E8A-4147-A177-3AD203B41FA5}">
+                      <a16:colId xmlns:a16="http://schemas.microsoft.com/office/drawing/2014/main" val="786884226"/>
+                    </a:ext>
+                  </a:extLst>
+                </a:gridCol>
+                <a:gridCol w="1872947">
+                  <a:extLst>
+                    <a:ext uri="{9D8B030D-6E8A-4147-A177-3AD203B41FA5}">
+                      <a16:colId xmlns:a16="http://schemas.microsoft.com/office/drawing/2014/main" val="3328467923"/>
+                    </a:ext>
+                  </a:extLst>
+                </a:gridCol>
+              </a:tblGrid>
+              <a:tr h="470623">
+                <a:tc>
+                  <a:txBody>
+                    <a:bodyPr/>
+                    <a:lstStyle/>
+                    <a:p>
+                      <a:r>
+                        <a:rPr lang="en-GB" sz="800" dirty="0"/>
+                        <a:t>Test Number</a:t>
+                      </a:r>
+                    </a:p>
+                  </a:txBody>
+                  <a:tcPr/>
+                </a:tc>
+                <a:tc>
+                  <a:txBody>
+                    <a:bodyPr/>
+                    <a:lstStyle/>
+                    <a:p>
+                      <a:r>
+                        <a:rPr lang="en-GB" sz="800"/>
+                        <a:t>Test Type</a:t>
+                      </a:r>
+                      <a:endParaRPr lang="en-GB" sz="800" dirty="0"/>
+                    </a:p>
+                  </a:txBody>
+                  <a:tcPr/>
+                </a:tc>
+                <a:tc>
+                  <a:txBody>
+                    <a:bodyPr/>
+                    <a:lstStyle/>
+                    <a:p>
+                      <a:r>
+                        <a:rPr lang="en-GB" sz="800"/>
+                        <a:t>Room</a:t>
+                      </a:r>
+                      <a:endParaRPr lang="en-GB" sz="800" dirty="0"/>
+                    </a:p>
+                  </a:txBody>
+                  <a:tcPr/>
+                </a:tc>
+                <a:tc>
+                  <a:txBody>
+                    <a:bodyPr/>
+                    <a:lstStyle/>
+                    <a:p>
+                      <a:r>
+                        <a:rPr lang="en-GB" sz="800"/>
+                        <a:t>Objects Involved</a:t>
+                      </a:r>
+                      <a:endParaRPr lang="en-GB" sz="800" dirty="0"/>
+                    </a:p>
+                  </a:txBody>
+                  <a:tcPr/>
+                </a:tc>
+                <a:tc>
+                  <a:txBody>
+                    <a:bodyPr/>
+                    <a:lstStyle/>
+                    <a:p>
+                      <a:r>
+                        <a:rPr lang="en-GB" sz="800"/>
+                        <a:t>Expected Outcome</a:t>
+                      </a:r>
+                      <a:endParaRPr lang="en-GB" sz="800" dirty="0"/>
+                    </a:p>
+                  </a:txBody>
+                  <a:tcPr/>
+                </a:tc>
+                <a:tc>
+                  <a:txBody>
+                    <a:bodyPr/>
+                    <a:lstStyle/>
+                    <a:p>
+                      <a:r>
+                        <a:rPr lang="en-GB" sz="800"/>
+                        <a:t>Actual Outcome</a:t>
+                      </a:r>
+                      <a:endParaRPr lang="en-GB" sz="800" dirty="0"/>
+                    </a:p>
+                  </a:txBody>
+                  <a:tcPr/>
+                </a:tc>
+                <a:extLst>
+                  <a:ext uri="{0D108BD9-81ED-4DB2-BD59-A6C34878D82A}">
+                    <a16:rowId xmlns:a16="http://schemas.microsoft.com/office/drawing/2014/main" val="1296324342"/>
+                  </a:ext>
+                </a:extLst>
+              </a:tr>
+              <a:tr h="475162">
+                <a:tc>
+                  <a:txBody>
+                    <a:bodyPr/>
+                    <a:lstStyle/>
+                    <a:p>
+                      <a:r>
+                        <a:rPr lang="en-GB" sz="800" dirty="0"/>
+                        <a:t>181.</a:t>
+                      </a:r>
+                    </a:p>
+                  </a:txBody>
+                  <a:tcPr/>
+                </a:tc>
+                <a:tc>
+                  <a:txBody>
+                    <a:bodyPr/>
+                    <a:lstStyle/>
+                    <a:p>
+                      <a:r>
+                        <a:rPr lang="en-GB" sz="800" dirty="0"/>
+                        <a:t>Level 1 </a:t>
+                      </a:r>
+                      <a:r>
+                        <a:rPr lang="en-GB" sz="800" dirty="0" err="1"/>
+                        <a:t>Gwiber</a:t>
+                      </a:r>
+                      <a:r>
+                        <a:rPr lang="en-GB" sz="800" dirty="0"/>
+                        <a:t> Jump-scare</a:t>
+                      </a:r>
+                    </a:p>
+                  </a:txBody>
+                  <a:tcPr/>
+                </a:tc>
+                <a:tc>
+                  <a:txBody>
+                    <a:bodyPr/>
+                    <a:lstStyle/>
+                    <a:p>
+                      <a:r>
+                        <a:rPr lang="en-GB" sz="800" dirty="0"/>
+                        <a:t>Rm_level1</a:t>
+                      </a:r>
+                    </a:p>
+                  </a:txBody>
+                  <a:tcPr/>
+                </a:tc>
+                <a:tc>
+                  <a:txBody>
+                    <a:bodyPr/>
+                    <a:lstStyle/>
+                    <a:p>
+                      <a:r>
+                        <a:rPr lang="en-GB" sz="800" dirty="0" err="1"/>
+                        <a:t>Obj_amcd_gwiber</a:t>
+                      </a:r>
+                      <a:endParaRPr lang="en-GB" sz="800" dirty="0"/>
+                    </a:p>
+                  </a:txBody>
+                  <a:tcPr/>
+                </a:tc>
+                <a:tc>
+                  <a:txBody>
+                    <a:bodyPr/>
+                    <a:lstStyle/>
+                    <a:p>
+                      <a:pPr marL="0" marR="0" lvl="0" indent="0" algn="l" defTabSz="914400" rtl="0" eaLnBrk="1" fontAlgn="auto" latinLnBrk="0" hangingPunct="1">
+                        <a:lnSpc>
+                          <a:spcPct val="100000"/>
+                        </a:lnSpc>
+                        <a:spcBef>
+                          <a:spcPts val="0"/>
+                        </a:spcBef>
+                        <a:spcAft>
+                          <a:spcPts val="0"/>
+                        </a:spcAft>
+                        <a:buClrTx/>
+                        <a:buSzTx/>
+                        <a:buFontTx/>
+                        <a:buNone/>
+                        <a:tabLst/>
+                        <a:defRPr/>
+                      </a:pPr>
+                      <a:endParaRPr lang="en-GB" sz="800" dirty="0"/>
+                    </a:p>
+                  </a:txBody>
+                  <a:tcPr/>
+                </a:tc>
+                <a:tc>
+                  <a:txBody>
+                    <a:bodyPr/>
+                    <a:lstStyle/>
+                    <a:p>
+                      <a:endParaRPr lang="en-GB" sz="800" dirty="0"/>
+                    </a:p>
+                  </a:txBody>
+                  <a:tcPr/>
+                </a:tc>
+                <a:extLst>
+                  <a:ext uri="{0D108BD9-81ED-4DB2-BD59-A6C34878D82A}">
+                    <a16:rowId xmlns:a16="http://schemas.microsoft.com/office/drawing/2014/main" val="289599235"/>
+                  </a:ext>
+                </a:extLst>
+              </a:tr>
+              <a:tr h="470623">
+                <a:tc>
+                  <a:txBody>
+                    <a:bodyPr/>
+                    <a:lstStyle/>
+                    <a:p>
+                      <a:r>
+                        <a:rPr lang="en-GB" sz="800" dirty="0"/>
+                        <a:t>182.</a:t>
+                      </a:r>
+                    </a:p>
+                  </a:txBody>
+                  <a:tcPr/>
+                </a:tc>
+                <a:tc>
+                  <a:txBody>
+                    <a:bodyPr/>
+                    <a:lstStyle/>
+                    <a:p>
+                      <a:pPr marL="0" marR="0" lvl="0" indent="0" algn="l" defTabSz="914400" rtl="0" eaLnBrk="1" fontAlgn="auto" latinLnBrk="0" hangingPunct="1">
+                        <a:lnSpc>
+                          <a:spcPct val="100000"/>
+                        </a:lnSpc>
+                        <a:spcBef>
+                          <a:spcPts val="0"/>
+                        </a:spcBef>
+                        <a:spcAft>
+                          <a:spcPts val="0"/>
+                        </a:spcAft>
+                        <a:buClrTx/>
+                        <a:buSzTx/>
+                        <a:buFontTx/>
+                        <a:buNone/>
+                        <a:tabLst/>
+                        <a:defRPr/>
+                      </a:pPr>
+                      <a:r>
+                        <a:rPr lang="en-GB" sz="800" dirty="0"/>
+                        <a:t>Level 2 </a:t>
+                      </a:r>
+                      <a:r>
+                        <a:rPr lang="en-GB" sz="800" dirty="0" err="1"/>
+                        <a:t>Gwiber</a:t>
+                      </a:r>
+                      <a:r>
+                        <a:rPr lang="en-GB" sz="800" dirty="0"/>
+                        <a:t> Jump-scare</a:t>
+                      </a:r>
+                    </a:p>
+                    <a:p>
+                      <a:endParaRPr lang="en-GB" sz="800" dirty="0"/>
+                    </a:p>
+                  </a:txBody>
+                  <a:tcPr/>
+                </a:tc>
+                <a:tc>
+                  <a:txBody>
+                    <a:bodyPr/>
+                    <a:lstStyle/>
+                    <a:p>
+                      <a:pPr marL="0" marR="0" lvl="0" indent="0" algn="l" defTabSz="914400" rtl="0" eaLnBrk="1" fontAlgn="auto" latinLnBrk="0" hangingPunct="1">
+                        <a:lnSpc>
+                          <a:spcPct val="100000"/>
+                        </a:lnSpc>
+                        <a:spcBef>
+                          <a:spcPts val="0"/>
+                        </a:spcBef>
+                        <a:spcAft>
+                          <a:spcPts val="0"/>
+                        </a:spcAft>
+                        <a:buClrTx/>
+                        <a:buSzTx/>
+                        <a:buFontTx/>
+                        <a:buNone/>
+                        <a:tabLst/>
+                        <a:defRPr/>
+                      </a:pPr>
+                      <a:r>
+                        <a:rPr lang="en-GB" sz="800" dirty="0"/>
+                        <a:t>Rm_level2</a:t>
+                      </a:r>
+                    </a:p>
+                    <a:p>
+                      <a:endParaRPr lang="en-GB" sz="800" dirty="0"/>
+                    </a:p>
+                  </a:txBody>
+                  <a:tcPr/>
+                </a:tc>
+                <a:tc>
+                  <a:txBody>
+                    <a:bodyPr/>
+                    <a:lstStyle/>
+                    <a:p>
+                      <a:r>
+                        <a:rPr lang="en-GB" sz="800" dirty="0"/>
+                        <a:t>Obj_amcd_gwiber_lvl2</a:t>
+                      </a:r>
+                    </a:p>
+                  </a:txBody>
+                  <a:tcPr/>
+                </a:tc>
+                <a:tc>
+                  <a:txBody>
+                    <a:bodyPr/>
+                    <a:lstStyle/>
+                    <a:p>
+                      <a:pPr marL="0" indent="0">
+                        <a:buNone/>
+                      </a:pPr>
+                      <a:endParaRPr lang="en-GB" sz="800" dirty="0"/>
+                    </a:p>
+                  </a:txBody>
+                  <a:tcPr/>
+                </a:tc>
+                <a:tc>
+                  <a:txBody>
+                    <a:bodyPr/>
+                    <a:lstStyle/>
+                    <a:p>
+                      <a:pPr marL="0" indent="0">
+                        <a:buNone/>
+                      </a:pPr>
+                      <a:endParaRPr lang="en-GB" sz="800" dirty="0"/>
+                    </a:p>
+                  </a:txBody>
+                  <a:tcPr/>
+                </a:tc>
+                <a:extLst>
+                  <a:ext uri="{0D108BD9-81ED-4DB2-BD59-A6C34878D82A}">
+                    <a16:rowId xmlns:a16="http://schemas.microsoft.com/office/drawing/2014/main" val="4163288784"/>
+                  </a:ext>
+                </a:extLst>
+              </a:tr>
+              <a:tr h="470623">
+                <a:tc>
+                  <a:txBody>
+                    <a:bodyPr/>
+                    <a:lstStyle/>
+                    <a:p>
+                      <a:r>
+                        <a:rPr lang="en-GB" sz="800" dirty="0"/>
+                        <a:t>183.</a:t>
+                      </a:r>
+                    </a:p>
+                  </a:txBody>
+                  <a:tcPr/>
+                </a:tc>
+                <a:tc>
+                  <a:txBody>
+                    <a:bodyPr/>
+                    <a:lstStyle/>
+                    <a:p>
+                      <a:pPr marL="0" marR="0" lvl="0" indent="0" algn="l" defTabSz="914400" rtl="0" eaLnBrk="1" fontAlgn="auto" latinLnBrk="0" hangingPunct="1">
+                        <a:lnSpc>
+                          <a:spcPct val="100000"/>
+                        </a:lnSpc>
+                        <a:spcBef>
+                          <a:spcPts val="0"/>
+                        </a:spcBef>
+                        <a:spcAft>
+                          <a:spcPts val="0"/>
+                        </a:spcAft>
+                        <a:buClrTx/>
+                        <a:buSzTx/>
+                        <a:buFontTx/>
+                        <a:buNone/>
+                        <a:tabLst/>
+                        <a:defRPr/>
+                      </a:pPr>
+                      <a:r>
+                        <a:rPr lang="en-GB" sz="800" dirty="0"/>
+                        <a:t>Level 3 </a:t>
+                      </a:r>
+                      <a:r>
+                        <a:rPr lang="en-GB" sz="800" dirty="0" err="1"/>
+                        <a:t>Gwiber</a:t>
+                      </a:r>
+                      <a:r>
+                        <a:rPr lang="en-GB" sz="800" dirty="0"/>
+                        <a:t> Jump-scare</a:t>
+                      </a:r>
+                    </a:p>
+                    <a:p>
+                      <a:endParaRPr lang="en-GB" sz="800" dirty="0"/>
+                    </a:p>
+                  </a:txBody>
+                  <a:tcPr/>
+                </a:tc>
+                <a:tc>
+                  <a:txBody>
+                    <a:bodyPr/>
+                    <a:lstStyle/>
+                    <a:p>
+                      <a:pPr marL="0" marR="0" lvl="0" indent="0" algn="l" defTabSz="914400" rtl="0" eaLnBrk="1" fontAlgn="auto" latinLnBrk="0" hangingPunct="1">
+                        <a:lnSpc>
+                          <a:spcPct val="100000"/>
+                        </a:lnSpc>
+                        <a:spcBef>
+                          <a:spcPts val="0"/>
+                        </a:spcBef>
+                        <a:spcAft>
+                          <a:spcPts val="0"/>
+                        </a:spcAft>
+                        <a:buClrTx/>
+                        <a:buSzTx/>
+                        <a:buFontTx/>
+                        <a:buNone/>
+                        <a:tabLst/>
+                        <a:defRPr/>
+                      </a:pPr>
+                      <a:r>
+                        <a:rPr lang="en-GB" sz="800" dirty="0"/>
+                        <a:t>Rm_level3</a:t>
+                      </a:r>
+                    </a:p>
+                    <a:p>
+                      <a:endParaRPr lang="en-GB" sz="800" dirty="0"/>
+                    </a:p>
+                  </a:txBody>
+                  <a:tcPr/>
+                </a:tc>
+                <a:tc>
+                  <a:txBody>
+                    <a:bodyPr/>
+                    <a:lstStyle/>
+                    <a:p>
+                      <a:pPr marL="0" marR="0" lvl="0" indent="0" algn="l" defTabSz="914400" rtl="0" eaLnBrk="1" fontAlgn="auto" latinLnBrk="0" hangingPunct="1">
+                        <a:lnSpc>
+                          <a:spcPct val="100000"/>
+                        </a:lnSpc>
+                        <a:spcBef>
+                          <a:spcPts val="0"/>
+                        </a:spcBef>
+                        <a:spcAft>
+                          <a:spcPts val="0"/>
+                        </a:spcAft>
+                        <a:buClrTx/>
+                        <a:buSzTx/>
+                        <a:buFontTx/>
+                        <a:buNone/>
+                        <a:tabLst/>
+                        <a:defRPr/>
+                      </a:pPr>
+                      <a:r>
+                        <a:rPr lang="en-GB" sz="800" dirty="0"/>
+                        <a:t>Obj_amcd_gwiber_lvl3</a:t>
+                      </a:r>
+                    </a:p>
+                    <a:p>
+                      <a:endParaRPr lang="en-GB" sz="800" dirty="0"/>
+                    </a:p>
+                  </a:txBody>
+                  <a:tcPr/>
+                </a:tc>
+                <a:tc>
+                  <a:txBody>
+                    <a:bodyPr/>
+                    <a:lstStyle/>
+                    <a:p>
+                      <a:pPr marL="0" indent="0">
+                        <a:buNone/>
+                      </a:pPr>
+                      <a:endParaRPr lang="en-GB" sz="800" dirty="0"/>
+                    </a:p>
+                  </a:txBody>
+                  <a:tcPr/>
+                </a:tc>
+                <a:tc>
+                  <a:txBody>
+                    <a:bodyPr/>
+                    <a:lstStyle/>
+                    <a:p>
+                      <a:pPr marL="0" indent="0">
+                        <a:buNone/>
+                      </a:pPr>
+                      <a:endParaRPr lang="en-GB" sz="800" dirty="0"/>
+                    </a:p>
+                  </a:txBody>
+                  <a:tcPr/>
+                </a:tc>
+                <a:extLst>
+                  <a:ext uri="{0D108BD9-81ED-4DB2-BD59-A6C34878D82A}">
+                    <a16:rowId xmlns:a16="http://schemas.microsoft.com/office/drawing/2014/main" val="2370588301"/>
+                  </a:ext>
+                </a:extLst>
+              </a:tr>
+              <a:tr h="0">
+                <a:tc>
+                  <a:txBody>
+                    <a:bodyPr/>
+                    <a:lstStyle/>
+                    <a:p>
+                      <a:r>
+                        <a:rPr lang="en-GB" sz="800" dirty="0"/>
+                        <a:t>184.</a:t>
+                      </a:r>
+                    </a:p>
+                  </a:txBody>
+                  <a:tcPr/>
+                </a:tc>
+                <a:tc>
+                  <a:txBody>
+                    <a:bodyPr/>
+                    <a:lstStyle/>
+                    <a:p>
+                      <a:pPr marL="0" marR="0" lvl="0" indent="0" algn="l" defTabSz="914400" rtl="0" eaLnBrk="1" fontAlgn="auto" latinLnBrk="0" hangingPunct="1">
+                        <a:lnSpc>
+                          <a:spcPct val="100000"/>
+                        </a:lnSpc>
+                        <a:spcBef>
+                          <a:spcPts val="0"/>
+                        </a:spcBef>
+                        <a:spcAft>
+                          <a:spcPts val="0"/>
+                        </a:spcAft>
+                        <a:buClrTx/>
+                        <a:buSzTx/>
+                        <a:buFontTx/>
+                        <a:buNone/>
+                        <a:tabLst/>
+                        <a:defRPr/>
+                      </a:pPr>
+                      <a:r>
+                        <a:rPr lang="en-GB" sz="800" dirty="0"/>
+                        <a:t>Level 5 </a:t>
+                      </a:r>
+                      <a:r>
+                        <a:rPr lang="en-GB" sz="800" dirty="0" err="1"/>
+                        <a:t>Gwiber</a:t>
+                      </a:r>
+                      <a:r>
+                        <a:rPr lang="en-GB" sz="800" dirty="0"/>
+                        <a:t> Jump-scare</a:t>
+                      </a:r>
+                    </a:p>
+                    <a:p>
+                      <a:endParaRPr lang="en-GB" sz="800" dirty="0"/>
+                    </a:p>
+                  </a:txBody>
+                  <a:tcPr/>
+                </a:tc>
+                <a:tc>
+                  <a:txBody>
+                    <a:bodyPr/>
+                    <a:lstStyle/>
+                    <a:p>
+                      <a:pPr marL="0" marR="0" lvl="0" indent="0" algn="l" defTabSz="914400" rtl="0" eaLnBrk="1" fontAlgn="auto" latinLnBrk="0" hangingPunct="1">
+                        <a:lnSpc>
+                          <a:spcPct val="100000"/>
+                        </a:lnSpc>
+                        <a:spcBef>
+                          <a:spcPts val="0"/>
+                        </a:spcBef>
+                        <a:spcAft>
+                          <a:spcPts val="0"/>
+                        </a:spcAft>
+                        <a:buClrTx/>
+                        <a:buSzTx/>
+                        <a:buFontTx/>
+                        <a:buNone/>
+                        <a:tabLst/>
+                        <a:defRPr/>
+                      </a:pPr>
+                      <a:r>
+                        <a:rPr lang="en-GB" sz="800" dirty="0"/>
+                        <a:t>Rm_level5</a:t>
+                      </a:r>
+                    </a:p>
+                    <a:p>
+                      <a:endParaRPr lang="en-GB" sz="800" dirty="0"/>
+                    </a:p>
+                  </a:txBody>
+                  <a:tcPr/>
+                </a:tc>
+                <a:tc>
+                  <a:txBody>
+                    <a:bodyPr/>
+                    <a:lstStyle/>
+                    <a:p>
+                      <a:pPr marL="0" marR="0" lvl="0" indent="0" algn="l" defTabSz="914400" rtl="0" eaLnBrk="1" fontAlgn="auto" latinLnBrk="0" hangingPunct="1">
+                        <a:lnSpc>
+                          <a:spcPct val="100000"/>
+                        </a:lnSpc>
+                        <a:spcBef>
+                          <a:spcPts val="0"/>
+                        </a:spcBef>
+                        <a:spcAft>
+                          <a:spcPts val="0"/>
+                        </a:spcAft>
+                        <a:buClrTx/>
+                        <a:buSzTx/>
+                        <a:buFontTx/>
+                        <a:buNone/>
+                        <a:tabLst/>
+                        <a:defRPr/>
+                      </a:pPr>
+                      <a:r>
+                        <a:rPr lang="en-GB" sz="800" dirty="0"/>
+                        <a:t>Obj_amcd_gwiber_lvl5</a:t>
+                      </a:r>
+                    </a:p>
+                    <a:p>
+                      <a:endParaRPr lang="en-GB" sz="800" dirty="0"/>
+                    </a:p>
+                  </a:txBody>
+                  <a:tcPr/>
+                </a:tc>
+                <a:tc>
+                  <a:txBody>
+                    <a:bodyPr/>
+                    <a:lstStyle/>
+                    <a:p>
+                      <a:pPr marL="0" indent="0">
+                        <a:buNone/>
+                      </a:pPr>
+                      <a:endParaRPr lang="en-GB" sz="800" dirty="0"/>
+                    </a:p>
+                  </a:txBody>
+                  <a:tcPr/>
+                </a:tc>
+                <a:tc>
+                  <a:txBody>
+                    <a:bodyPr/>
+                    <a:lstStyle/>
+                    <a:p>
+                      <a:pPr marL="0" indent="0">
+                        <a:buNone/>
+                      </a:pPr>
+                      <a:endParaRPr lang="en-GB" sz="800" dirty="0"/>
+                    </a:p>
+                  </a:txBody>
+                  <a:tcPr/>
+                </a:tc>
+                <a:extLst>
+                  <a:ext uri="{0D108BD9-81ED-4DB2-BD59-A6C34878D82A}">
+                    <a16:rowId xmlns:a16="http://schemas.microsoft.com/office/drawing/2014/main" val="931270710"/>
+                  </a:ext>
+                </a:extLst>
+              </a:tr>
+            </a:tbl>
+          </a:graphicData>
+        </a:graphic>
+      </p:graphicFrame>
+      <p:sp>
+        <p:nvSpPr>
+          <p:cNvPr id="2" name="TextBox 1">
+            <a:extLst>
+              <a:ext uri="{FF2B5EF4-FFF2-40B4-BE49-F238E27FC236}">
+                <a16:creationId xmlns:a16="http://schemas.microsoft.com/office/drawing/2014/main" id="{4F012120-7B7D-924A-BD3E-059394353114}"/>
+              </a:ext>
+            </a:extLst>
+          </p:cNvPr>
+          <p:cNvSpPr txBox="1"/>
+          <p:nvPr/>
+        </p:nvSpPr>
+        <p:spPr>
+          <a:xfrm>
+            <a:off x="0" y="22553"/>
+            <a:ext cx="3332964" cy="369332"/>
+          </a:xfrm>
+          <a:prstGeom prst="rect">
+            <a:avLst/>
+          </a:prstGeom>
+          <a:noFill/>
+        </p:spPr>
+        <p:txBody>
+          <a:bodyPr wrap="none" rtlCol="0">
+            <a:spAutoFit/>
+          </a:bodyPr>
+          <a:lstStyle/>
+          <a:p>
+            <a:r>
+              <a:rPr lang="en-GB" dirty="0"/>
+              <a:t>Level 1,2,3,5 </a:t>
+            </a:r>
+            <a:r>
+              <a:rPr lang="en-GB" dirty="0" err="1"/>
+              <a:t>Gwiber</a:t>
+            </a:r>
+            <a:r>
+              <a:rPr lang="en-GB" dirty="0"/>
+              <a:t> </a:t>
+            </a:r>
+            <a:r>
+              <a:rPr lang="en-GB" dirty="0" err="1"/>
+              <a:t>Jumpscare</a:t>
+            </a:r>
+            <a:endParaRPr lang="en-GB" dirty="0"/>
+          </a:p>
+        </p:txBody>
+      </p:sp>
+    </p:spTree>
+    <p:extLst>
+      <p:ext uri="{BB962C8B-B14F-4D97-AF65-F5344CB8AC3E}">
+        <p14:creationId xmlns:p14="http://schemas.microsoft.com/office/powerpoint/2010/main" val="4046331184"/>
+      </p:ext>
+    </p:extLst>
+  </p:cSld>
+  <p:clrMapOvr>
+    <a:masterClrMapping/>
+  </p:clrMapOvr>
+</p:sld>
+</file>
+
+<file path=ppt/slides/slide41.xml><?xml version="1.0" encoding="utf-8"?>
+<p:sld xmlns:a="http://schemas.openxmlformats.org/drawingml/2006/main" xmlns:r="http://schemas.openxmlformats.org/officeDocument/2006/relationships" xmlns:p="http://schemas.openxmlformats.org/presentationml/2006/main">
+  <p:cSld>
+    <p:spTree>
+      <p:nvGrpSpPr>
+        <p:cNvPr id="1" name="">
+          <a:extLst>
+            <a:ext uri="{FF2B5EF4-FFF2-40B4-BE49-F238E27FC236}">
+              <a16:creationId xmlns:a16="http://schemas.microsoft.com/office/drawing/2014/main" id="{37E915D8-5034-3EDB-DD7F-FE569056F2A4}"/>
+            </a:ext>
+          </a:extLst>
+        </p:cNvPr>
+        <p:cNvGrpSpPr/>
+        <p:nvPr/>
+      </p:nvGrpSpPr>
+      <p:grpSpPr>
+        <a:xfrm>
+          <a:off x="0" y="0"/>
+          <a:ext cx="0" cy="0"/>
+          <a:chOff x="0" y="0"/>
+          <a:chExt cx="0" cy="0"/>
+        </a:xfrm>
+      </p:grpSpPr>
+      <p:graphicFrame>
+        <p:nvGraphicFramePr>
+          <p:cNvPr id="4" name="Table 3">
+            <a:extLst>
+              <a:ext uri="{FF2B5EF4-FFF2-40B4-BE49-F238E27FC236}">
+                <a16:creationId xmlns:a16="http://schemas.microsoft.com/office/drawing/2014/main" id="{F890A455-385A-4078-393B-CF27710BBE20}"/>
+              </a:ext>
+            </a:extLst>
+          </p:cNvPr>
+          <p:cNvGraphicFramePr>
+            <a:graphicFrameLocks noGrp="1"/>
+          </p:cNvGraphicFramePr>
+          <p:nvPr>
+            <p:extLst>
+              <p:ext uri="{D42A27DB-BD31-4B8C-83A1-F6EECF244321}">
+                <p14:modId xmlns:p14="http://schemas.microsoft.com/office/powerpoint/2010/main" val="1806403934"/>
+              </p:ext>
+            </p:extLst>
+          </p:nvPr>
+        </p:nvGraphicFramePr>
+        <p:xfrm>
+          <a:off x="114301" y="391885"/>
+          <a:ext cx="11204571" cy="2344231"/>
+        </p:xfrm>
+        <a:graphic>
+          <a:graphicData uri="http://schemas.openxmlformats.org/drawingml/2006/table">
+            <a:tbl>
+              <a:tblPr firstRow="1" bandRow="1">
+                <a:tableStyleId>{5C22544A-7EE6-4342-B048-85BDC9FD1C3A}</a:tableStyleId>
+              </a:tblPr>
+              <a:tblGrid>
+                <a:gridCol w="798830">
+                  <a:extLst>
+                    <a:ext uri="{9D8B030D-6E8A-4147-A177-3AD203B41FA5}">
+                      <a16:colId xmlns:a16="http://schemas.microsoft.com/office/drawing/2014/main" val="2041145262"/>
+                    </a:ext>
+                  </a:extLst>
+                </a:gridCol>
+                <a:gridCol w="1647254">
+                  <a:extLst>
+                    <a:ext uri="{9D8B030D-6E8A-4147-A177-3AD203B41FA5}">
+                      <a16:colId xmlns:a16="http://schemas.microsoft.com/office/drawing/2014/main" val="3102287305"/>
+                    </a:ext>
+                  </a:extLst>
+                </a:gridCol>
+                <a:gridCol w="612955">
+                  <a:extLst>
+                    <a:ext uri="{9D8B030D-6E8A-4147-A177-3AD203B41FA5}">
+                      <a16:colId xmlns:a16="http://schemas.microsoft.com/office/drawing/2014/main" val="4080696647"/>
+                    </a:ext>
+                  </a:extLst>
+                </a:gridCol>
+                <a:gridCol w="1752897">
+                  <a:extLst>
+                    <a:ext uri="{9D8B030D-6E8A-4147-A177-3AD203B41FA5}">
+                      <a16:colId xmlns:a16="http://schemas.microsoft.com/office/drawing/2014/main" val="132880537"/>
+                    </a:ext>
+                  </a:extLst>
+                </a:gridCol>
+                <a:gridCol w="4519688">
+                  <a:extLst>
+                    <a:ext uri="{9D8B030D-6E8A-4147-A177-3AD203B41FA5}">
+                      <a16:colId xmlns:a16="http://schemas.microsoft.com/office/drawing/2014/main" val="786884226"/>
+                    </a:ext>
+                  </a:extLst>
+                </a:gridCol>
+                <a:gridCol w="1872947">
+                  <a:extLst>
+                    <a:ext uri="{9D8B030D-6E8A-4147-A177-3AD203B41FA5}">
+                      <a16:colId xmlns:a16="http://schemas.microsoft.com/office/drawing/2014/main" val="3328467923"/>
+                    </a:ext>
+                  </a:extLst>
+                </a:gridCol>
+              </a:tblGrid>
+              <a:tr h="470623">
+                <a:tc>
+                  <a:txBody>
+                    <a:bodyPr/>
+                    <a:lstStyle/>
+                    <a:p>
+                      <a:r>
+                        <a:rPr lang="en-GB" sz="800" dirty="0"/>
+                        <a:t>Test Number</a:t>
+                      </a:r>
+                    </a:p>
+                  </a:txBody>
+                  <a:tcPr/>
+                </a:tc>
+                <a:tc>
+                  <a:txBody>
+                    <a:bodyPr/>
+                    <a:lstStyle/>
+                    <a:p>
+                      <a:r>
+                        <a:rPr lang="en-GB" sz="800"/>
+                        <a:t>Test Type</a:t>
+                      </a:r>
+                      <a:endParaRPr lang="en-GB" sz="800" dirty="0"/>
+                    </a:p>
+                  </a:txBody>
+                  <a:tcPr/>
+                </a:tc>
+                <a:tc>
+                  <a:txBody>
+                    <a:bodyPr/>
+                    <a:lstStyle/>
+                    <a:p>
+                      <a:r>
+                        <a:rPr lang="en-GB" sz="800"/>
+                        <a:t>Room</a:t>
+                      </a:r>
+                      <a:endParaRPr lang="en-GB" sz="800" dirty="0"/>
+                    </a:p>
+                  </a:txBody>
+                  <a:tcPr/>
+                </a:tc>
+                <a:tc>
+                  <a:txBody>
+                    <a:bodyPr/>
+                    <a:lstStyle/>
+                    <a:p>
+                      <a:r>
+                        <a:rPr lang="en-GB" sz="800"/>
+                        <a:t>Objects Involved</a:t>
+                      </a:r>
+                      <a:endParaRPr lang="en-GB" sz="800" dirty="0"/>
+                    </a:p>
+                  </a:txBody>
+                  <a:tcPr/>
+                </a:tc>
+                <a:tc>
+                  <a:txBody>
+                    <a:bodyPr/>
+                    <a:lstStyle/>
+                    <a:p>
+                      <a:r>
+                        <a:rPr lang="en-GB" sz="800"/>
+                        <a:t>Expected Outcome</a:t>
+                      </a:r>
+                      <a:endParaRPr lang="en-GB" sz="800" dirty="0"/>
+                    </a:p>
+                  </a:txBody>
+                  <a:tcPr/>
+                </a:tc>
+                <a:tc>
+                  <a:txBody>
+                    <a:bodyPr/>
+                    <a:lstStyle/>
+                    <a:p>
+                      <a:r>
+                        <a:rPr lang="en-GB" sz="800"/>
+                        <a:t>Actual Outcome</a:t>
+                      </a:r>
+                      <a:endParaRPr lang="en-GB" sz="800" dirty="0"/>
+                    </a:p>
+                  </a:txBody>
+                  <a:tcPr/>
+                </a:tc>
+                <a:extLst>
+                  <a:ext uri="{0D108BD9-81ED-4DB2-BD59-A6C34878D82A}">
+                    <a16:rowId xmlns:a16="http://schemas.microsoft.com/office/drawing/2014/main" val="1296324342"/>
+                  </a:ext>
+                </a:extLst>
+              </a:tr>
+              <a:tr h="475162">
+                <a:tc>
+                  <a:txBody>
+                    <a:bodyPr/>
+                    <a:lstStyle/>
+                    <a:p>
+                      <a:r>
+                        <a:rPr lang="en-GB" sz="800" dirty="0"/>
+                        <a:t>181.</a:t>
+                      </a:r>
+                    </a:p>
+                  </a:txBody>
+                  <a:tcPr/>
+                </a:tc>
+                <a:tc>
+                  <a:txBody>
+                    <a:bodyPr/>
+                    <a:lstStyle/>
+                    <a:p>
+                      <a:r>
+                        <a:rPr lang="en-GB" sz="800" dirty="0"/>
+                        <a:t>Level 1 K9 Jump-scare</a:t>
+                      </a:r>
+                    </a:p>
+                  </a:txBody>
+                  <a:tcPr/>
+                </a:tc>
+                <a:tc>
+                  <a:txBody>
+                    <a:bodyPr/>
+                    <a:lstStyle/>
+                    <a:p>
+                      <a:r>
+                        <a:rPr lang="en-GB" sz="800" dirty="0"/>
+                        <a:t>Rm_level1</a:t>
+                      </a:r>
+                    </a:p>
+                  </a:txBody>
+                  <a:tcPr/>
+                </a:tc>
+                <a:tc>
+                  <a:txBody>
+                    <a:bodyPr/>
+                    <a:lstStyle/>
+                    <a:p>
+                      <a:r>
+                        <a:rPr lang="en-GB" sz="800" dirty="0"/>
+                        <a:t>Obj_amcd_K9</a:t>
+                      </a:r>
+                    </a:p>
+                  </a:txBody>
+                  <a:tcPr/>
+                </a:tc>
+                <a:tc>
+                  <a:txBody>
+                    <a:bodyPr/>
+                    <a:lstStyle/>
+                    <a:p>
+                      <a:pPr marL="0" marR="0" lvl="0" indent="0" algn="l" defTabSz="914400" rtl="0" eaLnBrk="1" fontAlgn="auto" latinLnBrk="0" hangingPunct="1">
+                        <a:lnSpc>
+                          <a:spcPct val="100000"/>
+                        </a:lnSpc>
+                        <a:spcBef>
+                          <a:spcPts val="0"/>
+                        </a:spcBef>
+                        <a:spcAft>
+                          <a:spcPts val="0"/>
+                        </a:spcAft>
+                        <a:buClrTx/>
+                        <a:buSzTx/>
+                        <a:buFontTx/>
+                        <a:buNone/>
+                        <a:tabLst/>
+                        <a:defRPr/>
+                      </a:pPr>
+                      <a:endParaRPr lang="en-GB" sz="800" dirty="0"/>
+                    </a:p>
+                  </a:txBody>
+                  <a:tcPr/>
+                </a:tc>
+                <a:tc>
+                  <a:txBody>
+                    <a:bodyPr/>
+                    <a:lstStyle/>
+                    <a:p>
+                      <a:endParaRPr lang="en-GB" sz="800" dirty="0"/>
+                    </a:p>
+                  </a:txBody>
+                  <a:tcPr/>
+                </a:tc>
+                <a:extLst>
+                  <a:ext uri="{0D108BD9-81ED-4DB2-BD59-A6C34878D82A}">
+                    <a16:rowId xmlns:a16="http://schemas.microsoft.com/office/drawing/2014/main" val="289599235"/>
+                  </a:ext>
+                </a:extLst>
+              </a:tr>
+              <a:tr h="470623">
+                <a:tc>
+                  <a:txBody>
+                    <a:bodyPr/>
+                    <a:lstStyle/>
+                    <a:p>
+                      <a:r>
+                        <a:rPr lang="en-GB" sz="800" dirty="0"/>
+                        <a:t>182.</a:t>
+                      </a:r>
+                    </a:p>
+                  </a:txBody>
+                  <a:tcPr/>
+                </a:tc>
+                <a:tc>
+                  <a:txBody>
+                    <a:bodyPr/>
+                    <a:lstStyle/>
+                    <a:p>
+                      <a:pPr marL="0" marR="0" lvl="0" indent="0" algn="l" defTabSz="914400" rtl="0" eaLnBrk="1" fontAlgn="auto" latinLnBrk="0" hangingPunct="1">
+                        <a:lnSpc>
+                          <a:spcPct val="100000"/>
+                        </a:lnSpc>
+                        <a:spcBef>
+                          <a:spcPts val="0"/>
+                        </a:spcBef>
+                        <a:spcAft>
+                          <a:spcPts val="0"/>
+                        </a:spcAft>
+                        <a:buClrTx/>
+                        <a:buSzTx/>
+                        <a:buFontTx/>
+                        <a:buNone/>
+                        <a:tabLst/>
+                        <a:defRPr/>
+                      </a:pPr>
+                      <a:r>
+                        <a:rPr lang="en-GB" sz="800" dirty="0"/>
+                        <a:t>Level 2 K9 Jump-scare</a:t>
+                      </a:r>
+                    </a:p>
+                    <a:p>
+                      <a:endParaRPr lang="en-GB" sz="800" dirty="0"/>
+                    </a:p>
+                  </a:txBody>
+                  <a:tcPr/>
+                </a:tc>
+                <a:tc>
+                  <a:txBody>
+                    <a:bodyPr/>
+                    <a:lstStyle/>
+                    <a:p>
+                      <a:pPr marL="0" marR="0" lvl="0" indent="0" algn="l" defTabSz="914400" rtl="0" eaLnBrk="1" fontAlgn="auto" latinLnBrk="0" hangingPunct="1">
+                        <a:lnSpc>
+                          <a:spcPct val="100000"/>
+                        </a:lnSpc>
+                        <a:spcBef>
+                          <a:spcPts val="0"/>
+                        </a:spcBef>
+                        <a:spcAft>
+                          <a:spcPts val="0"/>
+                        </a:spcAft>
+                        <a:buClrTx/>
+                        <a:buSzTx/>
+                        <a:buFontTx/>
+                        <a:buNone/>
+                        <a:tabLst/>
+                        <a:defRPr/>
+                      </a:pPr>
+                      <a:r>
+                        <a:rPr lang="en-GB" sz="800" dirty="0"/>
+                        <a:t>Rm_level2</a:t>
+                      </a:r>
+                    </a:p>
+                    <a:p>
+                      <a:endParaRPr lang="en-GB" sz="800" dirty="0"/>
+                    </a:p>
+                  </a:txBody>
+                  <a:tcPr/>
+                </a:tc>
+                <a:tc>
+                  <a:txBody>
+                    <a:bodyPr/>
+                    <a:lstStyle/>
+                    <a:p>
+                      <a:r>
+                        <a:rPr lang="en-GB" sz="800" dirty="0"/>
+                        <a:t>Obj_amcd_K9_lvl2</a:t>
+                      </a:r>
+                    </a:p>
+                  </a:txBody>
+                  <a:tcPr/>
+                </a:tc>
+                <a:tc>
+                  <a:txBody>
+                    <a:bodyPr/>
+                    <a:lstStyle/>
+                    <a:p>
+                      <a:pPr marL="0" indent="0">
+                        <a:buNone/>
+                      </a:pPr>
+                      <a:endParaRPr lang="en-GB" sz="800" dirty="0"/>
+                    </a:p>
+                  </a:txBody>
+                  <a:tcPr/>
+                </a:tc>
+                <a:tc>
+                  <a:txBody>
+                    <a:bodyPr/>
+                    <a:lstStyle/>
+                    <a:p>
+                      <a:pPr marL="0" indent="0">
+                        <a:buNone/>
+                      </a:pPr>
+                      <a:endParaRPr lang="en-GB" sz="800" dirty="0"/>
+                    </a:p>
+                  </a:txBody>
+                  <a:tcPr/>
+                </a:tc>
+                <a:extLst>
+                  <a:ext uri="{0D108BD9-81ED-4DB2-BD59-A6C34878D82A}">
+                    <a16:rowId xmlns:a16="http://schemas.microsoft.com/office/drawing/2014/main" val="4163288784"/>
+                  </a:ext>
+                </a:extLst>
+              </a:tr>
+              <a:tr h="470623">
+                <a:tc>
+                  <a:txBody>
+                    <a:bodyPr/>
+                    <a:lstStyle/>
+                    <a:p>
+                      <a:r>
+                        <a:rPr lang="en-GB" sz="800" dirty="0"/>
+                        <a:t>183.</a:t>
+                      </a:r>
+                    </a:p>
+                  </a:txBody>
+                  <a:tcPr/>
+                </a:tc>
+                <a:tc>
+                  <a:txBody>
+                    <a:bodyPr/>
+                    <a:lstStyle/>
+                    <a:p>
+                      <a:pPr marL="0" marR="0" lvl="0" indent="0" algn="l" defTabSz="914400" rtl="0" eaLnBrk="1" fontAlgn="auto" latinLnBrk="0" hangingPunct="1">
+                        <a:lnSpc>
+                          <a:spcPct val="100000"/>
+                        </a:lnSpc>
+                        <a:spcBef>
+                          <a:spcPts val="0"/>
+                        </a:spcBef>
+                        <a:spcAft>
+                          <a:spcPts val="0"/>
+                        </a:spcAft>
+                        <a:buClrTx/>
+                        <a:buSzTx/>
+                        <a:buFontTx/>
+                        <a:buNone/>
+                        <a:tabLst/>
+                        <a:defRPr/>
+                      </a:pPr>
+                      <a:r>
+                        <a:rPr lang="en-GB" sz="800" dirty="0"/>
+                        <a:t>Level 3 K9 Jump-scare</a:t>
+                      </a:r>
+                    </a:p>
+                    <a:p>
+                      <a:endParaRPr lang="en-GB" sz="800" dirty="0"/>
+                    </a:p>
+                  </a:txBody>
+                  <a:tcPr/>
+                </a:tc>
+                <a:tc>
+                  <a:txBody>
+                    <a:bodyPr/>
+                    <a:lstStyle/>
+                    <a:p>
+                      <a:pPr marL="0" marR="0" lvl="0" indent="0" algn="l" defTabSz="914400" rtl="0" eaLnBrk="1" fontAlgn="auto" latinLnBrk="0" hangingPunct="1">
+                        <a:lnSpc>
+                          <a:spcPct val="100000"/>
+                        </a:lnSpc>
+                        <a:spcBef>
+                          <a:spcPts val="0"/>
+                        </a:spcBef>
+                        <a:spcAft>
+                          <a:spcPts val="0"/>
+                        </a:spcAft>
+                        <a:buClrTx/>
+                        <a:buSzTx/>
+                        <a:buFontTx/>
+                        <a:buNone/>
+                        <a:tabLst/>
+                        <a:defRPr/>
+                      </a:pPr>
+                      <a:r>
+                        <a:rPr lang="en-GB" sz="800" dirty="0"/>
+                        <a:t>Rm_level3</a:t>
+                      </a:r>
+                    </a:p>
+                    <a:p>
+                      <a:endParaRPr lang="en-GB" sz="800" dirty="0"/>
+                    </a:p>
+                  </a:txBody>
+                  <a:tcPr/>
+                </a:tc>
+                <a:tc>
+                  <a:txBody>
+                    <a:bodyPr/>
+                    <a:lstStyle/>
+                    <a:p>
+                      <a:pPr marL="0" marR="0" lvl="0" indent="0" algn="l" defTabSz="914400" rtl="0" eaLnBrk="1" fontAlgn="auto" latinLnBrk="0" hangingPunct="1">
+                        <a:lnSpc>
+                          <a:spcPct val="100000"/>
+                        </a:lnSpc>
+                        <a:spcBef>
+                          <a:spcPts val="0"/>
+                        </a:spcBef>
+                        <a:spcAft>
+                          <a:spcPts val="0"/>
+                        </a:spcAft>
+                        <a:buClrTx/>
+                        <a:buSzTx/>
+                        <a:buFontTx/>
+                        <a:buNone/>
+                        <a:tabLst/>
+                        <a:defRPr/>
+                      </a:pPr>
+                      <a:r>
+                        <a:rPr lang="en-GB" sz="800" dirty="0"/>
+                        <a:t>Obj_amcd_K9_lvl3</a:t>
+                      </a:r>
+                    </a:p>
+                    <a:p>
+                      <a:endParaRPr lang="en-GB" sz="800" dirty="0"/>
+                    </a:p>
+                  </a:txBody>
+                  <a:tcPr/>
+                </a:tc>
+                <a:tc>
+                  <a:txBody>
+                    <a:bodyPr/>
+                    <a:lstStyle/>
+                    <a:p>
+                      <a:pPr marL="0" indent="0">
+                        <a:buNone/>
+                      </a:pPr>
+                      <a:endParaRPr lang="en-GB" sz="800" dirty="0"/>
+                    </a:p>
+                  </a:txBody>
+                  <a:tcPr/>
+                </a:tc>
+                <a:tc>
+                  <a:txBody>
+                    <a:bodyPr/>
+                    <a:lstStyle/>
+                    <a:p>
+                      <a:pPr marL="0" indent="0">
+                        <a:buNone/>
+                      </a:pPr>
+                      <a:endParaRPr lang="en-GB" sz="800" dirty="0"/>
+                    </a:p>
+                  </a:txBody>
+                  <a:tcPr/>
+                </a:tc>
+                <a:extLst>
+                  <a:ext uri="{0D108BD9-81ED-4DB2-BD59-A6C34878D82A}">
+                    <a16:rowId xmlns:a16="http://schemas.microsoft.com/office/drawing/2014/main" val="2370588301"/>
+                  </a:ext>
+                </a:extLst>
+              </a:tr>
+              <a:tr h="0">
+                <a:tc>
+                  <a:txBody>
+                    <a:bodyPr/>
+                    <a:lstStyle/>
+                    <a:p>
+                      <a:r>
+                        <a:rPr lang="en-GB" sz="800" dirty="0"/>
+                        <a:t>184.</a:t>
+                      </a:r>
+                    </a:p>
+                  </a:txBody>
+                  <a:tcPr/>
+                </a:tc>
+                <a:tc>
+                  <a:txBody>
+                    <a:bodyPr/>
+                    <a:lstStyle/>
+                    <a:p>
+                      <a:pPr marL="0" marR="0" lvl="0" indent="0" algn="l" defTabSz="914400" rtl="0" eaLnBrk="1" fontAlgn="auto" latinLnBrk="0" hangingPunct="1">
+                        <a:lnSpc>
+                          <a:spcPct val="100000"/>
+                        </a:lnSpc>
+                        <a:spcBef>
+                          <a:spcPts val="0"/>
+                        </a:spcBef>
+                        <a:spcAft>
+                          <a:spcPts val="0"/>
+                        </a:spcAft>
+                        <a:buClrTx/>
+                        <a:buSzTx/>
+                        <a:buFontTx/>
+                        <a:buNone/>
+                        <a:tabLst/>
+                        <a:defRPr/>
+                      </a:pPr>
+                      <a:r>
+                        <a:rPr lang="en-GB" sz="800" dirty="0"/>
+                        <a:t>Level 5 K9 Jump-scare</a:t>
+                      </a:r>
+                    </a:p>
+                    <a:p>
+                      <a:endParaRPr lang="en-GB" sz="800" dirty="0"/>
+                    </a:p>
+                  </a:txBody>
+                  <a:tcPr/>
+                </a:tc>
+                <a:tc>
+                  <a:txBody>
+                    <a:bodyPr/>
+                    <a:lstStyle/>
+                    <a:p>
+                      <a:pPr marL="0" marR="0" lvl="0" indent="0" algn="l" defTabSz="914400" rtl="0" eaLnBrk="1" fontAlgn="auto" latinLnBrk="0" hangingPunct="1">
+                        <a:lnSpc>
+                          <a:spcPct val="100000"/>
+                        </a:lnSpc>
+                        <a:spcBef>
+                          <a:spcPts val="0"/>
+                        </a:spcBef>
+                        <a:spcAft>
+                          <a:spcPts val="0"/>
+                        </a:spcAft>
+                        <a:buClrTx/>
+                        <a:buSzTx/>
+                        <a:buFontTx/>
+                        <a:buNone/>
+                        <a:tabLst/>
+                        <a:defRPr/>
+                      </a:pPr>
+                      <a:r>
+                        <a:rPr lang="en-GB" sz="800" dirty="0"/>
+                        <a:t>Rm_level5</a:t>
+                      </a:r>
+                    </a:p>
+                    <a:p>
+                      <a:endParaRPr lang="en-GB" sz="800" dirty="0"/>
+                    </a:p>
+                  </a:txBody>
+                  <a:tcPr/>
+                </a:tc>
+                <a:tc>
+                  <a:txBody>
+                    <a:bodyPr/>
+                    <a:lstStyle/>
+                    <a:p>
+                      <a:pPr marL="0" marR="0" lvl="0" indent="0" algn="l" defTabSz="914400" rtl="0" eaLnBrk="1" fontAlgn="auto" latinLnBrk="0" hangingPunct="1">
+                        <a:lnSpc>
+                          <a:spcPct val="100000"/>
+                        </a:lnSpc>
+                        <a:spcBef>
+                          <a:spcPts val="0"/>
+                        </a:spcBef>
+                        <a:spcAft>
+                          <a:spcPts val="0"/>
+                        </a:spcAft>
+                        <a:buClrTx/>
+                        <a:buSzTx/>
+                        <a:buFontTx/>
+                        <a:buNone/>
+                        <a:tabLst/>
+                        <a:defRPr/>
+                      </a:pPr>
+                      <a:r>
+                        <a:rPr lang="en-GB" sz="800" dirty="0"/>
+                        <a:t>Obj_</a:t>
+                      </a:r>
+                      <a:r>
+                        <a:rPr lang="en-GB" sz="800"/>
+                        <a:t>amcd_K9_</a:t>
+                      </a:r>
+                      <a:r>
+                        <a:rPr lang="en-GB" sz="800" dirty="0"/>
+                        <a:t>lvl5</a:t>
+                      </a:r>
+                    </a:p>
+                    <a:p>
+                      <a:endParaRPr lang="en-GB" sz="800" dirty="0"/>
+                    </a:p>
+                  </a:txBody>
+                  <a:tcPr/>
+                </a:tc>
+                <a:tc>
+                  <a:txBody>
+                    <a:bodyPr/>
+                    <a:lstStyle/>
+                    <a:p>
+                      <a:pPr marL="0" indent="0">
+                        <a:buNone/>
+                      </a:pPr>
+                      <a:endParaRPr lang="en-GB" sz="800" dirty="0"/>
+                    </a:p>
+                  </a:txBody>
+                  <a:tcPr/>
+                </a:tc>
+                <a:tc>
+                  <a:txBody>
+                    <a:bodyPr/>
+                    <a:lstStyle/>
+                    <a:p>
+                      <a:pPr marL="0" indent="0">
+                        <a:buNone/>
+                      </a:pPr>
+                      <a:endParaRPr lang="en-GB" sz="800" dirty="0"/>
+                    </a:p>
+                  </a:txBody>
+                  <a:tcPr/>
+                </a:tc>
+                <a:extLst>
+                  <a:ext uri="{0D108BD9-81ED-4DB2-BD59-A6C34878D82A}">
+                    <a16:rowId xmlns:a16="http://schemas.microsoft.com/office/drawing/2014/main" val="931270710"/>
+                  </a:ext>
+                </a:extLst>
+              </a:tr>
+            </a:tbl>
+          </a:graphicData>
+        </a:graphic>
+      </p:graphicFrame>
+      <p:sp>
+        <p:nvSpPr>
+          <p:cNvPr id="2" name="TextBox 1">
+            <a:extLst>
+              <a:ext uri="{FF2B5EF4-FFF2-40B4-BE49-F238E27FC236}">
+                <a16:creationId xmlns:a16="http://schemas.microsoft.com/office/drawing/2014/main" id="{40A6145E-AB49-AC7C-5F67-AF57F7C57408}"/>
+              </a:ext>
+            </a:extLst>
+          </p:cNvPr>
+          <p:cNvSpPr txBox="1"/>
+          <p:nvPr/>
+        </p:nvSpPr>
+        <p:spPr>
+          <a:xfrm>
+            <a:off x="0" y="22553"/>
+            <a:ext cx="3332964" cy="369332"/>
+          </a:xfrm>
+          <a:prstGeom prst="rect">
+            <a:avLst/>
+          </a:prstGeom>
+          <a:noFill/>
+        </p:spPr>
+        <p:txBody>
+          <a:bodyPr wrap="none" rtlCol="0">
+            <a:spAutoFit/>
+          </a:bodyPr>
+          <a:lstStyle/>
+          <a:p>
+            <a:r>
+              <a:rPr lang="en-GB" dirty="0"/>
+              <a:t>Level 1,2,3,5 </a:t>
+            </a:r>
+            <a:r>
+              <a:rPr lang="en-GB" dirty="0" err="1"/>
+              <a:t>Gwiber</a:t>
+            </a:r>
+            <a:r>
+              <a:rPr lang="en-GB" dirty="0"/>
+              <a:t> </a:t>
+            </a:r>
+            <a:r>
+              <a:rPr lang="en-GB" dirty="0" err="1"/>
+              <a:t>Jumpscare</a:t>
+            </a:r>
+            <a:endParaRPr lang="en-GB" dirty="0"/>
+          </a:p>
+        </p:txBody>
+      </p:sp>
+    </p:spTree>
+    <p:extLst>
+      <p:ext uri="{BB962C8B-B14F-4D97-AF65-F5344CB8AC3E}">
+        <p14:creationId xmlns:p14="http://schemas.microsoft.com/office/powerpoint/2010/main" val="3552625136"/>
+      </p:ext>
+    </p:extLst>
+  </p:cSld>
+  <p:clrMapOvr>
+    <a:masterClrMapping/>
+  </p:clrMapOvr>
+</p:sld>
+</file>
+
+<file path=ppt/slides/slide42.xml><?xml version="1.0" encoding="utf-8"?>
+<p:sld xmlns:a="http://schemas.openxmlformats.org/drawingml/2006/main" xmlns:r="http://schemas.openxmlformats.org/officeDocument/2006/relationships" xmlns:p="http://schemas.openxmlformats.org/presentationml/2006/main">
+  <p:cSld>
+    <p:spTree>
+      <p:nvGrpSpPr>
+        <p:cNvPr id="1" name="">
+          <a:extLst>
+            <a:ext uri="{FF2B5EF4-FFF2-40B4-BE49-F238E27FC236}">
+              <a16:creationId xmlns:a16="http://schemas.microsoft.com/office/drawing/2014/main" id="{D286B2B6-B1AB-D99C-0D98-1D4F397DDCCF}"/>
+            </a:ext>
+          </a:extLst>
+        </p:cNvPr>
+        <p:cNvGrpSpPr/>
+        <p:nvPr/>
+      </p:nvGrpSpPr>
+      <p:grpSpPr>
+        <a:xfrm>
+          <a:off x="0" y="0"/>
+          <a:ext cx="0" cy="0"/>
+          <a:chOff x="0" y="0"/>
+          <a:chExt cx="0" cy="0"/>
+        </a:xfrm>
+      </p:grpSpPr>
+      <p:graphicFrame>
+        <p:nvGraphicFramePr>
+          <p:cNvPr id="4" name="Table 3">
+            <a:extLst>
+              <a:ext uri="{FF2B5EF4-FFF2-40B4-BE49-F238E27FC236}">
+                <a16:creationId xmlns:a16="http://schemas.microsoft.com/office/drawing/2014/main" id="{9F0C7B34-6443-A9C9-D4A9-17962F0EB530}"/>
+              </a:ext>
+            </a:extLst>
+          </p:cNvPr>
+          <p:cNvGraphicFramePr>
+            <a:graphicFrameLocks noGrp="1"/>
+          </p:cNvGraphicFramePr>
+          <p:nvPr/>
+        </p:nvGraphicFramePr>
+        <p:xfrm>
+          <a:off x="114301" y="391885"/>
+          <a:ext cx="11204571" cy="2344231"/>
+        </p:xfrm>
+        <a:graphic>
+          <a:graphicData uri="http://schemas.openxmlformats.org/drawingml/2006/table">
+            <a:tbl>
+              <a:tblPr firstRow="1" bandRow="1">
+                <a:tableStyleId>{5C22544A-7EE6-4342-B048-85BDC9FD1C3A}</a:tableStyleId>
+              </a:tblPr>
+              <a:tblGrid>
+                <a:gridCol w="798830">
+                  <a:extLst>
+                    <a:ext uri="{9D8B030D-6E8A-4147-A177-3AD203B41FA5}">
+                      <a16:colId xmlns:a16="http://schemas.microsoft.com/office/drawing/2014/main" val="2041145262"/>
+                    </a:ext>
+                  </a:extLst>
+                </a:gridCol>
+                <a:gridCol w="1647254">
+                  <a:extLst>
+                    <a:ext uri="{9D8B030D-6E8A-4147-A177-3AD203B41FA5}">
+                      <a16:colId xmlns:a16="http://schemas.microsoft.com/office/drawing/2014/main" val="3102287305"/>
+                    </a:ext>
+                  </a:extLst>
+                </a:gridCol>
+                <a:gridCol w="612955">
+                  <a:extLst>
+                    <a:ext uri="{9D8B030D-6E8A-4147-A177-3AD203B41FA5}">
+                      <a16:colId xmlns:a16="http://schemas.microsoft.com/office/drawing/2014/main" val="4080696647"/>
+                    </a:ext>
+                  </a:extLst>
+                </a:gridCol>
+                <a:gridCol w="1752897">
+                  <a:extLst>
+                    <a:ext uri="{9D8B030D-6E8A-4147-A177-3AD203B41FA5}">
+                      <a16:colId xmlns:a16="http://schemas.microsoft.com/office/drawing/2014/main" val="132880537"/>
+                    </a:ext>
+                  </a:extLst>
+                </a:gridCol>
+                <a:gridCol w="4519688">
+                  <a:extLst>
+                    <a:ext uri="{9D8B030D-6E8A-4147-A177-3AD203B41FA5}">
+                      <a16:colId xmlns:a16="http://schemas.microsoft.com/office/drawing/2014/main" val="786884226"/>
+                    </a:ext>
+                  </a:extLst>
+                </a:gridCol>
+                <a:gridCol w="1872947">
+                  <a:extLst>
+                    <a:ext uri="{9D8B030D-6E8A-4147-A177-3AD203B41FA5}">
+                      <a16:colId xmlns:a16="http://schemas.microsoft.com/office/drawing/2014/main" val="3328467923"/>
+                    </a:ext>
+                  </a:extLst>
+                </a:gridCol>
+              </a:tblGrid>
+              <a:tr h="470623">
+                <a:tc>
+                  <a:txBody>
+                    <a:bodyPr/>
+                    <a:lstStyle/>
+                    <a:p>
+                      <a:r>
+                        <a:rPr lang="en-GB" sz="800" dirty="0"/>
+                        <a:t>Test Number</a:t>
+                      </a:r>
+                    </a:p>
+                  </a:txBody>
+                  <a:tcPr/>
+                </a:tc>
+                <a:tc>
+                  <a:txBody>
+                    <a:bodyPr/>
+                    <a:lstStyle/>
+                    <a:p>
+                      <a:r>
+                        <a:rPr lang="en-GB" sz="800"/>
+                        <a:t>Test Type</a:t>
+                      </a:r>
+                      <a:endParaRPr lang="en-GB" sz="800" dirty="0"/>
+                    </a:p>
+                  </a:txBody>
+                  <a:tcPr/>
+                </a:tc>
+                <a:tc>
+                  <a:txBody>
+                    <a:bodyPr/>
+                    <a:lstStyle/>
+                    <a:p>
+                      <a:r>
+                        <a:rPr lang="en-GB" sz="800"/>
+                        <a:t>Room</a:t>
+                      </a:r>
+                      <a:endParaRPr lang="en-GB" sz="800" dirty="0"/>
+                    </a:p>
+                  </a:txBody>
+                  <a:tcPr/>
+                </a:tc>
+                <a:tc>
+                  <a:txBody>
+                    <a:bodyPr/>
+                    <a:lstStyle/>
+                    <a:p>
+                      <a:r>
+                        <a:rPr lang="en-GB" sz="800"/>
+                        <a:t>Objects Involved</a:t>
+                      </a:r>
+                      <a:endParaRPr lang="en-GB" sz="800" dirty="0"/>
+                    </a:p>
+                  </a:txBody>
+                  <a:tcPr/>
+                </a:tc>
+                <a:tc>
+                  <a:txBody>
+                    <a:bodyPr/>
+                    <a:lstStyle/>
+                    <a:p>
+                      <a:r>
+                        <a:rPr lang="en-GB" sz="800"/>
+                        <a:t>Expected Outcome</a:t>
+                      </a:r>
+                      <a:endParaRPr lang="en-GB" sz="800" dirty="0"/>
+                    </a:p>
+                  </a:txBody>
+                  <a:tcPr/>
+                </a:tc>
+                <a:tc>
+                  <a:txBody>
+                    <a:bodyPr/>
+                    <a:lstStyle/>
+                    <a:p>
+                      <a:r>
+                        <a:rPr lang="en-GB" sz="800"/>
+                        <a:t>Actual Outcome</a:t>
+                      </a:r>
+                      <a:endParaRPr lang="en-GB" sz="800" dirty="0"/>
+                    </a:p>
+                  </a:txBody>
+                  <a:tcPr/>
+                </a:tc>
+                <a:extLst>
+                  <a:ext uri="{0D108BD9-81ED-4DB2-BD59-A6C34878D82A}">
+                    <a16:rowId xmlns:a16="http://schemas.microsoft.com/office/drawing/2014/main" val="1296324342"/>
+                  </a:ext>
+                </a:extLst>
+              </a:tr>
+              <a:tr h="475162">
+                <a:tc>
+                  <a:txBody>
+                    <a:bodyPr/>
+                    <a:lstStyle/>
+                    <a:p>
+                      <a:r>
+                        <a:rPr lang="en-GB" sz="800" dirty="0"/>
+                        <a:t>181.</a:t>
+                      </a:r>
+                    </a:p>
+                  </a:txBody>
+                  <a:tcPr/>
+                </a:tc>
+                <a:tc>
+                  <a:txBody>
+                    <a:bodyPr/>
+                    <a:lstStyle/>
+                    <a:p>
+                      <a:r>
+                        <a:rPr lang="en-GB" sz="800" dirty="0"/>
+                        <a:t>Level 1 </a:t>
+                      </a:r>
+                      <a:r>
+                        <a:rPr lang="en-GB" sz="800" dirty="0" err="1"/>
+                        <a:t>Gwiber</a:t>
+                      </a:r>
+                      <a:r>
+                        <a:rPr lang="en-GB" sz="800" dirty="0"/>
+                        <a:t> Jump-scare</a:t>
+                      </a:r>
+                    </a:p>
+                  </a:txBody>
+                  <a:tcPr/>
+                </a:tc>
+                <a:tc>
+                  <a:txBody>
+                    <a:bodyPr/>
+                    <a:lstStyle/>
+                    <a:p>
+                      <a:r>
+                        <a:rPr lang="en-GB" sz="800" dirty="0"/>
+                        <a:t>Rm_level1</a:t>
+                      </a:r>
+                    </a:p>
+                  </a:txBody>
+                  <a:tcPr/>
+                </a:tc>
+                <a:tc>
+                  <a:txBody>
+                    <a:bodyPr/>
+                    <a:lstStyle/>
+                    <a:p>
+                      <a:r>
+                        <a:rPr lang="en-GB" sz="800" dirty="0" err="1"/>
+                        <a:t>Obj_amcd_gwiber</a:t>
+                      </a:r>
+                      <a:endParaRPr lang="en-GB" sz="800" dirty="0"/>
+                    </a:p>
+                  </a:txBody>
+                  <a:tcPr/>
+                </a:tc>
+                <a:tc>
+                  <a:txBody>
+                    <a:bodyPr/>
+                    <a:lstStyle/>
+                    <a:p>
+                      <a:pPr marL="0" marR="0" lvl="0" indent="0" algn="l" defTabSz="914400" rtl="0" eaLnBrk="1" fontAlgn="auto" latinLnBrk="0" hangingPunct="1">
+                        <a:lnSpc>
+                          <a:spcPct val="100000"/>
+                        </a:lnSpc>
+                        <a:spcBef>
+                          <a:spcPts val="0"/>
+                        </a:spcBef>
+                        <a:spcAft>
+                          <a:spcPts val="0"/>
+                        </a:spcAft>
+                        <a:buClrTx/>
+                        <a:buSzTx/>
+                        <a:buFontTx/>
+                        <a:buNone/>
+                        <a:tabLst/>
+                        <a:defRPr/>
+                      </a:pPr>
+                      <a:endParaRPr lang="en-GB" sz="800" dirty="0"/>
+                    </a:p>
+                  </a:txBody>
+                  <a:tcPr/>
+                </a:tc>
+                <a:tc>
+                  <a:txBody>
+                    <a:bodyPr/>
+                    <a:lstStyle/>
+                    <a:p>
+                      <a:endParaRPr lang="en-GB" sz="800" dirty="0"/>
+                    </a:p>
+                  </a:txBody>
+                  <a:tcPr/>
+                </a:tc>
+                <a:extLst>
+                  <a:ext uri="{0D108BD9-81ED-4DB2-BD59-A6C34878D82A}">
+                    <a16:rowId xmlns:a16="http://schemas.microsoft.com/office/drawing/2014/main" val="289599235"/>
+                  </a:ext>
+                </a:extLst>
+              </a:tr>
+              <a:tr h="470623">
+                <a:tc>
+                  <a:txBody>
+                    <a:bodyPr/>
+                    <a:lstStyle/>
+                    <a:p>
+                      <a:r>
+                        <a:rPr lang="en-GB" sz="800" dirty="0"/>
+                        <a:t>182.</a:t>
+                      </a:r>
+                    </a:p>
+                  </a:txBody>
+                  <a:tcPr/>
+                </a:tc>
+                <a:tc>
+                  <a:txBody>
+                    <a:bodyPr/>
+                    <a:lstStyle/>
+                    <a:p>
+                      <a:pPr marL="0" marR="0" lvl="0" indent="0" algn="l" defTabSz="914400" rtl="0" eaLnBrk="1" fontAlgn="auto" latinLnBrk="0" hangingPunct="1">
+                        <a:lnSpc>
+                          <a:spcPct val="100000"/>
+                        </a:lnSpc>
+                        <a:spcBef>
+                          <a:spcPts val="0"/>
+                        </a:spcBef>
+                        <a:spcAft>
+                          <a:spcPts val="0"/>
+                        </a:spcAft>
+                        <a:buClrTx/>
+                        <a:buSzTx/>
+                        <a:buFontTx/>
+                        <a:buNone/>
+                        <a:tabLst/>
+                        <a:defRPr/>
+                      </a:pPr>
+                      <a:r>
+                        <a:rPr lang="en-GB" sz="800" dirty="0"/>
+                        <a:t>Level 2 </a:t>
+                      </a:r>
+                      <a:r>
+                        <a:rPr lang="en-GB" sz="800" dirty="0" err="1"/>
+                        <a:t>Gwiber</a:t>
+                      </a:r>
+                      <a:r>
+                        <a:rPr lang="en-GB" sz="800" dirty="0"/>
+                        <a:t> Jump-scare</a:t>
+                      </a:r>
+                    </a:p>
+                    <a:p>
+                      <a:endParaRPr lang="en-GB" sz="800" dirty="0"/>
+                    </a:p>
+                  </a:txBody>
+                  <a:tcPr/>
+                </a:tc>
+                <a:tc>
+                  <a:txBody>
+                    <a:bodyPr/>
+                    <a:lstStyle/>
+                    <a:p>
+                      <a:pPr marL="0" marR="0" lvl="0" indent="0" algn="l" defTabSz="914400" rtl="0" eaLnBrk="1" fontAlgn="auto" latinLnBrk="0" hangingPunct="1">
+                        <a:lnSpc>
+                          <a:spcPct val="100000"/>
+                        </a:lnSpc>
+                        <a:spcBef>
+                          <a:spcPts val="0"/>
+                        </a:spcBef>
+                        <a:spcAft>
+                          <a:spcPts val="0"/>
+                        </a:spcAft>
+                        <a:buClrTx/>
+                        <a:buSzTx/>
+                        <a:buFontTx/>
+                        <a:buNone/>
+                        <a:tabLst/>
+                        <a:defRPr/>
+                      </a:pPr>
+                      <a:r>
+                        <a:rPr lang="en-GB" sz="800" dirty="0"/>
+                        <a:t>Rm_level2</a:t>
+                      </a:r>
+                    </a:p>
+                    <a:p>
+                      <a:endParaRPr lang="en-GB" sz="800" dirty="0"/>
+                    </a:p>
+                  </a:txBody>
+                  <a:tcPr/>
+                </a:tc>
+                <a:tc>
+                  <a:txBody>
+                    <a:bodyPr/>
+                    <a:lstStyle/>
+                    <a:p>
+                      <a:r>
+                        <a:rPr lang="en-GB" sz="800" dirty="0"/>
+                        <a:t>Obj_amcd_gwiber_lvl2</a:t>
+                      </a:r>
+                    </a:p>
+                  </a:txBody>
+                  <a:tcPr/>
+                </a:tc>
+                <a:tc>
+                  <a:txBody>
+                    <a:bodyPr/>
+                    <a:lstStyle/>
+                    <a:p>
+                      <a:pPr marL="0" indent="0">
+                        <a:buNone/>
+                      </a:pPr>
+                      <a:endParaRPr lang="en-GB" sz="800" dirty="0"/>
+                    </a:p>
+                  </a:txBody>
+                  <a:tcPr/>
+                </a:tc>
+                <a:tc>
+                  <a:txBody>
+                    <a:bodyPr/>
+                    <a:lstStyle/>
+                    <a:p>
+                      <a:pPr marL="0" indent="0">
+                        <a:buNone/>
+                      </a:pPr>
+                      <a:endParaRPr lang="en-GB" sz="800" dirty="0"/>
+                    </a:p>
+                  </a:txBody>
+                  <a:tcPr/>
+                </a:tc>
+                <a:extLst>
+                  <a:ext uri="{0D108BD9-81ED-4DB2-BD59-A6C34878D82A}">
+                    <a16:rowId xmlns:a16="http://schemas.microsoft.com/office/drawing/2014/main" val="4163288784"/>
+                  </a:ext>
+                </a:extLst>
+              </a:tr>
+              <a:tr h="470623">
+                <a:tc>
+                  <a:txBody>
+                    <a:bodyPr/>
+                    <a:lstStyle/>
+                    <a:p>
+                      <a:r>
+                        <a:rPr lang="en-GB" sz="800" dirty="0"/>
+                        <a:t>183.</a:t>
+                      </a:r>
+                    </a:p>
+                  </a:txBody>
+                  <a:tcPr/>
+                </a:tc>
+                <a:tc>
+                  <a:txBody>
+                    <a:bodyPr/>
+                    <a:lstStyle/>
+                    <a:p>
+                      <a:pPr marL="0" marR="0" lvl="0" indent="0" algn="l" defTabSz="914400" rtl="0" eaLnBrk="1" fontAlgn="auto" latinLnBrk="0" hangingPunct="1">
+                        <a:lnSpc>
+                          <a:spcPct val="100000"/>
+                        </a:lnSpc>
+                        <a:spcBef>
+                          <a:spcPts val="0"/>
+                        </a:spcBef>
+                        <a:spcAft>
+                          <a:spcPts val="0"/>
+                        </a:spcAft>
+                        <a:buClrTx/>
+                        <a:buSzTx/>
+                        <a:buFontTx/>
+                        <a:buNone/>
+                        <a:tabLst/>
+                        <a:defRPr/>
+                      </a:pPr>
+                      <a:r>
+                        <a:rPr lang="en-GB" sz="800" dirty="0"/>
+                        <a:t>Level 3 </a:t>
+                      </a:r>
+                      <a:r>
+                        <a:rPr lang="en-GB" sz="800" dirty="0" err="1"/>
+                        <a:t>Gwiber</a:t>
+                      </a:r>
+                      <a:r>
+                        <a:rPr lang="en-GB" sz="800" dirty="0"/>
+                        <a:t> Jump-scare</a:t>
+                      </a:r>
+                    </a:p>
+                    <a:p>
+                      <a:endParaRPr lang="en-GB" sz="800" dirty="0"/>
+                    </a:p>
+                  </a:txBody>
+                  <a:tcPr/>
+                </a:tc>
+                <a:tc>
+                  <a:txBody>
+                    <a:bodyPr/>
+                    <a:lstStyle/>
+                    <a:p>
+                      <a:pPr marL="0" marR="0" lvl="0" indent="0" algn="l" defTabSz="914400" rtl="0" eaLnBrk="1" fontAlgn="auto" latinLnBrk="0" hangingPunct="1">
+                        <a:lnSpc>
+                          <a:spcPct val="100000"/>
+                        </a:lnSpc>
+                        <a:spcBef>
+                          <a:spcPts val="0"/>
+                        </a:spcBef>
+                        <a:spcAft>
+                          <a:spcPts val="0"/>
+                        </a:spcAft>
+                        <a:buClrTx/>
+                        <a:buSzTx/>
+                        <a:buFontTx/>
+                        <a:buNone/>
+                        <a:tabLst/>
+                        <a:defRPr/>
+                      </a:pPr>
+                      <a:r>
+                        <a:rPr lang="en-GB" sz="800" dirty="0"/>
+                        <a:t>Rm_level3</a:t>
+                      </a:r>
+                    </a:p>
+                    <a:p>
+                      <a:endParaRPr lang="en-GB" sz="800" dirty="0"/>
+                    </a:p>
+                  </a:txBody>
+                  <a:tcPr/>
+                </a:tc>
+                <a:tc>
+                  <a:txBody>
+                    <a:bodyPr/>
+                    <a:lstStyle/>
+                    <a:p>
+                      <a:pPr marL="0" marR="0" lvl="0" indent="0" algn="l" defTabSz="914400" rtl="0" eaLnBrk="1" fontAlgn="auto" latinLnBrk="0" hangingPunct="1">
+                        <a:lnSpc>
+                          <a:spcPct val="100000"/>
+                        </a:lnSpc>
+                        <a:spcBef>
+                          <a:spcPts val="0"/>
+                        </a:spcBef>
+                        <a:spcAft>
+                          <a:spcPts val="0"/>
+                        </a:spcAft>
+                        <a:buClrTx/>
+                        <a:buSzTx/>
+                        <a:buFontTx/>
+                        <a:buNone/>
+                        <a:tabLst/>
+                        <a:defRPr/>
+                      </a:pPr>
+                      <a:r>
+                        <a:rPr lang="en-GB" sz="800" dirty="0"/>
+                        <a:t>Obj_amcd_gwiber_lvl3</a:t>
+                      </a:r>
+                    </a:p>
+                    <a:p>
+                      <a:endParaRPr lang="en-GB" sz="800" dirty="0"/>
+                    </a:p>
+                  </a:txBody>
+                  <a:tcPr/>
+                </a:tc>
+                <a:tc>
+                  <a:txBody>
+                    <a:bodyPr/>
+                    <a:lstStyle/>
+                    <a:p>
+                      <a:pPr marL="0" indent="0">
+                        <a:buNone/>
+                      </a:pPr>
+                      <a:endParaRPr lang="en-GB" sz="800" dirty="0"/>
+                    </a:p>
+                  </a:txBody>
+                  <a:tcPr/>
+                </a:tc>
+                <a:tc>
+                  <a:txBody>
+                    <a:bodyPr/>
+                    <a:lstStyle/>
+                    <a:p>
+                      <a:pPr marL="0" indent="0">
+                        <a:buNone/>
+                      </a:pPr>
+                      <a:endParaRPr lang="en-GB" sz="800" dirty="0"/>
+                    </a:p>
+                  </a:txBody>
+                  <a:tcPr/>
+                </a:tc>
+                <a:extLst>
+                  <a:ext uri="{0D108BD9-81ED-4DB2-BD59-A6C34878D82A}">
+                    <a16:rowId xmlns:a16="http://schemas.microsoft.com/office/drawing/2014/main" val="2370588301"/>
+                  </a:ext>
+                </a:extLst>
+              </a:tr>
+              <a:tr h="0">
+                <a:tc>
+                  <a:txBody>
+                    <a:bodyPr/>
+                    <a:lstStyle/>
+                    <a:p>
+                      <a:r>
+                        <a:rPr lang="en-GB" sz="800" dirty="0"/>
+                        <a:t>184.</a:t>
+                      </a:r>
+                    </a:p>
+                  </a:txBody>
+                  <a:tcPr/>
+                </a:tc>
+                <a:tc>
+                  <a:txBody>
+                    <a:bodyPr/>
+                    <a:lstStyle/>
+                    <a:p>
+                      <a:pPr marL="0" marR="0" lvl="0" indent="0" algn="l" defTabSz="914400" rtl="0" eaLnBrk="1" fontAlgn="auto" latinLnBrk="0" hangingPunct="1">
+                        <a:lnSpc>
+                          <a:spcPct val="100000"/>
+                        </a:lnSpc>
+                        <a:spcBef>
+                          <a:spcPts val="0"/>
+                        </a:spcBef>
+                        <a:spcAft>
+                          <a:spcPts val="0"/>
+                        </a:spcAft>
+                        <a:buClrTx/>
+                        <a:buSzTx/>
+                        <a:buFontTx/>
+                        <a:buNone/>
+                        <a:tabLst/>
+                        <a:defRPr/>
+                      </a:pPr>
+                      <a:r>
+                        <a:rPr lang="en-GB" sz="800" dirty="0"/>
+                        <a:t>Level 5 </a:t>
+                      </a:r>
+                      <a:r>
+                        <a:rPr lang="en-GB" sz="800" dirty="0" err="1"/>
+                        <a:t>Gwiber</a:t>
+                      </a:r>
+                      <a:r>
+                        <a:rPr lang="en-GB" sz="800" dirty="0"/>
+                        <a:t> Jump-scare</a:t>
+                      </a:r>
+                    </a:p>
+                    <a:p>
+                      <a:endParaRPr lang="en-GB" sz="800" dirty="0"/>
+                    </a:p>
+                  </a:txBody>
+                  <a:tcPr/>
+                </a:tc>
+                <a:tc>
+                  <a:txBody>
+                    <a:bodyPr/>
+                    <a:lstStyle/>
+                    <a:p>
+                      <a:pPr marL="0" marR="0" lvl="0" indent="0" algn="l" defTabSz="914400" rtl="0" eaLnBrk="1" fontAlgn="auto" latinLnBrk="0" hangingPunct="1">
+                        <a:lnSpc>
+                          <a:spcPct val="100000"/>
+                        </a:lnSpc>
+                        <a:spcBef>
+                          <a:spcPts val="0"/>
+                        </a:spcBef>
+                        <a:spcAft>
+                          <a:spcPts val="0"/>
+                        </a:spcAft>
+                        <a:buClrTx/>
+                        <a:buSzTx/>
+                        <a:buFontTx/>
+                        <a:buNone/>
+                        <a:tabLst/>
+                        <a:defRPr/>
+                      </a:pPr>
+                      <a:r>
+                        <a:rPr lang="en-GB" sz="800" dirty="0"/>
+                        <a:t>Rm_level5</a:t>
+                      </a:r>
+                    </a:p>
+                    <a:p>
+                      <a:endParaRPr lang="en-GB" sz="800" dirty="0"/>
+                    </a:p>
+                  </a:txBody>
+                  <a:tcPr/>
+                </a:tc>
+                <a:tc>
+                  <a:txBody>
+                    <a:bodyPr/>
+                    <a:lstStyle/>
+                    <a:p>
+                      <a:pPr marL="0" marR="0" lvl="0" indent="0" algn="l" defTabSz="914400" rtl="0" eaLnBrk="1" fontAlgn="auto" latinLnBrk="0" hangingPunct="1">
+                        <a:lnSpc>
+                          <a:spcPct val="100000"/>
+                        </a:lnSpc>
+                        <a:spcBef>
+                          <a:spcPts val="0"/>
+                        </a:spcBef>
+                        <a:spcAft>
+                          <a:spcPts val="0"/>
+                        </a:spcAft>
+                        <a:buClrTx/>
+                        <a:buSzTx/>
+                        <a:buFontTx/>
+                        <a:buNone/>
+                        <a:tabLst/>
+                        <a:defRPr/>
+                      </a:pPr>
+                      <a:r>
+                        <a:rPr lang="en-GB" sz="800" dirty="0"/>
+                        <a:t>Obj_amcd_gwiber_lvl5</a:t>
+                      </a:r>
+                    </a:p>
+                    <a:p>
+                      <a:endParaRPr lang="en-GB" sz="800" dirty="0"/>
+                    </a:p>
+                  </a:txBody>
+                  <a:tcPr/>
+                </a:tc>
+                <a:tc>
+                  <a:txBody>
+                    <a:bodyPr/>
+                    <a:lstStyle/>
+                    <a:p>
+                      <a:pPr marL="0" indent="0">
+                        <a:buNone/>
+                      </a:pPr>
+                      <a:endParaRPr lang="en-GB" sz="800" dirty="0"/>
+                    </a:p>
+                  </a:txBody>
+                  <a:tcPr/>
+                </a:tc>
+                <a:tc>
+                  <a:txBody>
+                    <a:bodyPr/>
+                    <a:lstStyle/>
+                    <a:p>
+                      <a:pPr marL="0" indent="0">
+                        <a:buNone/>
+                      </a:pPr>
+                      <a:endParaRPr lang="en-GB" sz="800" dirty="0"/>
+                    </a:p>
+                  </a:txBody>
+                  <a:tcPr/>
+                </a:tc>
+                <a:extLst>
+                  <a:ext uri="{0D108BD9-81ED-4DB2-BD59-A6C34878D82A}">
+                    <a16:rowId xmlns:a16="http://schemas.microsoft.com/office/drawing/2014/main" val="931270710"/>
+                  </a:ext>
+                </a:extLst>
+              </a:tr>
+            </a:tbl>
+          </a:graphicData>
+        </a:graphic>
+      </p:graphicFrame>
+      <p:sp>
+        <p:nvSpPr>
+          <p:cNvPr id="2" name="TextBox 1">
+            <a:extLst>
+              <a:ext uri="{FF2B5EF4-FFF2-40B4-BE49-F238E27FC236}">
+                <a16:creationId xmlns:a16="http://schemas.microsoft.com/office/drawing/2014/main" id="{1FC0086C-1CA6-97C3-0AD3-9758F6FB3716}"/>
+              </a:ext>
+            </a:extLst>
+          </p:cNvPr>
+          <p:cNvSpPr txBox="1"/>
+          <p:nvPr/>
+        </p:nvSpPr>
+        <p:spPr>
+          <a:xfrm>
+            <a:off x="0" y="22553"/>
+            <a:ext cx="3332964" cy="369332"/>
+          </a:xfrm>
+          <a:prstGeom prst="rect">
+            <a:avLst/>
+          </a:prstGeom>
+          <a:noFill/>
+        </p:spPr>
+        <p:txBody>
+          <a:bodyPr wrap="none" rtlCol="0">
+            <a:spAutoFit/>
+          </a:bodyPr>
+          <a:lstStyle/>
+          <a:p>
+            <a:r>
+              <a:rPr lang="en-GB" dirty="0"/>
+              <a:t>Level 1,2,3,5 </a:t>
+            </a:r>
+            <a:r>
+              <a:rPr lang="en-GB" dirty="0" err="1"/>
+              <a:t>Gwiber</a:t>
+            </a:r>
+            <a:r>
+              <a:rPr lang="en-GB" dirty="0"/>
+              <a:t> </a:t>
+            </a:r>
+            <a:r>
+              <a:rPr lang="en-GB" dirty="0" err="1"/>
+              <a:t>Jumpscare</a:t>
+            </a:r>
+            <a:endParaRPr lang="en-GB" dirty="0"/>
+          </a:p>
+        </p:txBody>
+      </p:sp>
+    </p:spTree>
+    <p:extLst>
+      <p:ext uri="{BB962C8B-B14F-4D97-AF65-F5344CB8AC3E}">
+        <p14:creationId xmlns:p14="http://schemas.microsoft.com/office/powerpoint/2010/main" val="2722602794"/>
+      </p:ext>
+    </p:extLst>
+  </p:cSld>
+  <p:clrMapOvr>
+    <a:masterClrMapping/>
+  </p:clrMapOvr>
+</p:sld>
+</file>
+
+<file path=ppt/slides/slide43.xml><?xml version="1.0" encoding="utf-8"?>
+<p:sld xmlns:a="http://schemas.openxmlformats.org/drawingml/2006/main" xmlns:r="http://schemas.openxmlformats.org/officeDocument/2006/relationships" xmlns:p="http://schemas.openxmlformats.org/presentationml/2006/main">
+  <p:cSld>
+    <p:spTree>
+      <p:nvGrpSpPr>
+        <p:cNvPr id="1" name=""/>
+        <p:cNvGrpSpPr/>
+        <p:nvPr/>
+      </p:nvGrpSpPr>
+      <p:grpSpPr>
+        <a:xfrm>
+          <a:off x="0" y="0"/>
+          <a:ext cx="0" cy="0"/>
+          <a:chOff x="0" y="0"/>
+          <a:chExt cx="0" cy="0"/>
+        </a:xfrm>
+      </p:grpSpPr>
+    </p:spTree>
+    <p:extLst>
+      <p:ext uri="{BB962C8B-B14F-4D97-AF65-F5344CB8AC3E}">
+        <p14:creationId xmlns:p14="http://schemas.microsoft.com/office/powerpoint/2010/main" val="2975898861"/>
       </p:ext>
     </p:extLst>
   </p:cSld>
@@ -41446,4 +46616,319 @@
     </a:ext>
   </a:extLst>
 </a:theme>
+</file>
+
+<file path=ppt/theme/theme2.xml><?xml version="1.0" encoding="utf-8"?>
+<a:theme xmlns:a="http://schemas.openxmlformats.org/drawingml/2006/main" name="Office Theme">
+  <a:themeElements>
+    <a:clrScheme name="Office">
+      <a:dk1>
+        <a:sysClr val="windowText" lastClr="000000"/>
+      </a:dk1>
+      <a:lt1>
+        <a:sysClr val="window" lastClr="FFFFFF"/>
+      </a:lt1>
+      <a:dk2>
+        <a:srgbClr val="0E2841"/>
+      </a:dk2>
+      <a:lt2>
+        <a:srgbClr val="E8E8E8"/>
+      </a:lt2>
+      <a:accent1>
+        <a:srgbClr val="156082"/>
+      </a:accent1>
+      <a:accent2>
+        <a:srgbClr val="E97132"/>
+      </a:accent2>
+      <a:accent3>
+        <a:srgbClr val="196B24"/>
+      </a:accent3>
+      <a:accent4>
+        <a:srgbClr val="0F9ED5"/>
+      </a:accent4>
+      <a:accent5>
+        <a:srgbClr val="A02B93"/>
+      </a:accent5>
+      <a:accent6>
+        <a:srgbClr val="4EA72E"/>
+      </a:accent6>
+      <a:hlink>
+        <a:srgbClr val="467886"/>
+      </a:hlink>
+      <a:folHlink>
+        <a:srgbClr val="96607D"/>
+      </a:folHlink>
+    </a:clrScheme>
+    <a:fontScheme name="Office">
+      <a:majorFont>
+        <a:latin typeface="Aptos Display" panose="02110004020202020204"/>
+        <a:ea typeface=""/>
+        <a:cs typeface=""/>
+        <a:font script="Jpan" typeface="游ゴシック Light"/>
+        <a:font script="Hang" typeface="맑은 고딕"/>
+        <a:font script="Hans" typeface="等线 Light"/>
+        <a:font script="Hant" typeface="新細明體"/>
+        <a:font script="Arab" typeface="Times New Roman"/>
+        <a:font script="Hebr" typeface="Times New Roman"/>
+        <a:font script="Thai" typeface="Angsana New"/>
+        <a:font script="Ethi" typeface="Nyala"/>
+        <a:font script="Beng" typeface="Vrinda"/>
+        <a:font script="Gujr" typeface="Shruti"/>
+        <a:font script="Khmr" typeface="MoolBoran"/>
+        <a:font script="Knda" typeface="Tunga"/>
+        <a:font script="Guru" typeface="Raavi"/>
+        <a:font script="Cans" typeface="Euphemia"/>
+        <a:font script="Cher" typeface="Plantagenet Cherokee"/>
+        <a:font script="Yiii" typeface="Microsoft Yi Baiti"/>
+        <a:font script="Tibt" typeface="Microsoft Himalaya"/>
+        <a:font script="Thaa" typeface="MV Boli"/>
+        <a:font script="Deva" typeface="Mangal"/>
+        <a:font script="Telu" typeface="Gautami"/>
+        <a:font script="Taml" typeface="Latha"/>
+        <a:font script="Syrc" typeface="Estrangelo Edessa"/>
+        <a:font script="Orya" typeface="Kalinga"/>
+        <a:font script="Mlym" typeface="Kartika"/>
+        <a:font script="Laoo" typeface="DokChampa"/>
+        <a:font script="Sinh" typeface="Iskoola Pota"/>
+        <a:font script="Mong" typeface="Mongolian Baiti"/>
+        <a:font script="Viet" typeface="Times New Roman"/>
+        <a:font script="Uigh" typeface="Microsoft Uighur"/>
+        <a:font script="Geor" typeface="Sylfaen"/>
+        <a:font script="Armn" typeface="Arial"/>
+        <a:font script="Bugi" typeface="Leelawadee UI"/>
+        <a:font script="Bopo" typeface="Microsoft JhengHei"/>
+        <a:font script="Java" typeface="Javanese Text"/>
+        <a:font script="Lisu" typeface="Segoe UI"/>
+        <a:font script="Mymr" typeface="Myanmar Text"/>
+        <a:font script="Nkoo" typeface="Ebrima"/>
+        <a:font script="Olck" typeface="Nirmala UI"/>
+        <a:font script="Osma" typeface="Ebrima"/>
+        <a:font script="Phag" typeface="Phagspa"/>
+        <a:font script="Syrn" typeface="Estrangelo Edessa"/>
+        <a:font script="Syrj" typeface="Estrangelo Edessa"/>
+        <a:font script="Syre" typeface="Estrangelo Edessa"/>
+        <a:font script="Sora" typeface="Nirmala UI"/>
+        <a:font script="Tale" typeface="Microsoft Tai Le"/>
+        <a:font script="Talu" typeface="Microsoft New Tai Lue"/>
+        <a:font script="Tfng" typeface="Ebrima"/>
+      </a:majorFont>
+      <a:minorFont>
+        <a:latin typeface="Aptos" panose="02110004020202020204"/>
+        <a:ea typeface=""/>
+        <a:cs typeface=""/>
+        <a:font script="Jpan" typeface="游ゴシック"/>
+        <a:font script="Hang" typeface="맑은 고딕"/>
+        <a:font script="Hans" typeface="等线"/>
+        <a:font script="Hant" typeface="新細明體"/>
+        <a:font script="Arab" typeface="Arial"/>
+        <a:font script="Hebr" typeface="Arial"/>
+        <a:font script="Thai" typeface="Cordia New"/>
+        <a:font script="Ethi" typeface="Nyala"/>
+        <a:font script="Beng" typeface="Vrinda"/>
+        <a:font script="Gujr" typeface="Shruti"/>
+        <a:font script="Khmr" typeface="DaunPenh"/>
+        <a:font script="Knda" typeface="Tunga"/>
+        <a:font script="Guru" typeface="Raavi"/>
+        <a:font script="Cans" typeface="Euphemia"/>
+        <a:font script="Cher" typeface="Plantagenet Cherokee"/>
+        <a:font script="Yiii" typeface="Microsoft Yi Baiti"/>
+        <a:font script="Tibt" typeface="Microsoft Himalaya"/>
+        <a:font script="Thaa" typeface="MV Boli"/>
+        <a:font script="Deva" typeface="Mangal"/>
+        <a:font script="Telu" typeface="Gautami"/>
+        <a:font script="Taml" typeface="Latha"/>
+        <a:font script="Syrc" typeface="Estrangelo Edessa"/>
+        <a:font script="Orya" typeface="Kalinga"/>
+        <a:font script="Mlym" typeface="Kartika"/>
+        <a:font script="Laoo" typeface="DokChampa"/>
+        <a:font script="Sinh" typeface="Iskoola Pota"/>
+        <a:font script="Mong" typeface="Mongolian Baiti"/>
+        <a:font script="Viet" typeface="Arial"/>
+        <a:font script="Uigh" typeface="Microsoft Uighur"/>
+        <a:font script="Geor" typeface="Sylfaen"/>
+        <a:font script="Armn" typeface="Arial"/>
+        <a:font script="Bugi" typeface="Leelawadee UI"/>
+        <a:font script="Bopo" typeface="Microsoft JhengHei"/>
+        <a:font script="Java" typeface="Javanese Text"/>
+        <a:font script="Lisu" typeface="Segoe UI"/>
+        <a:font script="Mymr" typeface="Myanmar Text"/>
+        <a:font script="Nkoo" typeface="Ebrima"/>
+        <a:font script="Olck" typeface="Nirmala UI"/>
+        <a:font script="Osma" typeface="Ebrima"/>
+        <a:font script="Phag" typeface="Phagspa"/>
+        <a:font script="Syrn" typeface="Estrangelo Edessa"/>
+        <a:font script="Syrj" typeface="Estrangelo Edessa"/>
+        <a:font script="Syre" typeface="Estrangelo Edessa"/>
+        <a:font script="Sora" typeface="Nirmala UI"/>
+        <a:font script="Tale" typeface="Microsoft Tai Le"/>
+        <a:font script="Talu" typeface="Microsoft New Tai Lue"/>
+        <a:font script="Tfng" typeface="Ebrima"/>
+      </a:minorFont>
+    </a:fontScheme>
+    <a:fmtScheme name="Office">
+      <a:fillStyleLst>
+        <a:solidFill>
+          <a:schemeClr val="phClr"/>
+        </a:solidFill>
+        <a:gradFill rotWithShape="1">
+          <a:gsLst>
+            <a:gs pos="0">
+              <a:schemeClr val="phClr">
+                <a:lumMod val="110000"/>
+                <a:satMod val="105000"/>
+                <a:tint val="67000"/>
+              </a:schemeClr>
+            </a:gs>
+            <a:gs pos="50000">
+              <a:schemeClr val="phClr">
+                <a:lumMod val="105000"/>
+                <a:satMod val="103000"/>
+                <a:tint val="73000"/>
+              </a:schemeClr>
+            </a:gs>
+            <a:gs pos="100000">
+              <a:schemeClr val="phClr">
+                <a:lumMod val="105000"/>
+                <a:satMod val="109000"/>
+                <a:tint val="81000"/>
+              </a:schemeClr>
+            </a:gs>
+          </a:gsLst>
+          <a:lin ang="5400000" scaled="0"/>
+        </a:gradFill>
+        <a:gradFill rotWithShape="1">
+          <a:gsLst>
+            <a:gs pos="0">
+              <a:schemeClr val="phClr">
+                <a:satMod val="103000"/>
+                <a:lumMod val="102000"/>
+                <a:tint val="94000"/>
+              </a:schemeClr>
+            </a:gs>
+            <a:gs pos="50000">
+              <a:schemeClr val="phClr">
+                <a:satMod val="110000"/>
+                <a:lumMod val="100000"/>
+                <a:shade val="100000"/>
+              </a:schemeClr>
+            </a:gs>
+            <a:gs pos="100000">
+              <a:schemeClr val="phClr">
+                <a:lumMod val="99000"/>
+                <a:satMod val="120000"/>
+                <a:shade val="78000"/>
+              </a:schemeClr>
+            </a:gs>
+          </a:gsLst>
+          <a:lin ang="5400000" scaled="0"/>
+        </a:gradFill>
+      </a:fillStyleLst>
+      <a:lnStyleLst>
+        <a:ln w="12700" cap="flat" cmpd="sng" algn="ctr">
+          <a:solidFill>
+            <a:schemeClr val="phClr"/>
+          </a:solidFill>
+          <a:prstDash val="solid"/>
+          <a:miter lim="800000"/>
+        </a:ln>
+        <a:ln w="19050" cap="flat" cmpd="sng" algn="ctr">
+          <a:solidFill>
+            <a:schemeClr val="phClr"/>
+          </a:solidFill>
+          <a:prstDash val="solid"/>
+          <a:miter lim="800000"/>
+        </a:ln>
+        <a:ln w="25400" cap="flat" cmpd="sng" algn="ctr">
+          <a:solidFill>
+            <a:schemeClr val="phClr"/>
+          </a:solidFill>
+          <a:prstDash val="solid"/>
+          <a:miter lim="800000"/>
+        </a:ln>
+      </a:lnStyleLst>
+      <a:effectStyleLst>
+        <a:effectStyle>
+          <a:effectLst/>
+        </a:effectStyle>
+        <a:effectStyle>
+          <a:effectLst/>
+        </a:effectStyle>
+        <a:effectStyle>
+          <a:effectLst>
+            <a:outerShdw blurRad="57150" dist="19050" dir="5400000" algn="ctr" rotWithShape="0">
+              <a:srgbClr val="000000">
+                <a:alpha val="63000"/>
+              </a:srgbClr>
+            </a:outerShdw>
+          </a:effectLst>
+        </a:effectStyle>
+      </a:effectStyleLst>
+      <a:bgFillStyleLst>
+        <a:solidFill>
+          <a:schemeClr val="phClr"/>
+        </a:solidFill>
+        <a:solidFill>
+          <a:schemeClr val="phClr">
+            <a:tint val="95000"/>
+            <a:satMod val="170000"/>
+          </a:schemeClr>
+        </a:solidFill>
+        <a:gradFill rotWithShape="1">
+          <a:gsLst>
+            <a:gs pos="0">
+              <a:schemeClr val="phClr">
+                <a:tint val="93000"/>
+                <a:satMod val="150000"/>
+                <a:shade val="98000"/>
+                <a:lumMod val="102000"/>
+              </a:schemeClr>
+            </a:gs>
+            <a:gs pos="50000">
+              <a:schemeClr val="phClr">
+                <a:tint val="98000"/>
+                <a:satMod val="130000"/>
+                <a:shade val="90000"/>
+                <a:lumMod val="103000"/>
+              </a:schemeClr>
+            </a:gs>
+            <a:gs pos="100000">
+              <a:schemeClr val="phClr">
+                <a:shade val="63000"/>
+                <a:satMod val="120000"/>
+              </a:schemeClr>
+            </a:gs>
+          </a:gsLst>
+          <a:lin ang="5400000" scaled="0"/>
+        </a:gradFill>
+      </a:bgFillStyleLst>
+    </a:fmtScheme>
+  </a:themeElements>
+  <a:objectDefaults>
+    <a:lnDef>
+      <a:spPr/>
+      <a:bodyPr/>
+      <a:lstStyle/>
+      <a:style>
+        <a:lnRef idx="2">
+          <a:schemeClr val="accent1"/>
+        </a:lnRef>
+        <a:fillRef idx="0">
+          <a:schemeClr val="accent1"/>
+        </a:fillRef>
+        <a:effectRef idx="1">
+          <a:schemeClr val="accent1"/>
+        </a:effectRef>
+        <a:fontRef idx="minor">
+          <a:schemeClr val="tx1"/>
+        </a:fontRef>
+      </a:style>
+    </a:lnDef>
+  </a:objectDefaults>
+  <a:extraClrSchemeLst/>
+  <a:extLst>
+    <a:ext uri="{05A4C25C-085E-4340-85A3-A5531E510DB2}">
+      <thm15:themeFamily xmlns:thm15="http://schemas.microsoft.com/office/thememl/2012/main" name="Office Theme" id="{2E142A2C-CD16-42D6-873A-C26D2A0506FA}" vid="{1BDDFF52-6CD6-40A5-AB3C-68EB2F1E4D0A}"/>
+    </a:ext>
+  </a:extLst>
+</a:theme>
 </file>